--- a/content/05-teaching-resources/slides/core/19-employer-set-project-overview.pptx
+++ b/content/05-teaching-resources/slides/core/19-employer-set-project-overview.pptx
@@ -16,6 +16,12 @@
     <p:sldId id="264" r:id="rId16"/>
     <p:sldId id="265" r:id="rId17"/>
     <p:sldId id="266" r:id="rId18"/>
+    <p:sldId id="267" r:id="rId19"/>
+    <p:sldId id="268" r:id="rId20"/>
+    <p:sldId id="269" r:id="rId21"/>
+    <p:sldId id="270" r:id="rId22"/>
+    <p:sldId id="271" r:id="rId23"/>
+    <p:sldId id="272" r:id="rId24"/>
   </p:sldIdLst>
   <p:sldSz cx="12191695" cy="6858000" type="screen4x3"/>
   <p:notesSz cx="6858000" cy="9144000"/>
@@ -512,7 +518,22 @@
           <a:lstStyle/>
           <a:p>
             <a:r>
-              <a:t>Simulations are usually Cisco Packet Tracer files.</a:t>
+              <a:t>Answers:</a:t>
+            </a:r>
+          </a:p>
+          <a:p>
+            <a:r>
+              <a:t>1. 20%.</a:t>
+            </a:r>
+          </a:p>
+          <a:p>
+            <a:r>
+              <a:t>2. Three.</a:t>
+            </a:r>
+          </a:p>
+          <a:p>
+            <a:r>
+              <a:t>3. No, it's externally set and marked.</a:t>
             </a:r>
           </a:p>
         </p:txBody>
@@ -582,7 +603,22 @@
           <a:lstStyle/>
           <a:p>
             <a:r>
-              <a:t>Give students a few minutes to answer on mini whiteboards or paper, then reveal the answers on the next slide.</a:t>
+              <a:t>Answers:</a:t>
+            </a:r>
+          </a:p>
+          <a:p>
+            <a:r>
+              <a:t>1. A Gantt chart, a resource and cost plan, and a rationale.</a:t>
+            </a:r>
+          </a:p>
+          <a:p>
+            <a:r>
+              <a:t>2. No.</a:t>
+            </a:r>
+          </a:p>
+          <a:p>
+            <a:r>
+              <a:t>3. A reflective evaluation against the brief.</a:t>
             </a:r>
           </a:p>
         </p:txBody>
@@ -652,7 +688,7 @@
           <a:lstStyle/>
           <a:p>
             <a:r>
-              <a:t>Talk through any answers the class found difficult.</a:t>
+              <a:t>Simulations are usually Cisco Packet Tracer files.</a:t>
             </a:r>
           </a:p>
         </p:txBody>
@@ -722,7 +758,22 @@
           <a:lstStyle/>
           <a:p>
             <a:r>
-              <a:t>Build a small network with a wrong gateway, a wrong subnet mask and a shut-down switch port.</a:t>
+              <a:t>Answers:</a:t>
+            </a:r>
+          </a:p>
+          <a:p>
+            <a:r>
+              <a:t>1. Robustness, security, organisation, user experience.</a:t>
+            </a:r>
+          </a:p>
+          <a:p>
+            <a:r>
+              <a:t>2. E.g. redundant links, backups, UPS.</a:t>
+            </a:r>
+          </a:p>
+          <a:p>
+            <a:r>
+              <a:t>3. It divides the network logically and makes it easier to manage.</a:t>
             </a:r>
           </a:p>
         </p:txBody>
@@ -748,6 +799,216 @@
 </file>
 
 <file path=ppt/notesSlides/notesSlide5.xml><?xml version="1.0" encoding="utf-8"?>
+<p:notes xmlns:a="http://schemas.openxmlformats.org/drawingml/2006/main" xmlns:p="http://schemas.openxmlformats.org/presentationml/2006/main" xmlns:r="http://schemas.openxmlformats.org/officeDocument/2006/relationships">
+  <p:cSld>
+    <p:spTree>
+      <p:nvGrpSpPr>
+        <p:cNvPr id="1" name=""/>
+        <p:cNvGrpSpPr/>
+        <p:nvPr/>
+      </p:nvGrpSpPr>
+      <p:grpSpPr>
+        <a:xfrm>
+          <a:off x="0" y="0"/>
+          <a:ext cx="0" cy="0"/>
+          <a:chOff x="0" y="0"/>
+          <a:chExt cx="0" cy="0"/>
+        </a:xfrm>
+      </p:grpSpPr>
+      <p:sp>
+        <p:nvSpPr>
+          <p:cNvPr id="2" name="Slide Image Placeholder 1"/>
+          <p:cNvSpPr>
+            <a:spLocks noGrp="1"/>
+          </p:cNvSpPr>
+          <p:nvPr>
+            <p:ph type="sldImg" idx="2"/>
+          </p:nvPr>
+        </p:nvSpPr>
+        <p:spPr/>
+      </p:sp>
+      <p:sp>
+        <p:nvSpPr>
+          <p:cNvPr id="3" name="Notes Placeholder 2"/>
+          <p:cNvSpPr>
+            <a:spLocks noGrp="1"/>
+          </p:cNvSpPr>
+          <p:nvPr>
+            <p:ph type="body" idx="3" sz="quarter"/>
+          </p:nvPr>
+        </p:nvSpPr>
+        <p:spPr/>
+        <p:txBody>
+          <a:bodyPr/>
+          <a:lstStyle/>
+          <a:p>
+            <a:r>
+              <a:t>Give students a few minutes to answer on mini whiteboards or paper, then reveal the answers on the next slide.</a:t>
+            </a:r>
+          </a:p>
+        </p:txBody>
+      </p:sp>
+      <p:sp>
+        <p:nvSpPr>
+          <p:cNvPr id="4" name="Slide Number Placeholder 3"/>
+          <p:cNvSpPr>
+            <a:spLocks noGrp="1"/>
+          </p:cNvSpPr>
+          <p:nvPr>
+            <p:ph type="sldNum" idx="5" sz="quarter"/>
+          </p:nvPr>
+        </p:nvSpPr>
+        <p:spPr/>
+      </p:sp>
+    </p:spTree>
+  </p:cSld>
+  <p:clrMapOvr>
+    <a:masterClrMapping/>
+  </p:clrMapOvr>
+</p:notes>
+</file>
+
+<file path=ppt/notesSlides/notesSlide6.xml><?xml version="1.0" encoding="utf-8"?>
+<p:notes xmlns:a="http://schemas.openxmlformats.org/drawingml/2006/main" xmlns:p="http://schemas.openxmlformats.org/presentationml/2006/main" xmlns:r="http://schemas.openxmlformats.org/officeDocument/2006/relationships">
+  <p:cSld>
+    <p:spTree>
+      <p:nvGrpSpPr>
+        <p:cNvPr id="1" name=""/>
+        <p:cNvGrpSpPr/>
+        <p:nvPr/>
+      </p:nvGrpSpPr>
+      <p:grpSpPr>
+        <a:xfrm>
+          <a:off x="0" y="0"/>
+          <a:ext cx="0" cy="0"/>
+          <a:chOff x="0" y="0"/>
+          <a:chExt cx="0" cy="0"/>
+        </a:xfrm>
+      </p:grpSpPr>
+      <p:sp>
+        <p:nvSpPr>
+          <p:cNvPr id="2" name="Slide Image Placeholder 1"/>
+          <p:cNvSpPr>
+            <a:spLocks noGrp="1"/>
+          </p:cNvSpPr>
+          <p:nvPr>
+            <p:ph type="sldImg" idx="2"/>
+          </p:nvPr>
+        </p:nvSpPr>
+        <p:spPr/>
+      </p:sp>
+      <p:sp>
+        <p:nvSpPr>
+          <p:cNvPr id="3" name="Notes Placeholder 2"/>
+          <p:cNvSpPr>
+            <a:spLocks noGrp="1"/>
+          </p:cNvSpPr>
+          <p:nvPr>
+            <p:ph type="body" idx="3" sz="quarter"/>
+          </p:nvPr>
+        </p:nvSpPr>
+        <p:spPr/>
+        <p:txBody>
+          <a:bodyPr/>
+          <a:lstStyle/>
+          <a:p>
+            <a:r>
+              <a:t>Talk through any answers the class found difficult.</a:t>
+            </a:r>
+          </a:p>
+        </p:txBody>
+      </p:sp>
+      <p:sp>
+        <p:nvSpPr>
+          <p:cNvPr id="4" name="Slide Number Placeholder 3"/>
+          <p:cNvSpPr>
+            <a:spLocks noGrp="1"/>
+          </p:cNvSpPr>
+          <p:nvPr>
+            <p:ph type="sldNum" idx="5" sz="quarter"/>
+          </p:nvPr>
+        </p:nvSpPr>
+        <p:spPr/>
+      </p:sp>
+    </p:spTree>
+  </p:cSld>
+  <p:clrMapOvr>
+    <a:masterClrMapping/>
+  </p:clrMapOvr>
+</p:notes>
+</file>
+
+<file path=ppt/notesSlides/notesSlide7.xml><?xml version="1.0" encoding="utf-8"?>
+<p:notes xmlns:a="http://schemas.openxmlformats.org/drawingml/2006/main" xmlns:p="http://schemas.openxmlformats.org/presentationml/2006/main" xmlns:r="http://schemas.openxmlformats.org/officeDocument/2006/relationships">
+  <p:cSld>
+    <p:spTree>
+      <p:nvGrpSpPr>
+        <p:cNvPr id="1" name=""/>
+        <p:cNvGrpSpPr/>
+        <p:nvPr/>
+      </p:nvGrpSpPr>
+      <p:grpSpPr>
+        <a:xfrm>
+          <a:off x="0" y="0"/>
+          <a:ext cx="0" cy="0"/>
+          <a:chOff x="0" y="0"/>
+          <a:chExt cx="0" cy="0"/>
+        </a:xfrm>
+      </p:grpSpPr>
+      <p:sp>
+        <p:nvSpPr>
+          <p:cNvPr id="2" name="Slide Image Placeholder 1"/>
+          <p:cNvSpPr>
+            <a:spLocks noGrp="1"/>
+          </p:cNvSpPr>
+          <p:nvPr>
+            <p:ph type="sldImg" idx="2"/>
+          </p:nvPr>
+        </p:nvSpPr>
+        <p:spPr/>
+      </p:sp>
+      <p:sp>
+        <p:nvSpPr>
+          <p:cNvPr id="3" name="Notes Placeholder 2"/>
+          <p:cNvSpPr>
+            <a:spLocks noGrp="1"/>
+          </p:cNvSpPr>
+          <p:nvPr>
+            <p:ph type="body" idx="3" sz="quarter"/>
+          </p:nvPr>
+        </p:nvSpPr>
+        <p:spPr/>
+        <p:txBody>
+          <a:bodyPr/>
+          <a:lstStyle/>
+          <a:p>
+            <a:r>
+              <a:t>Build a small network with a wrong gateway, a wrong subnet mask and a shut-down switch port.</a:t>
+            </a:r>
+          </a:p>
+        </p:txBody>
+      </p:sp>
+      <p:sp>
+        <p:nvSpPr>
+          <p:cNvPr id="4" name="Slide Number Placeholder 3"/>
+          <p:cNvSpPr>
+            <a:spLocks noGrp="1"/>
+          </p:cNvSpPr>
+          <p:nvPr>
+            <p:ph type="sldNum" idx="5" sz="quarter"/>
+          </p:nvPr>
+        </p:nvSpPr>
+        <p:spPr/>
+      </p:sp>
+    </p:spTree>
+  </p:cSld>
+  <p:clrMapOvr>
+    <a:masterClrMapping/>
+  </p:clrMapOvr>
+</p:notes>
+</file>
+
+<file path=ppt/notesSlides/notesSlide8.xml><?xml version="1.0" encoding="utf-8"?>
 <p:notes xmlns:a="http://schemas.openxmlformats.org/drawingml/2006/main" xmlns:p="http://schemas.openxmlformats.org/presentationml/2006/main" xmlns:r="http://schemas.openxmlformats.org/officeDocument/2006/relationships">
   <p:cSld>
     <p:spTree>
@@ -4196,7 +4457,7 @@
                 </a:solidFill>
                 <a:latin typeface="Cambria"/>
               </a:rPr>
-              <a:t>Activity: Mini ESP: Task 2 practice</a:t>
+              <a:t>What Task 4a looks for</a:t>
             </a:r>
           </a:p>
         </p:txBody>
@@ -4263,6 +4524,3231 @@
                 <a:latin typeface="Calibri"/>
               </a:rPr>
               <a:t>10</a:t>
+            </a:r>
+          </a:p>
+        </p:txBody>
+      </p:sp>
+      <p:sp>
+        <p:nvSpPr>
+          <p:cNvPr id="6" name="TextBox 5"/>
+          <p:cNvSpPr txBox="1"/>
+          <p:nvPr/>
+        </p:nvSpPr>
+        <p:spPr>
+          <a:xfrm>
+            <a:off x="548640" y="1554480"/>
+            <a:ext cx="6720840" cy="4617720"/>
+          </a:xfrm>
+          <a:prstGeom prst="rect">
+            <a:avLst/>
+          </a:prstGeom>
+          <a:noFill/>
+        </p:spPr>
+        <p:txBody>
+          <a:bodyPr wrap="square" lIns="0" rIns="0" tIns="0" bIns="0">
+            <a:spAutoFit/>
+          </a:bodyPr>
+          <a:lstStyle/>
+          <a:p>
+            <a:pPr>
+              <a:spcAft>
+                <a:spcPts val="1140"/>
+              </a:spcAft>
+            </a:pPr>
+            <a:r>
+              <a:rPr sz="1900" b="0">
+                <a:solidFill>
+                  <a:srgbClr val="202122"/>
+                </a:solidFill>
+                <a:latin typeface="Calibri"/>
+              </a:rPr>
+              <a:t>In Task 4a you build your solution, and markers look for four qualities.</a:t>
+            </a:r>
+          </a:p>
+          <a:p>
+            <a:pPr>
+              <a:spcAft>
+                <a:spcPts val="1140"/>
+              </a:spcAft>
+            </a:pPr>
+            <a:r>
+              <a:rPr sz="1900" b="1">
+                <a:solidFill>
+                  <a:srgbClr val="202122"/>
+                </a:solidFill>
+                <a:latin typeface="Calibri"/>
+              </a:rPr>
+              <a:t>Robustness:</a:t>
+            </a:r>
+            <a:r>
+              <a:rPr sz="1900" b="0">
+                <a:solidFill>
+                  <a:srgbClr val="202122"/>
+                </a:solidFill>
+                <a:latin typeface="Calibri"/>
+              </a:rPr>
+              <a:t> will it survive failures? Think redundancy, backups, fallback routes and uninterruptible power supplies.</a:t>
+            </a:r>
+          </a:p>
+          <a:p>
+            <a:pPr>
+              <a:spcAft>
+                <a:spcPts val="1140"/>
+              </a:spcAft>
+            </a:pPr>
+            <a:r>
+              <a:rPr sz="1900" b="1">
+                <a:solidFill>
+                  <a:srgbClr val="202122"/>
+                </a:solidFill>
+                <a:latin typeface="Calibri"/>
+              </a:rPr>
+              <a:t>Security:</a:t>
+            </a:r>
+            <a:r>
+              <a:rPr sz="1900" b="0">
+                <a:solidFill>
+                  <a:srgbClr val="202122"/>
+                </a:solidFill>
+                <a:latin typeface="Calibri"/>
+              </a:rPr>
+              <a:t> anti-malware and firewall configuration, appropriate user roles and permissions, device hardening and air gaps where needed.</a:t>
+            </a:r>
+          </a:p>
+          <a:p>
+            <a:pPr>
+              <a:spcAft>
+                <a:spcPts val="1140"/>
+              </a:spcAft>
+            </a:pPr>
+            <a:r>
+              <a:rPr sz="1900" b="1">
+                <a:solidFill>
+                  <a:srgbClr val="202122"/>
+                </a:solidFill>
+                <a:latin typeface="Calibri"/>
+              </a:rPr>
+              <a:t>Organisation:</a:t>
+            </a:r>
+            <a:r>
+              <a:rPr sz="1900" b="0">
+                <a:solidFill>
+                  <a:srgbClr val="202122"/>
+                </a:solidFill>
+                <a:latin typeface="Calibri"/>
+              </a:rPr>
+              <a:t> well-configured servers, sensible placement of devices, the right connection media and correct subnetting.</a:t>
+            </a:r>
+          </a:p>
+          <a:p>
+            <a:pPr>
+              <a:spcAft>
+                <a:spcPts val="1140"/>
+              </a:spcAft>
+            </a:pPr>
+            <a:r>
+              <a:rPr sz="1900" b="1">
+                <a:solidFill>
+                  <a:srgbClr val="202122"/>
+                </a:solidFill>
+                <a:latin typeface="Calibri"/>
+              </a:rPr>
+              <a:t>User experience:</a:t>
+            </a:r>
+            <a:r>
+              <a:rPr sz="1900" b="0">
+                <a:solidFill>
+                  <a:srgbClr val="202122"/>
+                </a:solidFill>
+                <a:latin typeface="Calibri"/>
+              </a:rPr>
+              <a:t> suitable end-user devices, reliable connections and good access to the systems people need.</a:t>
+            </a:r>
+          </a:p>
+        </p:txBody>
+      </p:sp>
+      <p:sp>
+        <p:nvSpPr>
+          <p:cNvPr id="7" name="Rounded Rectangle 6"/>
+          <p:cNvSpPr/>
+          <p:nvPr/>
+        </p:nvSpPr>
+        <p:spPr>
+          <a:xfrm>
+            <a:off x="7772400" y="1554480"/>
+            <a:ext cx="3867912" cy="4526280"/>
+          </a:xfrm>
+          <a:prstGeom prst="roundRect">
+            <a:avLst>
+              <a:gd name="adj" fmla="val 8000"/>
+            </a:avLst>
+          </a:prstGeom>
+          <a:solidFill>
+            <a:srgbClr val="03306E"/>
+          </a:solidFill>
+          <a:ln>
+            <a:noFill/>
+          </a:ln>
+          <a:effectLst/>
+        </p:spPr>
+        <p:style>
+          <a:lnRef idx="1">
+            <a:schemeClr val="accent1"/>
+          </a:lnRef>
+          <a:fillRef idx="3">
+            <a:schemeClr val="accent1"/>
+          </a:fillRef>
+          <a:effectRef idx="2">
+            <a:schemeClr val="accent1"/>
+          </a:effectRef>
+          <a:fontRef idx="minor">
+            <a:schemeClr val="lt1"/>
+          </a:fontRef>
+        </p:style>
+        <p:txBody>
+          <a:bodyPr rtlCol="0" anchor="ctr"/>
+          <a:lstStyle/>
+          <a:p/>
+        </p:txBody>
+      </p:sp>
+      <p:sp>
+        <p:nvSpPr>
+          <p:cNvPr id="8" name="Oval 7"/>
+          <p:cNvSpPr/>
+          <p:nvPr/>
+        </p:nvSpPr>
+        <p:spPr>
+          <a:xfrm>
+            <a:off x="8046720" y="1828800"/>
+            <a:ext cx="548640" cy="548640"/>
+          </a:xfrm>
+          <a:prstGeom prst="ellipse">
+            <a:avLst/>
+          </a:prstGeom>
+          <a:solidFill>
+            <a:srgbClr val="F2B705"/>
+          </a:solidFill>
+          <a:ln>
+            <a:noFill/>
+          </a:ln>
+          <a:effectLst/>
+        </p:spPr>
+        <p:style>
+          <a:lnRef idx="1">
+            <a:schemeClr val="accent1"/>
+          </a:lnRef>
+          <a:fillRef idx="3">
+            <a:schemeClr val="accent1"/>
+          </a:fillRef>
+          <a:effectRef idx="2">
+            <a:schemeClr val="accent1"/>
+          </a:effectRef>
+          <a:fontRef idx="minor">
+            <a:schemeClr val="lt1"/>
+          </a:fontRef>
+        </p:style>
+        <p:txBody>
+          <a:bodyPr rtlCol="0" anchor="ctr" lIns="0" rIns="0" tIns="0" bIns="0"/>
+          <a:lstStyle/>
+          <a:p>
+            <a:pPr algn="ctr"/>
+            <a:r>
+              <a:rPr sz="1300" b="1">
+                <a:solidFill>
+                  <a:srgbClr val="202122"/>
+                </a:solidFill>
+                <a:latin typeface="Calibri"/>
+              </a:rPr>
+              <a:t>e.g.</a:t>
+            </a:r>
+          </a:p>
+        </p:txBody>
+      </p:sp>
+      <p:sp>
+        <p:nvSpPr>
+          <p:cNvPr id="9" name="TextBox 8"/>
+          <p:cNvSpPr txBox="1"/>
+          <p:nvPr/>
+        </p:nvSpPr>
+        <p:spPr>
+          <a:xfrm>
+            <a:off x="8046720" y="2560320"/>
+            <a:ext cx="3291840" cy="365760"/>
+          </a:xfrm>
+          <a:prstGeom prst="rect">
+            <a:avLst/>
+          </a:prstGeom>
+          <a:noFill/>
+        </p:spPr>
+        <p:txBody>
+          <a:bodyPr wrap="square" anchor="t" lIns="0" rIns="0" tIns="0" bIns="0"/>
+          <a:lstStyle/>
+          <a:p>
+            <a:pPr algn="l"/>
+            <a:r>
+              <a:rPr sz="1300" b="1" i="0">
+                <a:solidFill>
+                  <a:srgbClr val="A9C8F0"/>
+                </a:solidFill>
+                <a:latin typeface="Calibri"/>
+              </a:rPr>
+              <a:t>EXAMPLE</a:t>
+            </a:r>
+          </a:p>
+        </p:txBody>
+      </p:sp>
+      <p:sp>
+        <p:nvSpPr>
+          <p:cNvPr id="10" name="TextBox 9"/>
+          <p:cNvSpPr txBox="1"/>
+          <p:nvPr/>
+        </p:nvSpPr>
+        <p:spPr>
+          <a:xfrm>
+            <a:off x="8046720" y="2971800"/>
+            <a:ext cx="3291840" cy="2971800"/>
+          </a:xfrm>
+          <a:prstGeom prst="rect">
+            <a:avLst/>
+          </a:prstGeom>
+          <a:noFill/>
+        </p:spPr>
+        <p:txBody>
+          <a:bodyPr wrap="square" anchor="t" lIns="0" rIns="0" tIns="0" bIns="0"/>
+          <a:lstStyle/>
+          <a:p>
+            <a:pPr algn="l"/>
+            <a:r>
+              <a:rPr sz="1900" b="0" i="0">
+                <a:solidFill>
+                  <a:srgbClr val="FFFFFF"/>
+                </a:solidFill>
+                <a:latin typeface="Cambria"/>
+              </a:rPr>
+              <a:t>A strong solution adds a second link between switches (robustness), separates guest Wi-Fi on its own VLAN (security) and uses a clear IP scheme (organisation).</a:t>
+            </a:r>
+          </a:p>
+        </p:txBody>
+      </p:sp>
+    </p:spTree>
+  </p:cSld>
+  <p:clrMapOvr>
+    <a:masterClrMapping/>
+  </p:clrMapOvr>
+</p:sld>
+</file>
+
+<file path=ppt/slides/slide11.xml><?xml version="1.0" encoding="utf-8"?>
+<p:sld xmlns:a="http://schemas.openxmlformats.org/drawingml/2006/main" xmlns:p="http://schemas.openxmlformats.org/presentationml/2006/main" xmlns:r="http://schemas.openxmlformats.org/officeDocument/2006/relationships">
+  <p:cSld>
+    <p:bg>
+      <p:bgPr>
+        <a:solidFill>
+          <a:srgbClr val="FFFFFF"/>
+        </a:solidFill>
+        <a:effectLst/>
+      </p:bgPr>
+    </p:bg>
+    <p:spTree>
+      <p:nvGrpSpPr>
+        <p:cNvPr id="1" name=""/>
+        <p:cNvGrpSpPr/>
+        <p:nvPr/>
+      </p:nvGrpSpPr>
+      <p:grpSpPr/>
+      <p:sp>
+        <p:nvSpPr>
+          <p:cNvPr id="2" name="TextBox 1"/>
+          <p:cNvSpPr txBox="1"/>
+          <p:nvPr/>
+        </p:nvSpPr>
+        <p:spPr>
+          <a:xfrm>
+            <a:off x="548640" y="320040"/>
+            <a:ext cx="11094415" cy="274320"/>
+          </a:xfrm>
+          <a:prstGeom prst="rect">
+            <a:avLst/>
+          </a:prstGeom>
+          <a:noFill/>
+        </p:spPr>
+        <p:txBody>
+          <a:bodyPr wrap="square" anchor="t" lIns="0" rIns="0" tIns="0" bIns="0"/>
+          <a:lstStyle/>
+          <a:p>
+            <a:pPr algn="l"/>
+            <a:r>
+              <a:rPr sz="1100" b="1" i="0">
+                <a:solidFill>
+                  <a:srgbClr val="54595D"/>
+                </a:solidFill>
+                <a:latin typeface="Calibri"/>
+              </a:rPr>
+              <a:t>CORE COMPONENT  ·  Core Component</a:t>
+            </a:r>
+          </a:p>
+        </p:txBody>
+      </p:sp>
+      <p:sp>
+        <p:nvSpPr>
+          <p:cNvPr id="3" name="TextBox 2"/>
+          <p:cNvSpPr txBox="1"/>
+          <p:nvPr/>
+        </p:nvSpPr>
+        <p:spPr>
+          <a:xfrm>
+            <a:off x="548640" y="566928"/>
+            <a:ext cx="11094415" cy="822960"/>
+          </a:xfrm>
+          <a:prstGeom prst="rect">
+            <a:avLst/>
+          </a:prstGeom>
+          <a:noFill/>
+        </p:spPr>
+        <p:txBody>
+          <a:bodyPr wrap="square" anchor="ctr" lIns="0" rIns="0" tIns="0" bIns="0"/>
+          <a:lstStyle/>
+          <a:p>
+            <a:pPr algn="l"/>
+            <a:r>
+              <a:rPr sz="3200" b="1" i="0">
+                <a:solidFill>
+                  <a:srgbClr val="03306E"/>
+                </a:solidFill>
+                <a:latin typeface="Cambria"/>
+              </a:rPr>
+              <a:t>What Task 4a looks for</a:t>
+            </a:r>
+          </a:p>
+        </p:txBody>
+      </p:sp>
+      <p:sp>
+        <p:nvSpPr>
+          <p:cNvPr id="4" name="TextBox 3"/>
+          <p:cNvSpPr txBox="1"/>
+          <p:nvPr/>
+        </p:nvSpPr>
+        <p:spPr>
+          <a:xfrm>
+            <a:off x="548640" y="6446520"/>
+            <a:ext cx="8229600" cy="274320"/>
+          </a:xfrm>
+          <a:prstGeom prst="rect">
+            <a:avLst/>
+          </a:prstGeom>
+          <a:noFill/>
+        </p:spPr>
+        <p:txBody>
+          <a:bodyPr wrap="square" anchor="t" lIns="0" rIns="0" tIns="0" bIns="0"/>
+          <a:lstStyle/>
+          <a:p>
+            <a:pPr algn="l"/>
+            <a:r>
+              <a:rPr sz="1000" b="0" i="0">
+                <a:solidFill>
+                  <a:srgbClr val="54595D"/>
+                </a:solidFill>
+                <a:latin typeface="Calibri"/>
+              </a:rPr>
+              <a:t>Digital Support and Security T Level  ·  The Employer Set Project</a:t>
+            </a:r>
+          </a:p>
+        </p:txBody>
+      </p:sp>
+      <p:sp>
+        <p:nvSpPr>
+          <p:cNvPr id="5" name="TextBox 4"/>
+          <p:cNvSpPr txBox="1"/>
+          <p:nvPr/>
+        </p:nvSpPr>
+        <p:spPr>
+          <a:xfrm>
+            <a:off x="10728655" y="6446520"/>
+            <a:ext cx="914400" cy="274320"/>
+          </a:xfrm>
+          <a:prstGeom prst="rect">
+            <a:avLst/>
+          </a:prstGeom>
+          <a:noFill/>
+        </p:spPr>
+        <p:txBody>
+          <a:bodyPr wrap="square" anchor="t" lIns="0" rIns="0" tIns="0" bIns="0"/>
+          <a:lstStyle/>
+          <a:p>
+            <a:pPr algn="r"/>
+            <a:r>
+              <a:rPr sz="1000" b="0" i="0">
+                <a:solidFill>
+                  <a:srgbClr val="54595D"/>
+                </a:solidFill>
+                <a:latin typeface="Calibri"/>
+              </a:rPr>
+              <a:t>11</a:t>
+            </a:r>
+          </a:p>
+        </p:txBody>
+      </p:sp>
+      <p:sp>
+        <p:nvSpPr>
+          <p:cNvPr id="6" name="Rounded Rectangle 5"/>
+          <p:cNvSpPr/>
+          <p:nvPr/>
+        </p:nvSpPr>
+        <p:spPr>
+          <a:xfrm>
+            <a:off x="548640" y="1600200"/>
+            <a:ext cx="5410047" cy="2148840"/>
+          </a:xfrm>
+          <a:prstGeom prst="roundRect">
+            <a:avLst>
+              <a:gd name="adj" fmla="val 6000"/>
+            </a:avLst>
+          </a:prstGeom>
+          <a:solidFill>
+            <a:srgbClr val="EAF3FF"/>
+          </a:solidFill>
+          <a:ln>
+            <a:noFill/>
+          </a:ln>
+          <a:effectLst/>
+        </p:spPr>
+        <p:style>
+          <a:lnRef idx="1">
+            <a:schemeClr val="accent1"/>
+          </a:lnRef>
+          <a:fillRef idx="3">
+            <a:schemeClr val="accent1"/>
+          </a:fillRef>
+          <a:effectRef idx="2">
+            <a:schemeClr val="accent1"/>
+          </a:effectRef>
+          <a:fontRef idx="minor">
+            <a:schemeClr val="lt1"/>
+          </a:fontRef>
+        </p:style>
+        <p:txBody>
+          <a:bodyPr rtlCol="0" anchor="ctr"/>
+          <a:lstStyle/>
+          <a:p/>
+        </p:txBody>
+      </p:sp>
+      <p:sp>
+        <p:nvSpPr>
+          <p:cNvPr id="7" name="Oval 6"/>
+          <p:cNvSpPr/>
+          <p:nvPr/>
+        </p:nvSpPr>
+        <p:spPr>
+          <a:xfrm>
+            <a:off x="777240" y="1828800"/>
+            <a:ext cx="457200" cy="457200"/>
+          </a:xfrm>
+          <a:prstGeom prst="ellipse">
+            <a:avLst/>
+          </a:prstGeom>
+          <a:solidFill>
+            <a:srgbClr val="F2B705"/>
+          </a:solidFill>
+          <a:ln>
+            <a:noFill/>
+          </a:ln>
+          <a:effectLst/>
+        </p:spPr>
+        <p:style>
+          <a:lnRef idx="1">
+            <a:schemeClr val="accent1"/>
+          </a:lnRef>
+          <a:fillRef idx="3">
+            <a:schemeClr val="accent1"/>
+          </a:fillRef>
+          <a:effectRef idx="2">
+            <a:schemeClr val="accent1"/>
+          </a:effectRef>
+          <a:fontRef idx="minor">
+            <a:schemeClr val="lt1"/>
+          </a:fontRef>
+        </p:style>
+        <p:txBody>
+          <a:bodyPr rtlCol="0" anchor="ctr" lIns="0" rIns="0" tIns="0" bIns="0"/>
+          <a:lstStyle/>
+          <a:p>
+            <a:pPr algn="ctr"/>
+            <a:r>
+              <a:rPr sz="1500" b="1">
+                <a:solidFill>
+                  <a:srgbClr val="202122"/>
+                </a:solidFill>
+                <a:latin typeface="Calibri"/>
+              </a:rPr>
+              <a:t>1</a:t>
+            </a:r>
+          </a:p>
+        </p:txBody>
+      </p:sp>
+      <p:sp>
+        <p:nvSpPr>
+          <p:cNvPr id="8" name="TextBox 7"/>
+          <p:cNvSpPr txBox="1"/>
+          <p:nvPr/>
+        </p:nvSpPr>
+        <p:spPr>
+          <a:xfrm>
+            <a:off x="1371600" y="1801368"/>
+            <a:ext cx="4404207" cy="512064"/>
+          </a:xfrm>
+          <a:prstGeom prst="rect">
+            <a:avLst/>
+          </a:prstGeom>
+          <a:noFill/>
+        </p:spPr>
+        <p:txBody>
+          <a:bodyPr wrap="square" anchor="ctr" lIns="0" rIns="0" tIns="0" bIns="0"/>
+          <a:lstStyle/>
+          <a:p>
+            <a:pPr algn="l"/>
+            <a:r>
+              <a:rPr sz="1900" b="1" i="0">
+                <a:solidFill>
+                  <a:srgbClr val="03306E"/>
+                </a:solidFill>
+                <a:latin typeface="Calibri"/>
+              </a:rPr>
+              <a:t>Robustness</a:t>
+            </a:r>
+          </a:p>
+        </p:txBody>
+      </p:sp>
+      <p:sp>
+        <p:nvSpPr>
+          <p:cNvPr id="9" name="TextBox 8"/>
+          <p:cNvSpPr txBox="1"/>
+          <p:nvPr/>
+        </p:nvSpPr>
+        <p:spPr>
+          <a:xfrm>
+            <a:off x="777240" y="2468880"/>
+            <a:ext cx="4952847" cy="1143000"/>
+          </a:xfrm>
+          <a:prstGeom prst="rect">
+            <a:avLst/>
+          </a:prstGeom>
+          <a:noFill/>
+        </p:spPr>
+        <p:txBody>
+          <a:bodyPr wrap="square" anchor="t" lIns="0" rIns="0" tIns="0" bIns="0"/>
+          <a:lstStyle/>
+          <a:p>
+            <a:pPr algn="l"/>
+            <a:r>
+              <a:rPr sz="2000" b="0" i="0">
+                <a:solidFill>
+                  <a:srgbClr val="202122"/>
+                </a:solidFill>
+                <a:latin typeface="Calibri"/>
+              </a:rPr>
+              <a:t>Resilience and redundancy: backups, fallbacks, UPS.</a:t>
+            </a:r>
+          </a:p>
+        </p:txBody>
+      </p:sp>
+      <p:sp>
+        <p:nvSpPr>
+          <p:cNvPr id="10" name="Rounded Rectangle 9"/>
+          <p:cNvSpPr/>
+          <p:nvPr/>
+        </p:nvSpPr>
+        <p:spPr>
+          <a:xfrm>
+            <a:off x="6233007" y="1600200"/>
+            <a:ext cx="5410047" cy="2148840"/>
+          </a:xfrm>
+          <a:prstGeom prst="roundRect">
+            <a:avLst>
+              <a:gd name="adj" fmla="val 6000"/>
+            </a:avLst>
+          </a:prstGeom>
+          <a:solidFill>
+            <a:srgbClr val="EAF3FF"/>
+          </a:solidFill>
+          <a:ln>
+            <a:noFill/>
+          </a:ln>
+          <a:effectLst/>
+        </p:spPr>
+        <p:style>
+          <a:lnRef idx="1">
+            <a:schemeClr val="accent1"/>
+          </a:lnRef>
+          <a:fillRef idx="3">
+            <a:schemeClr val="accent1"/>
+          </a:fillRef>
+          <a:effectRef idx="2">
+            <a:schemeClr val="accent1"/>
+          </a:effectRef>
+          <a:fontRef idx="minor">
+            <a:schemeClr val="lt1"/>
+          </a:fontRef>
+        </p:style>
+        <p:txBody>
+          <a:bodyPr rtlCol="0" anchor="ctr"/>
+          <a:lstStyle/>
+          <a:p/>
+        </p:txBody>
+      </p:sp>
+      <p:sp>
+        <p:nvSpPr>
+          <p:cNvPr id="11" name="Oval 10"/>
+          <p:cNvSpPr/>
+          <p:nvPr/>
+        </p:nvSpPr>
+        <p:spPr>
+          <a:xfrm>
+            <a:off x="6461607" y="1828800"/>
+            <a:ext cx="457200" cy="457200"/>
+          </a:xfrm>
+          <a:prstGeom prst="ellipse">
+            <a:avLst/>
+          </a:prstGeom>
+          <a:solidFill>
+            <a:srgbClr val="F2B705"/>
+          </a:solidFill>
+          <a:ln>
+            <a:noFill/>
+          </a:ln>
+          <a:effectLst/>
+        </p:spPr>
+        <p:style>
+          <a:lnRef idx="1">
+            <a:schemeClr val="accent1"/>
+          </a:lnRef>
+          <a:fillRef idx="3">
+            <a:schemeClr val="accent1"/>
+          </a:fillRef>
+          <a:effectRef idx="2">
+            <a:schemeClr val="accent1"/>
+          </a:effectRef>
+          <a:fontRef idx="minor">
+            <a:schemeClr val="lt1"/>
+          </a:fontRef>
+        </p:style>
+        <p:txBody>
+          <a:bodyPr rtlCol="0" anchor="ctr" lIns="0" rIns="0" tIns="0" bIns="0"/>
+          <a:lstStyle/>
+          <a:p>
+            <a:pPr algn="ctr"/>
+            <a:r>
+              <a:rPr sz="1500" b="1">
+                <a:solidFill>
+                  <a:srgbClr val="202122"/>
+                </a:solidFill>
+                <a:latin typeface="Calibri"/>
+              </a:rPr>
+              <a:t>2</a:t>
+            </a:r>
+          </a:p>
+        </p:txBody>
+      </p:sp>
+      <p:sp>
+        <p:nvSpPr>
+          <p:cNvPr id="12" name="TextBox 11"/>
+          <p:cNvSpPr txBox="1"/>
+          <p:nvPr/>
+        </p:nvSpPr>
+        <p:spPr>
+          <a:xfrm>
+            <a:off x="7055967" y="1801368"/>
+            <a:ext cx="4404207" cy="512064"/>
+          </a:xfrm>
+          <a:prstGeom prst="rect">
+            <a:avLst/>
+          </a:prstGeom>
+          <a:noFill/>
+        </p:spPr>
+        <p:txBody>
+          <a:bodyPr wrap="square" anchor="ctr" lIns="0" rIns="0" tIns="0" bIns="0"/>
+          <a:lstStyle/>
+          <a:p>
+            <a:pPr algn="l"/>
+            <a:r>
+              <a:rPr sz="1900" b="1" i="0">
+                <a:solidFill>
+                  <a:srgbClr val="03306E"/>
+                </a:solidFill>
+                <a:latin typeface="Calibri"/>
+              </a:rPr>
+              <a:t>Security</a:t>
+            </a:r>
+          </a:p>
+        </p:txBody>
+      </p:sp>
+      <p:sp>
+        <p:nvSpPr>
+          <p:cNvPr id="13" name="TextBox 12"/>
+          <p:cNvSpPr txBox="1"/>
+          <p:nvPr/>
+        </p:nvSpPr>
+        <p:spPr>
+          <a:xfrm>
+            <a:off x="6461607" y="2468880"/>
+            <a:ext cx="4952847" cy="1143000"/>
+          </a:xfrm>
+          <a:prstGeom prst="rect">
+            <a:avLst/>
+          </a:prstGeom>
+          <a:noFill/>
+        </p:spPr>
+        <p:txBody>
+          <a:bodyPr wrap="square" anchor="t" lIns="0" rIns="0" tIns="0" bIns="0"/>
+          <a:lstStyle/>
+          <a:p>
+            <a:pPr algn="l"/>
+            <a:r>
+              <a:rPr sz="2000" b="0" i="0">
+                <a:solidFill>
+                  <a:srgbClr val="202122"/>
+                </a:solidFill>
+                <a:latin typeface="Calibri"/>
+              </a:rPr>
+              <a:t>Anti-malware and firewall configuration, user roles and permissions, hardening, air gaps.</a:t>
+            </a:r>
+          </a:p>
+        </p:txBody>
+      </p:sp>
+      <p:sp>
+        <p:nvSpPr>
+          <p:cNvPr id="14" name="Rounded Rectangle 13"/>
+          <p:cNvSpPr/>
+          <p:nvPr/>
+        </p:nvSpPr>
+        <p:spPr>
+          <a:xfrm>
+            <a:off x="548640" y="4023360"/>
+            <a:ext cx="5410047" cy="2148840"/>
+          </a:xfrm>
+          <a:prstGeom prst="roundRect">
+            <a:avLst>
+              <a:gd name="adj" fmla="val 6000"/>
+            </a:avLst>
+          </a:prstGeom>
+          <a:solidFill>
+            <a:srgbClr val="EAF3FF"/>
+          </a:solidFill>
+          <a:ln>
+            <a:noFill/>
+          </a:ln>
+          <a:effectLst/>
+        </p:spPr>
+        <p:style>
+          <a:lnRef idx="1">
+            <a:schemeClr val="accent1"/>
+          </a:lnRef>
+          <a:fillRef idx="3">
+            <a:schemeClr val="accent1"/>
+          </a:fillRef>
+          <a:effectRef idx="2">
+            <a:schemeClr val="accent1"/>
+          </a:effectRef>
+          <a:fontRef idx="minor">
+            <a:schemeClr val="lt1"/>
+          </a:fontRef>
+        </p:style>
+        <p:txBody>
+          <a:bodyPr rtlCol="0" anchor="ctr"/>
+          <a:lstStyle/>
+          <a:p/>
+        </p:txBody>
+      </p:sp>
+      <p:sp>
+        <p:nvSpPr>
+          <p:cNvPr id="15" name="Oval 14"/>
+          <p:cNvSpPr/>
+          <p:nvPr/>
+        </p:nvSpPr>
+        <p:spPr>
+          <a:xfrm>
+            <a:off x="777240" y="4251960"/>
+            <a:ext cx="457200" cy="457200"/>
+          </a:xfrm>
+          <a:prstGeom prst="ellipse">
+            <a:avLst/>
+          </a:prstGeom>
+          <a:solidFill>
+            <a:srgbClr val="F2B705"/>
+          </a:solidFill>
+          <a:ln>
+            <a:noFill/>
+          </a:ln>
+          <a:effectLst/>
+        </p:spPr>
+        <p:style>
+          <a:lnRef idx="1">
+            <a:schemeClr val="accent1"/>
+          </a:lnRef>
+          <a:fillRef idx="3">
+            <a:schemeClr val="accent1"/>
+          </a:fillRef>
+          <a:effectRef idx="2">
+            <a:schemeClr val="accent1"/>
+          </a:effectRef>
+          <a:fontRef idx="minor">
+            <a:schemeClr val="lt1"/>
+          </a:fontRef>
+        </p:style>
+        <p:txBody>
+          <a:bodyPr rtlCol="0" anchor="ctr" lIns="0" rIns="0" tIns="0" bIns="0"/>
+          <a:lstStyle/>
+          <a:p>
+            <a:pPr algn="ctr"/>
+            <a:r>
+              <a:rPr sz="1500" b="1">
+                <a:solidFill>
+                  <a:srgbClr val="202122"/>
+                </a:solidFill>
+                <a:latin typeface="Calibri"/>
+              </a:rPr>
+              <a:t>3</a:t>
+            </a:r>
+          </a:p>
+        </p:txBody>
+      </p:sp>
+      <p:sp>
+        <p:nvSpPr>
+          <p:cNvPr id="16" name="TextBox 15"/>
+          <p:cNvSpPr txBox="1"/>
+          <p:nvPr/>
+        </p:nvSpPr>
+        <p:spPr>
+          <a:xfrm>
+            <a:off x="1371600" y="4224528"/>
+            <a:ext cx="4404207" cy="512064"/>
+          </a:xfrm>
+          <a:prstGeom prst="rect">
+            <a:avLst/>
+          </a:prstGeom>
+          <a:noFill/>
+        </p:spPr>
+        <p:txBody>
+          <a:bodyPr wrap="square" anchor="ctr" lIns="0" rIns="0" tIns="0" bIns="0"/>
+          <a:lstStyle/>
+          <a:p>
+            <a:pPr algn="l"/>
+            <a:r>
+              <a:rPr sz="1900" b="1" i="0">
+                <a:solidFill>
+                  <a:srgbClr val="03306E"/>
+                </a:solidFill>
+                <a:latin typeface="Calibri"/>
+              </a:rPr>
+              <a:t>Organisation</a:t>
+            </a:r>
+          </a:p>
+        </p:txBody>
+      </p:sp>
+      <p:sp>
+        <p:nvSpPr>
+          <p:cNvPr id="17" name="TextBox 16"/>
+          <p:cNvSpPr txBox="1"/>
+          <p:nvPr/>
+        </p:nvSpPr>
+        <p:spPr>
+          <a:xfrm>
+            <a:off x="777240" y="4892040"/>
+            <a:ext cx="4952847" cy="1143000"/>
+          </a:xfrm>
+          <a:prstGeom prst="rect">
+            <a:avLst/>
+          </a:prstGeom>
+          <a:noFill/>
+        </p:spPr>
+        <p:txBody>
+          <a:bodyPr wrap="square" anchor="t" lIns="0" rIns="0" tIns="0" bIns="0"/>
+          <a:lstStyle/>
+          <a:p>
+            <a:pPr algn="l"/>
+            <a:r>
+              <a:rPr sz="2000" b="0" i="0">
+                <a:solidFill>
+                  <a:srgbClr val="202122"/>
+                </a:solidFill>
+                <a:latin typeface="Calibri"/>
+              </a:rPr>
+              <a:t>Server configuration, node deployment, media, subnetting.</a:t>
+            </a:r>
+          </a:p>
+        </p:txBody>
+      </p:sp>
+      <p:sp>
+        <p:nvSpPr>
+          <p:cNvPr id="18" name="Rounded Rectangle 17"/>
+          <p:cNvSpPr/>
+          <p:nvPr/>
+        </p:nvSpPr>
+        <p:spPr>
+          <a:xfrm>
+            <a:off x="6233007" y="4023360"/>
+            <a:ext cx="5410047" cy="2148840"/>
+          </a:xfrm>
+          <a:prstGeom prst="roundRect">
+            <a:avLst>
+              <a:gd name="adj" fmla="val 6000"/>
+            </a:avLst>
+          </a:prstGeom>
+          <a:solidFill>
+            <a:srgbClr val="EAF3FF"/>
+          </a:solidFill>
+          <a:ln>
+            <a:noFill/>
+          </a:ln>
+          <a:effectLst/>
+        </p:spPr>
+        <p:style>
+          <a:lnRef idx="1">
+            <a:schemeClr val="accent1"/>
+          </a:lnRef>
+          <a:fillRef idx="3">
+            <a:schemeClr val="accent1"/>
+          </a:fillRef>
+          <a:effectRef idx="2">
+            <a:schemeClr val="accent1"/>
+          </a:effectRef>
+          <a:fontRef idx="minor">
+            <a:schemeClr val="lt1"/>
+          </a:fontRef>
+        </p:style>
+        <p:txBody>
+          <a:bodyPr rtlCol="0" anchor="ctr"/>
+          <a:lstStyle/>
+          <a:p/>
+        </p:txBody>
+      </p:sp>
+      <p:sp>
+        <p:nvSpPr>
+          <p:cNvPr id="19" name="Oval 18"/>
+          <p:cNvSpPr/>
+          <p:nvPr/>
+        </p:nvSpPr>
+        <p:spPr>
+          <a:xfrm>
+            <a:off x="6461607" y="4251960"/>
+            <a:ext cx="457200" cy="457200"/>
+          </a:xfrm>
+          <a:prstGeom prst="ellipse">
+            <a:avLst/>
+          </a:prstGeom>
+          <a:solidFill>
+            <a:srgbClr val="F2B705"/>
+          </a:solidFill>
+          <a:ln>
+            <a:noFill/>
+          </a:ln>
+          <a:effectLst/>
+        </p:spPr>
+        <p:style>
+          <a:lnRef idx="1">
+            <a:schemeClr val="accent1"/>
+          </a:lnRef>
+          <a:fillRef idx="3">
+            <a:schemeClr val="accent1"/>
+          </a:fillRef>
+          <a:effectRef idx="2">
+            <a:schemeClr val="accent1"/>
+          </a:effectRef>
+          <a:fontRef idx="minor">
+            <a:schemeClr val="lt1"/>
+          </a:fontRef>
+        </p:style>
+        <p:txBody>
+          <a:bodyPr rtlCol="0" anchor="ctr" lIns="0" rIns="0" tIns="0" bIns="0"/>
+          <a:lstStyle/>
+          <a:p>
+            <a:pPr algn="ctr"/>
+            <a:r>
+              <a:rPr sz="1500" b="1">
+                <a:solidFill>
+                  <a:srgbClr val="202122"/>
+                </a:solidFill>
+                <a:latin typeface="Calibri"/>
+              </a:rPr>
+              <a:t>4</a:t>
+            </a:r>
+          </a:p>
+        </p:txBody>
+      </p:sp>
+      <p:sp>
+        <p:nvSpPr>
+          <p:cNvPr id="20" name="TextBox 19"/>
+          <p:cNvSpPr txBox="1"/>
+          <p:nvPr/>
+        </p:nvSpPr>
+        <p:spPr>
+          <a:xfrm>
+            <a:off x="7055967" y="4224528"/>
+            <a:ext cx="4404207" cy="512064"/>
+          </a:xfrm>
+          <a:prstGeom prst="rect">
+            <a:avLst/>
+          </a:prstGeom>
+          <a:noFill/>
+        </p:spPr>
+        <p:txBody>
+          <a:bodyPr wrap="square" anchor="ctr" lIns="0" rIns="0" tIns="0" bIns="0"/>
+          <a:lstStyle/>
+          <a:p>
+            <a:pPr algn="l"/>
+            <a:r>
+              <a:rPr sz="1900" b="1" i="0">
+                <a:solidFill>
+                  <a:srgbClr val="03306E"/>
+                </a:solidFill>
+                <a:latin typeface="Calibri"/>
+              </a:rPr>
+              <a:t>User experience</a:t>
+            </a:r>
+          </a:p>
+        </p:txBody>
+      </p:sp>
+      <p:sp>
+        <p:nvSpPr>
+          <p:cNvPr id="21" name="TextBox 20"/>
+          <p:cNvSpPr txBox="1"/>
+          <p:nvPr/>
+        </p:nvSpPr>
+        <p:spPr>
+          <a:xfrm>
+            <a:off x="6461607" y="4892040"/>
+            <a:ext cx="4952847" cy="1143000"/>
+          </a:xfrm>
+          <a:prstGeom prst="rect">
+            <a:avLst/>
+          </a:prstGeom>
+          <a:noFill/>
+        </p:spPr>
+        <p:txBody>
+          <a:bodyPr wrap="square" anchor="t" lIns="0" rIns="0" tIns="0" bIns="0"/>
+          <a:lstStyle/>
+          <a:p>
+            <a:pPr algn="l"/>
+            <a:r>
+              <a:rPr sz="2000" b="0" i="0">
+                <a:solidFill>
+                  <a:srgbClr val="202122"/>
+                </a:solidFill>
+                <a:latin typeface="Calibri"/>
+              </a:rPr>
+              <a:t>End-user devices, connections, back-end systems, access and availability.</a:t>
+            </a:r>
+          </a:p>
+        </p:txBody>
+      </p:sp>
+    </p:spTree>
+  </p:cSld>
+  <p:clrMapOvr>
+    <a:masterClrMapping/>
+  </p:clrMapOvr>
+</p:sld>
+</file>
+
+<file path=ppt/slides/slide12.xml><?xml version="1.0" encoding="utf-8"?>
+<p:sld xmlns:a="http://schemas.openxmlformats.org/drawingml/2006/main" xmlns:p="http://schemas.openxmlformats.org/presentationml/2006/main" xmlns:r="http://schemas.openxmlformats.org/officeDocument/2006/relationships">
+  <p:cSld>
+    <p:bg>
+      <p:bgPr>
+        <a:solidFill>
+          <a:srgbClr val="FFFFFF"/>
+        </a:solidFill>
+        <a:effectLst/>
+      </p:bgPr>
+    </p:bg>
+    <p:spTree>
+      <p:nvGrpSpPr>
+        <p:cNvPr id="1" name=""/>
+        <p:cNvGrpSpPr/>
+        <p:nvPr/>
+      </p:nvGrpSpPr>
+      <p:grpSpPr/>
+      <p:sp>
+        <p:nvSpPr>
+          <p:cNvPr id="2" name="TextBox 1"/>
+          <p:cNvSpPr txBox="1"/>
+          <p:nvPr/>
+        </p:nvSpPr>
+        <p:spPr>
+          <a:xfrm>
+            <a:off x="548640" y="320040"/>
+            <a:ext cx="11094415" cy="274320"/>
+          </a:xfrm>
+          <a:prstGeom prst="rect">
+            <a:avLst/>
+          </a:prstGeom>
+          <a:noFill/>
+        </p:spPr>
+        <p:txBody>
+          <a:bodyPr wrap="square" anchor="t" lIns="0" rIns="0" tIns="0" bIns="0"/>
+          <a:lstStyle/>
+          <a:p>
+            <a:pPr algn="l"/>
+            <a:r>
+              <a:rPr sz="1100" b="1" i="0">
+                <a:solidFill>
+                  <a:srgbClr val="54595D"/>
+                </a:solidFill>
+                <a:latin typeface="Calibri"/>
+              </a:rPr>
+              <a:t>CORE COMPONENT  ·  Core Component</a:t>
+            </a:r>
+          </a:p>
+        </p:txBody>
+      </p:sp>
+      <p:sp>
+        <p:nvSpPr>
+          <p:cNvPr id="3" name="TextBox 2"/>
+          <p:cNvSpPr txBox="1"/>
+          <p:nvPr/>
+        </p:nvSpPr>
+        <p:spPr>
+          <a:xfrm>
+            <a:off x="548640" y="566928"/>
+            <a:ext cx="11094415" cy="822960"/>
+          </a:xfrm>
+          <a:prstGeom prst="rect">
+            <a:avLst/>
+          </a:prstGeom>
+          <a:noFill/>
+        </p:spPr>
+        <p:txBody>
+          <a:bodyPr wrap="square" anchor="ctr" lIns="0" rIns="0" tIns="0" bIns="0"/>
+          <a:lstStyle/>
+          <a:p>
+            <a:pPr algn="l"/>
+            <a:r>
+              <a:rPr sz="3200" b="1" i="0">
+                <a:solidFill>
+                  <a:srgbClr val="03306E"/>
+                </a:solidFill>
+                <a:latin typeface="Cambria"/>
+              </a:rPr>
+              <a:t>Quick check: What Task 4a looks for</a:t>
+            </a:r>
+          </a:p>
+        </p:txBody>
+      </p:sp>
+      <p:sp>
+        <p:nvSpPr>
+          <p:cNvPr id="4" name="TextBox 3"/>
+          <p:cNvSpPr txBox="1"/>
+          <p:nvPr/>
+        </p:nvSpPr>
+        <p:spPr>
+          <a:xfrm>
+            <a:off x="548640" y="6446520"/>
+            <a:ext cx="8229600" cy="274320"/>
+          </a:xfrm>
+          <a:prstGeom prst="rect">
+            <a:avLst/>
+          </a:prstGeom>
+          <a:noFill/>
+        </p:spPr>
+        <p:txBody>
+          <a:bodyPr wrap="square" anchor="t" lIns="0" rIns="0" tIns="0" bIns="0"/>
+          <a:lstStyle/>
+          <a:p>
+            <a:pPr algn="l"/>
+            <a:r>
+              <a:rPr sz="1000" b="0" i="0">
+                <a:solidFill>
+                  <a:srgbClr val="54595D"/>
+                </a:solidFill>
+                <a:latin typeface="Calibri"/>
+              </a:rPr>
+              <a:t>Digital Support and Security T Level  ·  The Employer Set Project</a:t>
+            </a:r>
+          </a:p>
+        </p:txBody>
+      </p:sp>
+      <p:sp>
+        <p:nvSpPr>
+          <p:cNvPr id="5" name="TextBox 4"/>
+          <p:cNvSpPr txBox="1"/>
+          <p:nvPr/>
+        </p:nvSpPr>
+        <p:spPr>
+          <a:xfrm>
+            <a:off x="10728655" y="6446520"/>
+            <a:ext cx="914400" cy="274320"/>
+          </a:xfrm>
+          <a:prstGeom prst="rect">
+            <a:avLst/>
+          </a:prstGeom>
+          <a:noFill/>
+        </p:spPr>
+        <p:txBody>
+          <a:bodyPr wrap="square" anchor="t" lIns="0" rIns="0" tIns="0" bIns="0"/>
+          <a:lstStyle/>
+          <a:p>
+            <a:pPr algn="r"/>
+            <a:r>
+              <a:rPr sz="1000" b="0" i="0">
+                <a:solidFill>
+                  <a:srgbClr val="54595D"/>
+                </a:solidFill>
+                <a:latin typeface="Calibri"/>
+              </a:rPr>
+              <a:t>12</a:t>
+            </a:r>
+          </a:p>
+        </p:txBody>
+      </p:sp>
+      <p:sp>
+        <p:nvSpPr>
+          <p:cNvPr id="6" name="Oval 5"/>
+          <p:cNvSpPr/>
+          <p:nvPr/>
+        </p:nvSpPr>
+        <p:spPr>
+          <a:xfrm>
+            <a:off x="548640" y="1691640"/>
+            <a:ext cx="502920" cy="502920"/>
+          </a:xfrm>
+          <a:prstGeom prst="ellipse">
+            <a:avLst/>
+          </a:prstGeom>
+          <a:solidFill>
+            <a:srgbClr val="F2B705"/>
+          </a:solidFill>
+          <a:ln>
+            <a:noFill/>
+          </a:ln>
+          <a:effectLst/>
+        </p:spPr>
+        <p:style>
+          <a:lnRef idx="1">
+            <a:schemeClr val="accent1"/>
+          </a:lnRef>
+          <a:fillRef idx="3">
+            <a:schemeClr val="accent1"/>
+          </a:fillRef>
+          <a:effectRef idx="2">
+            <a:schemeClr val="accent1"/>
+          </a:effectRef>
+          <a:fontRef idx="minor">
+            <a:schemeClr val="lt1"/>
+          </a:fontRef>
+        </p:style>
+        <p:txBody>
+          <a:bodyPr rtlCol="0" anchor="ctr" lIns="0" rIns="0" tIns="0" bIns="0"/>
+          <a:lstStyle/>
+          <a:p>
+            <a:pPr algn="ctr"/>
+            <a:r>
+              <a:rPr sz="1600" b="1">
+                <a:solidFill>
+                  <a:srgbClr val="202122"/>
+                </a:solidFill>
+                <a:latin typeface="Calibri"/>
+              </a:rPr>
+              <a:t>1</a:t>
+            </a:r>
+          </a:p>
+        </p:txBody>
+      </p:sp>
+      <p:sp>
+        <p:nvSpPr>
+          <p:cNvPr id="7" name="TextBox 6"/>
+          <p:cNvSpPr txBox="1"/>
+          <p:nvPr/>
+        </p:nvSpPr>
+        <p:spPr>
+          <a:xfrm>
+            <a:off x="1371600" y="1645920"/>
+            <a:ext cx="10271455" cy="1188720"/>
+          </a:xfrm>
+          <a:prstGeom prst="rect">
+            <a:avLst/>
+          </a:prstGeom>
+          <a:noFill/>
+        </p:spPr>
+        <p:txBody>
+          <a:bodyPr wrap="square" anchor="t" lIns="0" rIns="0" tIns="0" bIns="0"/>
+          <a:lstStyle/>
+          <a:p>
+            <a:pPr algn="l"/>
+            <a:r>
+              <a:rPr sz="2400" b="0" i="0">
+                <a:solidFill>
+                  <a:srgbClr val="202122"/>
+                </a:solidFill>
+                <a:latin typeface="Calibri"/>
+              </a:rPr>
+              <a:t>Name the four qualities markers look for in Task 4a.</a:t>
+            </a:r>
+          </a:p>
+        </p:txBody>
+      </p:sp>
+      <p:sp>
+        <p:nvSpPr>
+          <p:cNvPr id="8" name="Oval 7"/>
+          <p:cNvSpPr/>
+          <p:nvPr/>
+        </p:nvSpPr>
+        <p:spPr>
+          <a:xfrm>
+            <a:off x="548640" y="3108960"/>
+            <a:ext cx="502920" cy="502920"/>
+          </a:xfrm>
+          <a:prstGeom prst="ellipse">
+            <a:avLst/>
+          </a:prstGeom>
+          <a:solidFill>
+            <a:srgbClr val="F2B705"/>
+          </a:solidFill>
+          <a:ln>
+            <a:noFill/>
+          </a:ln>
+          <a:effectLst/>
+        </p:spPr>
+        <p:style>
+          <a:lnRef idx="1">
+            <a:schemeClr val="accent1"/>
+          </a:lnRef>
+          <a:fillRef idx="3">
+            <a:schemeClr val="accent1"/>
+          </a:fillRef>
+          <a:effectRef idx="2">
+            <a:schemeClr val="accent1"/>
+          </a:effectRef>
+          <a:fontRef idx="minor">
+            <a:schemeClr val="lt1"/>
+          </a:fontRef>
+        </p:style>
+        <p:txBody>
+          <a:bodyPr rtlCol="0" anchor="ctr" lIns="0" rIns="0" tIns="0" bIns="0"/>
+          <a:lstStyle/>
+          <a:p>
+            <a:pPr algn="ctr"/>
+            <a:r>
+              <a:rPr sz="1600" b="1">
+                <a:solidFill>
+                  <a:srgbClr val="202122"/>
+                </a:solidFill>
+                <a:latin typeface="Calibri"/>
+              </a:rPr>
+              <a:t>2</a:t>
+            </a:r>
+          </a:p>
+        </p:txBody>
+      </p:sp>
+      <p:sp>
+        <p:nvSpPr>
+          <p:cNvPr id="9" name="TextBox 8"/>
+          <p:cNvSpPr txBox="1"/>
+          <p:nvPr/>
+        </p:nvSpPr>
+        <p:spPr>
+          <a:xfrm>
+            <a:off x="1371600" y="3063240"/>
+            <a:ext cx="10271455" cy="1188720"/>
+          </a:xfrm>
+          <a:prstGeom prst="rect">
+            <a:avLst/>
+          </a:prstGeom>
+          <a:noFill/>
+        </p:spPr>
+        <p:txBody>
+          <a:bodyPr wrap="square" anchor="t" lIns="0" rIns="0" tIns="0" bIns="0"/>
+          <a:lstStyle/>
+          <a:p>
+            <a:pPr algn="l"/>
+            <a:r>
+              <a:rPr sz="2400" b="0" i="0">
+                <a:solidFill>
+                  <a:srgbClr val="202122"/>
+                </a:solidFill>
+                <a:latin typeface="Calibri"/>
+              </a:rPr>
+              <a:t>Give an example of improving robustness.</a:t>
+            </a:r>
+          </a:p>
+        </p:txBody>
+      </p:sp>
+      <p:sp>
+        <p:nvSpPr>
+          <p:cNvPr id="10" name="Oval 9"/>
+          <p:cNvSpPr/>
+          <p:nvPr/>
+        </p:nvSpPr>
+        <p:spPr>
+          <a:xfrm>
+            <a:off x="548640" y="4526280"/>
+            <a:ext cx="502920" cy="502920"/>
+          </a:xfrm>
+          <a:prstGeom prst="ellipse">
+            <a:avLst/>
+          </a:prstGeom>
+          <a:solidFill>
+            <a:srgbClr val="F2B705"/>
+          </a:solidFill>
+          <a:ln>
+            <a:noFill/>
+          </a:ln>
+          <a:effectLst/>
+        </p:spPr>
+        <p:style>
+          <a:lnRef idx="1">
+            <a:schemeClr val="accent1"/>
+          </a:lnRef>
+          <a:fillRef idx="3">
+            <a:schemeClr val="accent1"/>
+          </a:fillRef>
+          <a:effectRef idx="2">
+            <a:schemeClr val="accent1"/>
+          </a:effectRef>
+          <a:fontRef idx="minor">
+            <a:schemeClr val="lt1"/>
+          </a:fontRef>
+        </p:style>
+        <p:txBody>
+          <a:bodyPr rtlCol="0" anchor="ctr" lIns="0" rIns="0" tIns="0" bIns="0"/>
+          <a:lstStyle/>
+          <a:p>
+            <a:pPr algn="ctr"/>
+            <a:r>
+              <a:rPr sz="1600" b="1">
+                <a:solidFill>
+                  <a:srgbClr val="202122"/>
+                </a:solidFill>
+                <a:latin typeface="Calibri"/>
+              </a:rPr>
+              <a:t>3</a:t>
+            </a:r>
+          </a:p>
+        </p:txBody>
+      </p:sp>
+      <p:sp>
+        <p:nvSpPr>
+          <p:cNvPr id="11" name="TextBox 10"/>
+          <p:cNvSpPr txBox="1"/>
+          <p:nvPr/>
+        </p:nvSpPr>
+        <p:spPr>
+          <a:xfrm>
+            <a:off x="1371600" y="4480560"/>
+            <a:ext cx="10271455" cy="1188720"/>
+          </a:xfrm>
+          <a:prstGeom prst="rect">
+            <a:avLst/>
+          </a:prstGeom>
+          <a:noFill/>
+        </p:spPr>
+        <p:txBody>
+          <a:bodyPr wrap="square" anchor="t" lIns="0" rIns="0" tIns="0" bIns="0"/>
+          <a:lstStyle/>
+          <a:p>
+            <a:pPr algn="l"/>
+            <a:r>
+              <a:rPr sz="2400" b="0" i="0">
+                <a:solidFill>
+                  <a:srgbClr val="202122"/>
+                </a:solidFill>
+                <a:latin typeface="Calibri"/>
+              </a:rPr>
+              <a:t>How does subnetting help organisation?</a:t>
+            </a:r>
+          </a:p>
+        </p:txBody>
+      </p:sp>
+      <p:sp>
+        <p:nvSpPr>
+          <p:cNvPr id="12" name="TextBox 11"/>
+          <p:cNvSpPr txBox="1"/>
+          <p:nvPr/>
+        </p:nvSpPr>
+        <p:spPr>
+          <a:xfrm>
+            <a:off x="548640" y="5852160"/>
+            <a:ext cx="11094415" cy="365760"/>
+          </a:xfrm>
+          <a:prstGeom prst="rect">
+            <a:avLst/>
+          </a:prstGeom>
+          <a:noFill/>
+        </p:spPr>
+        <p:txBody>
+          <a:bodyPr wrap="square" anchor="t" lIns="0" rIns="0" tIns="0" bIns="0"/>
+          <a:lstStyle/>
+          <a:p>
+            <a:pPr algn="l"/>
+            <a:r>
+              <a:rPr sz="1300" b="0" i="1">
+                <a:solidFill>
+                  <a:srgbClr val="54595D"/>
+                </a:solidFill>
+                <a:latin typeface="Calibri"/>
+              </a:rPr>
+              <a:t>Answer on mini whiteboards or in your book. Answers are in the speaker notes.</a:t>
+            </a:r>
+          </a:p>
+        </p:txBody>
+      </p:sp>
+    </p:spTree>
+  </p:cSld>
+  <p:clrMapOvr>
+    <a:masterClrMapping/>
+  </p:clrMapOvr>
+</p:sld>
+</file>
+
+<file path=ppt/slides/slide13.xml><?xml version="1.0" encoding="utf-8"?>
+<p:sld xmlns:a="http://schemas.openxmlformats.org/drawingml/2006/main" xmlns:p="http://schemas.openxmlformats.org/presentationml/2006/main" xmlns:r="http://schemas.openxmlformats.org/officeDocument/2006/relationships">
+  <p:cSld>
+    <p:bg>
+      <p:bgPr>
+        <a:solidFill>
+          <a:srgbClr val="FFFFFF"/>
+        </a:solidFill>
+        <a:effectLst/>
+      </p:bgPr>
+    </p:bg>
+    <p:spTree>
+      <p:nvGrpSpPr>
+        <p:cNvPr id="1" name=""/>
+        <p:cNvGrpSpPr/>
+        <p:nvPr/>
+      </p:nvGrpSpPr>
+      <p:grpSpPr/>
+      <p:sp>
+        <p:nvSpPr>
+          <p:cNvPr id="2" name="TextBox 1"/>
+          <p:cNvSpPr txBox="1"/>
+          <p:nvPr/>
+        </p:nvSpPr>
+        <p:spPr>
+          <a:xfrm>
+            <a:off x="548640" y="320040"/>
+            <a:ext cx="11094415" cy="274320"/>
+          </a:xfrm>
+          <a:prstGeom prst="rect">
+            <a:avLst/>
+          </a:prstGeom>
+          <a:noFill/>
+        </p:spPr>
+        <p:txBody>
+          <a:bodyPr wrap="square" anchor="t" lIns="0" rIns="0" tIns="0" bIns="0"/>
+          <a:lstStyle/>
+          <a:p>
+            <a:pPr algn="l"/>
+            <a:r>
+              <a:rPr sz="1100" b="1" i="0">
+                <a:solidFill>
+                  <a:srgbClr val="54595D"/>
+                </a:solidFill>
+                <a:latin typeface="Calibri"/>
+              </a:rPr>
+              <a:t>CORE COMPONENT  ·  Core Component</a:t>
+            </a:r>
+          </a:p>
+        </p:txBody>
+      </p:sp>
+      <p:sp>
+        <p:nvSpPr>
+          <p:cNvPr id="3" name="TextBox 2"/>
+          <p:cNvSpPr txBox="1"/>
+          <p:nvPr/>
+        </p:nvSpPr>
+        <p:spPr>
+          <a:xfrm>
+            <a:off x="548640" y="566928"/>
+            <a:ext cx="11094415" cy="822960"/>
+          </a:xfrm>
+          <a:prstGeom prst="rect">
+            <a:avLst/>
+          </a:prstGeom>
+          <a:noFill/>
+        </p:spPr>
+        <p:txBody>
+          <a:bodyPr wrap="square" anchor="ctr" lIns="0" rIns="0" tIns="0" bIns="0"/>
+          <a:lstStyle/>
+          <a:p>
+            <a:pPr algn="l"/>
+            <a:r>
+              <a:rPr sz="3200" b="1" i="0">
+                <a:solidFill>
+                  <a:srgbClr val="03306E"/>
+                </a:solidFill>
+                <a:latin typeface="Cambria"/>
+              </a:rPr>
+              <a:t>How to prepare</a:t>
+            </a:r>
+          </a:p>
+        </p:txBody>
+      </p:sp>
+      <p:sp>
+        <p:nvSpPr>
+          <p:cNvPr id="4" name="TextBox 3"/>
+          <p:cNvSpPr txBox="1"/>
+          <p:nvPr/>
+        </p:nvSpPr>
+        <p:spPr>
+          <a:xfrm>
+            <a:off x="548640" y="6446520"/>
+            <a:ext cx="8229600" cy="274320"/>
+          </a:xfrm>
+          <a:prstGeom prst="rect">
+            <a:avLst/>
+          </a:prstGeom>
+          <a:noFill/>
+        </p:spPr>
+        <p:txBody>
+          <a:bodyPr wrap="square" anchor="t" lIns="0" rIns="0" tIns="0" bIns="0"/>
+          <a:lstStyle/>
+          <a:p>
+            <a:pPr algn="l"/>
+            <a:r>
+              <a:rPr sz="1000" b="0" i="0">
+                <a:solidFill>
+                  <a:srgbClr val="54595D"/>
+                </a:solidFill>
+                <a:latin typeface="Calibri"/>
+              </a:rPr>
+              <a:t>Digital Support and Security T Level  ·  The Employer Set Project</a:t>
+            </a:r>
+          </a:p>
+        </p:txBody>
+      </p:sp>
+      <p:sp>
+        <p:nvSpPr>
+          <p:cNvPr id="5" name="TextBox 4"/>
+          <p:cNvSpPr txBox="1"/>
+          <p:nvPr/>
+        </p:nvSpPr>
+        <p:spPr>
+          <a:xfrm>
+            <a:off x="10728655" y="6446520"/>
+            <a:ext cx="914400" cy="274320"/>
+          </a:xfrm>
+          <a:prstGeom prst="rect">
+            <a:avLst/>
+          </a:prstGeom>
+          <a:noFill/>
+        </p:spPr>
+        <p:txBody>
+          <a:bodyPr wrap="square" anchor="t" lIns="0" rIns="0" tIns="0" bIns="0"/>
+          <a:lstStyle/>
+          <a:p>
+            <a:pPr algn="r"/>
+            <a:r>
+              <a:rPr sz="1000" b="0" i="0">
+                <a:solidFill>
+                  <a:srgbClr val="54595D"/>
+                </a:solidFill>
+                <a:latin typeface="Calibri"/>
+              </a:rPr>
+              <a:t>13</a:t>
+            </a:r>
+          </a:p>
+        </p:txBody>
+      </p:sp>
+      <p:sp>
+        <p:nvSpPr>
+          <p:cNvPr id="6" name="TextBox 5"/>
+          <p:cNvSpPr txBox="1"/>
+          <p:nvPr/>
+        </p:nvSpPr>
+        <p:spPr>
+          <a:xfrm>
+            <a:off x="548640" y="1600200"/>
+            <a:ext cx="6675120" cy="4572000"/>
+          </a:xfrm>
+          <a:prstGeom prst="rect">
+            <a:avLst/>
+          </a:prstGeom>
+          <a:noFill/>
+        </p:spPr>
+        <p:txBody>
+          <a:bodyPr wrap="square" lIns="0" rIns="0" tIns="0" bIns="0">
+            <a:spAutoFit/>
+          </a:bodyPr>
+          <a:lstStyle/>
+          <a:p>
+            <a:pPr marL="274320" indent="-274320">
+              <a:spcAft>
+                <a:spcPts val="1080"/>
+              </a:spcAft>
+              <a:buClr>
+                <a:srgbClr val="0645AD"/>
+              </a:buClr>
+              <a:buFont typeface="Arial"/>
+              <a:buChar char="•"/>
+            </a:pPr>
+            <a:r>
+              <a:rPr sz="2400" b="0">
+                <a:solidFill>
+                  <a:srgbClr val="202122"/>
+                </a:solidFill>
+                <a:latin typeface="Calibri"/>
+              </a:rPr>
+              <a:t>Practise Gantt charts and cost plans until they are quick.</a:t>
+            </a:r>
+          </a:p>
+          <a:p>
+            <a:pPr marL="274320" indent="-274320">
+              <a:spcAft>
+                <a:spcPts val="1080"/>
+              </a:spcAft>
+              <a:buClr>
+                <a:srgbClr val="0645AD"/>
+              </a:buClr>
+              <a:buFont typeface="Arial"/>
+              <a:buChar char="•"/>
+            </a:pPr>
+            <a:r>
+              <a:rPr sz="2400" b="1">
+                <a:solidFill>
+                  <a:srgbClr val="202122"/>
+                </a:solidFill>
+                <a:latin typeface="Calibri"/>
+              </a:rPr>
+              <a:t>Get fluent in Packet Tracer:</a:t>
+            </a:r>
+            <a:r>
+              <a:rPr sz="2400" b="0">
+                <a:solidFill>
+                  <a:srgbClr val="202122"/>
+                </a:solidFill>
+                <a:latin typeface="Calibri"/>
+              </a:rPr>
+              <a:t> ping, tracert, device configuration, subnetting.</a:t>
+            </a:r>
+          </a:p>
+          <a:p>
+            <a:pPr marL="274320" indent="-274320">
+              <a:spcAft>
+                <a:spcPts val="1080"/>
+              </a:spcAft>
+              <a:buClr>
+                <a:srgbClr val="0645AD"/>
+              </a:buClr>
+              <a:buFont typeface="Arial"/>
+              <a:buChar char="•"/>
+            </a:pPr>
+            <a:r>
+              <a:rPr sz="2400" b="0">
+                <a:solidFill>
+                  <a:srgbClr val="202122"/>
+                </a:solidFill>
+                <a:latin typeface="Calibri"/>
+              </a:rPr>
+              <a:t>Practise structured troubleshooting and documenting each test.</a:t>
+            </a:r>
+          </a:p>
+          <a:p>
+            <a:pPr marL="274320" indent="-274320">
+              <a:spcAft>
+                <a:spcPts val="1080"/>
+              </a:spcAft>
+              <a:buClr>
+                <a:srgbClr val="0645AD"/>
+              </a:buClr>
+              <a:buFont typeface="Arial"/>
+              <a:buChar char="•"/>
+            </a:pPr>
+            <a:r>
+              <a:rPr sz="2400" b="0">
+                <a:solidFill>
+                  <a:srgbClr val="202122"/>
+                </a:solidFill>
+                <a:latin typeface="Calibri"/>
+              </a:rPr>
+              <a:t>Practise drawing clear network diagrams with correct symbols and IP addresses.</a:t>
+            </a:r>
+          </a:p>
+          <a:p>
+            <a:pPr marL="274320" indent="-274320">
+              <a:spcAft>
+                <a:spcPts val="1080"/>
+              </a:spcAft>
+              <a:buClr>
+                <a:srgbClr val="0645AD"/>
+              </a:buClr>
+              <a:buFont typeface="Arial"/>
+              <a:buChar char="•"/>
+            </a:pPr>
+            <a:r>
+              <a:rPr sz="2400" b="0">
+                <a:solidFill>
+                  <a:srgbClr val="202122"/>
+                </a:solidFill>
+                <a:latin typeface="Calibri"/>
+              </a:rPr>
+              <a:t>Write reflections using a model such as Gibbs.</a:t>
+            </a:r>
+          </a:p>
+        </p:txBody>
+      </p:sp>
+      <p:sp>
+        <p:nvSpPr>
+          <p:cNvPr id="7" name="Rounded Rectangle 6"/>
+          <p:cNvSpPr/>
+          <p:nvPr/>
+        </p:nvSpPr>
+        <p:spPr>
+          <a:xfrm>
+            <a:off x="7772400" y="1600200"/>
+            <a:ext cx="3867912" cy="4434840"/>
+          </a:xfrm>
+          <a:prstGeom prst="roundRect">
+            <a:avLst>
+              <a:gd name="adj" fmla="val 8000"/>
+            </a:avLst>
+          </a:prstGeom>
+          <a:solidFill>
+            <a:srgbClr val="03306E"/>
+          </a:solidFill>
+          <a:ln>
+            <a:noFill/>
+          </a:ln>
+          <a:effectLst/>
+        </p:spPr>
+        <p:style>
+          <a:lnRef idx="1">
+            <a:schemeClr val="accent1"/>
+          </a:lnRef>
+          <a:fillRef idx="3">
+            <a:schemeClr val="accent1"/>
+          </a:fillRef>
+          <a:effectRef idx="2">
+            <a:schemeClr val="accent1"/>
+          </a:effectRef>
+          <a:fontRef idx="minor">
+            <a:schemeClr val="lt1"/>
+          </a:fontRef>
+        </p:style>
+        <p:txBody>
+          <a:bodyPr rtlCol="0" anchor="ctr"/>
+          <a:lstStyle/>
+          <a:p/>
+        </p:txBody>
+      </p:sp>
+      <p:sp>
+        <p:nvSpPr>
+          <p:cNvPr id="8" name="Oval 7"/>
+          <p:cNvSpPr/>
+          <p:nvPr/>
+        </p:nvSpPr>
+        <p:spPr>
+          <a:xfrm>
+            <a:off x="8046720" y="1874519"/>
+            <a:ext cx="548640" cy="548640"/>
+          </a:xfrm>
+          <a:prstGeom prst="ellipse">
+            <a:avLst/>
+          </a:prstGeom>
+          <a:solidFill>
+            <a:srgbClr val="F2B705"/>
+          </a:solidFill>
+          <a:ln>
+            <a:noFill/>
+          </a:ln>
+          <a:effectLst/>
+        </p:spPr>
+        <p:style>
+          <a:lnRef idx="1">
+            <a:schemeClr val="accent1"/>
+          </a:lnRef>
+          <a:fillRef idx="3">
+            <a:schemeClr val="accent1"/>
+          </a:fillRef>
+          <a:effectRef idx="2">
+            <a:schemeClr val="accent1"/>
+          </a:effectRef>
+          <a:fontRef idx="minor">
+            <a:schemeClr val="lt1"/>
+          </a:fontRef>
+        </p:style>
+        <p:txBody>
+          <a:bodyPr rtlCol="0" anchor="ctr" lIns="0" rIns="0" tIns="0" bIns="0"/>
+          <a:lstStyle/>
+          <a:p>
+            <a:pPr algn="ctr"/>
+            <a:r>
+              <a:rPr sz="2000" b="1">
+                <a:solidFill>
+                  <a:srgbClr val="202122"/>
+                </a:solidFill>
+                <a:latin typeface="Calibri"/>
+              </a:rPr>
+              <a:t>!</a:t>
+            </a:r>
+          </a:p>
+        </p:txBody>
+      </p:sp>
+      <p:sp>
+        <p:nvSpPr>
+          <p:cNvPr id="9" name="TextBox 8"/>
+          <p:cNvSpPr txBox="1"/>
+          <p:nvPr/>
+        </p:nvSpPr>
+        <p:spPr>
+          <a:xfrm>
+            <a:off x="8046720" y="2606040"/>
+            <a:ext cx="3291840" cy="365760"/>
+          </a:xfrm>
+          <a:prstGeom prst="rect">
+            <a:avLst/>
+          </a:prstGeom>
+          <a:noFill/>
+        </p:spPr>
+        <p:txBody>
+          <a:bodyPr wrap="square" anchor="t" lIns="0" rIns="0" tIns="0" bIns="0"/>
+          <a:lstStyle/>
+          <a:p>
+            <a:pPr algn="l"/>
+            <a:r>
+              <a:rPr sz="1300" b="1" i="0">
+                <a:solidFill>
+                  <a:srgbClr val="A9C8F0"/>
+                </a:solidFill>
+                <a:latin typeface="Calibri"/>
+              </a:rPr>
+              <a:t>KEY IDEA</a:t>
+            </a:r>
+          </a:p>
+        </p:txBody>
+      </p:sp>
+      <p:sp>
+        <p:nvSpPr>
+          <p:cNvPr id="10" name="TextBox 9"/>
+          <p:cNvSpPr txBox="1"/>
+          <p:nvPr/>
+        </p:nvSpPr>
+        <p:spPr>
+          <a:xfrm>
+            <a:off x="8046720" y="3017520"/>
+            <a:ext cx="3291840" cy="2926080"/>
+          </a:xfrm>
+          <a:prstGeom prst="rect">
+            <a:avLst/>
+          </a:prstGeom>
+          <a:noFill/>
+        </p:spPr>
+        <p:txBody>
+          <a:bodyPr wrap="square" anchor="t" lIns="0" rIns="0" tIns="0" bIns="0"/>
+          <a:lstStyle/>
+          <a:p>
+            <a:pPr algn="l"/>
+            <a:r>
+              <a:rPr sz="2200" b="0" i="0">
+                <a:solidFill>
+                  <a:srgbClr val="FFFFFF"/>
+                </a:solidFill>
+                <a:latin typeface="Cambria"/>
+              </a:rPr>
+              <a:t>Document as you go. Marks come from the evidence you record, not just from fixing the fault.</a:t>
+            </a:r>
+          </a:p>
+        </p:txBody>
+      </p:sp>
+    </p:spTree>
+  </p:cSld>
+  <p:clrMapOvr>
+    <a:masterClrMapping/>
+  </p:clrMapOvr>
+</p:sld>
+</file>
+
+<file path=ppt/slides/slide14.xml><?xml version="1.0" encoding="utf-8"?>
+<p:sld xmlns:a="http://schemas.openxmlformats.org/drawingml/2006/main" xmlns:p="http://schemas.openxmlformats.org/presentationml/2006/main" xmlns:r="http://schemas.openxmlformats.org/officeDocument/2006/relationships">
+  <p:cSld>
+    <p:bg>
+      <p:bgPr>
+        <a:solidFill>
+          <a:srgbClr val="FFFFFF"/>
+        </a:solidFill>
+        <a:effectLst/>
+      </p:bgPr>
+    </p:bg>
+    <p:spTree>
+      <p:nvGrpSpPr>
+        <p:cNvPr id="1" name=""/>
+        <p:cNvGrpSpPr/>
+        <p:nvPr/>
+      </p:nvGrpSpPr>
+      <p:grpSpPr/>
+      <p:sp>
+        <p:nvSpPr>
+          <p:cNvPr id="2" name="TextBox 1"/>
+          <p:cNvSpPr txBox="1"/>
+          <p:nvPr/>
+        </p:nvSpPr>
+        <p:spPr>
+          <a:xfrm>
+            <a:off x="548640" y="320040"/>
+            <a:ext cx="11094415" cy="274320"/>
+          </a:xfrm>
+          <a:prstGeom prst="rect">
+            <a:avLst/>
+          </a:prstGeom>
+          <a:noFill/>
+        </p:spPr>
+        <p:txBody>
+          <a:bodyPr wrap="square" anchor="t" lIns="0" rIns="0" tIns="0" bIns="0"/>
+          <a:lstStyle/>
+          <a:p>
+            <a:pPr algn="l"/>
+            <a:r>
+              <a:rPr sz="1100" b="1" i="0">
+                <a:solidFill>
+                  <a:srgbClr val="54595D"/>
+                </a:solidFill>
+                <a:latin typeface="Calibri"/>
+              </a:rPr>
+              <a:t>CORE COMPONENT  ·  Core Component</a:t>
+            </a:r>
+          </a:p>
+        </p:txBody>
+      </p:sp>
+      <p:sp>
+        <p:nvSpPr>
+          <p:cNvPr id="3" name="TextBox 2"/>
+          <p:cNvSpPr txBox="1"/>
+          <p:nvPr/>
+        </p:nvSpPr>
+        <p:spPr>
+          <a:xfrm>
+            <a:off x="548640" y="566928"/>
+            <a:ext cx="11094415" cy="822960"/>
+          </a:xfrm>
+          <a:prstGeom prst="rect">
+            <a:avLst/>
+          </a:prstGeom>
+          <a:noFill/>
+        </p:spPr>
+        <p:txBody>
+          <a:bodyPr wrap="square" anchor="ctr" lIns="0" rIns="0" tIns="0" bIns="0"/>
+          <a:lstStyle/>
+          <a:p>
+            <a:pPr algn="l"/>
+            <a:r>
+              <a:rPr sz="3200" b="1" i="0">
+                <a:solidFill>
+                  <a:srgbClr val="03306E"/>
+                </a:solidFill>
+                <a:latin typeface="Cambria"/>
+              </a:rPr>
+              <a:t>Check your understanding</a:t>
+            </a:r>
+          </a:p>
+        </p:txBody>
+      </p:sp>
+      <p:sp>
+        <p:nvSpPr>
+          <p:cNvPr id="4" name="TextBox 3"/>
+          <p:cNvSpPr txBox="1"/>
+          <p:nvPr/>
+        </p:nvSpPr>
+        <p:spPr>
+          <a:xfrm>
+            <a:off x="548640" y="6446520"/>
+            <a:ext cx="8229600" cy="274320"/>
+          </a:xfrm>
+          <a:prstGeom prst="rect">
+            <a:avLst/>
+          </a:prstGeom>
+          <a:noFill/>
+        </p:spPr>
+        <p:txBody>
+          <a:bodyPr wrap="square" anchor="t" lIns="0" rIns="0" tIns="0" bIns="0"/>
+          <a:lstStyle/>
+          <a:p>
+            <a:pPr algn="l"/>
+            <a:r>
+              <a:rPr sz="1000" b="0" i="0">
+                <a:solidFill>
+                  <a:srgbClr val="54595D"/>
+                </a:solidFill>
+                <a:latin typeface="Calibri"/>
+              </a:rPr>
+              <a:t>Digital Support and Security T Level  ·  The Employer Set Project</a:t>
+            </a:r>
+          </a:p>
+        </p:txBody>
+      </p:sp>
+      <p:sp>
+        <p:nvSpPr>
+          <p:cNvPr id="5" name="TextBox 4"/>
+          <p:cNvSpPr txBox="1"/>
+          <p:nvPr/>
+        </p:nvSpPr>
+        <p:spPr>
+          <a:xfrm>
+            <a:off x="10728655" y="6446520"/>
+            <a:ext cx="914400" cy="274320"/>
+          </a:xfrm>
+          <a:prstGeom prst="rect">
+            <a:avLst/>
+          </a:prstGeom>
+          <a:noFill/>
+        </p:spPr>
+        <p:txBody>
+          <a:bodyPr wrap="square" anchor="t" lIns="0" rIns="0" tIns="0" bIns="0"/>
+          <a:lstStyle/>
+          <a:p>
+            <a:pPr algn="r"/>
+            <a:r>
+              <a:rPr sz="1000" b="0" i="0">
+                <a:solidFill>
+                  <a:srgbClr val="54595D"/>
+                </a:solidFill>
+                <a:latin typeface="Calibri"/>
+              </a:rPr>
+              <a:t>14</a:t>
+            </a:r>
+          </a:p>
+        </p:txBody>
+      </p:sp>
+      <p:sp>
+        <p:nvSpPr>
+          <p:cNvPr id="6" name="Oval 5"/>
+          <p:cNvSpPr/>
+          <p:nvPr/>
+        </p:nvSpPr>
+        <p:spPr>
+          <a:xfrm>
+            <a:off x="548640" y="1618488"/>
+            <a:ext cx="411480" cy="411480"/>
+          </a:xfrm>
+          <a:prstGeom prst="ellipse">
+            <a:avLst/>
+          </a:prstGeom>
+          <a:solidFill>
+            <a:srgbClr val="F2B705"/>
+          </a:solidFill>
+          <a:ln>
+            <a:noFill/>
+          </a:ln>
+          <a:effectLst/>
+        </p:spPr>
+        <p:style>
+          <a:lnRef idx="1">
+            <a:schemeClr val="accent1"/>
+          </a:lnRef>
+          <a:fillRef idx="3">
+            <a:schemeClr val="accent1"/>
+          </a:fillRef>
+          <a:effectRef idx="2">
+            <a:schemeClr val="accent1"/>
+          </a:effectRef>
+          <a:fontRef idx="minor">
+            <a:schemeClr val="lt1"/>
+          </a:fontRef>
+        </p:style>
+        <p:txBody>
+          <a:bodyPr rtlCol="0" anchor="ctr" lIns="0" rIns="0" tIns="0" bIns="0"/>
+          <a:lstStyle/>
+          <a:p>
+            <a:pPr algn="ctr"/>
+            <a:r>
+              <a:rPr sz="1400" b="1">
+                <a:solidFill>
+                  <a:srgbClr val="202122"/>
+                </a:solidFill>
+                <a:latin typeface="Calibri"/>
+              </a:rPr>
+              <a:t>1</a:t>
+            </a:r>
+          </a:p>
+        </p:txBody>
+      </p:sp>
+      <p:sp>
+        <p:nvSpPr>
+          <p:cNvPr id="7" name="TextBox 6"/>
+          <p:cNvSpPr txBox="1"/>
+          <p:nvPr/>
+        </p:nvSpPr>
+        <p:spPr>
+          <a:xfrm>
+            <a:off x="1234440" y="1600200"/>
+            <a:ext cx="10408615" cy="1030986"/>
+          </a:xfrm>
+          <a:prstGeom prst="rect">
+            <a:avLst/>
+          </a:prstGeom>
+          <a:noFill/>
+        </p:spPr>
+        <p:txBody>
+          <a:bodyPr wrap="square" anchor="t" lIns="0" rIns="0" tIns="0" bIns="0"/>
+          <a:lstStyle/>
+          <a:p>
+            <a:pPr algn="l"/>
+            <a:r>
+              <a:rPr sz="2200" b="0" i="0">
+                <a:solidFill>
+                  <a:srgbClr val="202122"/>
+                </a:solidFill>
+                <a:latin typeface="Calibri"/>
+              </a:rPr>
+              <a:t>What percentage of the total qualification is the ESP?</a:t>
+            </a:r>
+          </a:p>
+        </p:txBody>
+      </p:sp>
+      <p:sp>
+        <p:nvSpPr>
+          <p:cNvPr id="8" name="Oval 7"/>
+          <p:cNvSpPr/>
+          <p:nvPr/>
+        </p:nvSpPr>
+        <p:spPr>
+          <a:xfrm>
+            <a:off x="548640" y="2814066"/>
+            <a:ext cx="411480" cy="411480"/>
+          </a:xfrm>
+          <a:prstGeom prst="ellipse">
+            <a:avLst/>
+          </a:prstGeom>
+          <a:solidFill>
+            <a:srgbClr val="F2B705"/>
+          </a:solidFill>
+          <a:ln>
+            <a:noFill/>
+          </a:ln>
+          <a:effectLst/>
+        </p:spPr>
+        <p:style>
+          <a:lnRef idx="1">
+            <a:schemeClr val="accent1"/>
+          </a:lnRef>
+          <a:fillRef idx="3">
+            <a:schemeClr val="accent1"/>
+          </a:fillRef>
+          <a:effectRef idx="2">
+            <a:schemeClr val="accent1"/>
+          </a:effectRef>
+          <a:fontRef idx="minor">
+            <a:schemeClr val="lt1"/>
+          </a:fontRef>
+        </p:style>
+        <p:txBody>
+          <a:bodyPr rtlCol="0" anchor="ctr" lIns="0" rIns="0" tIns="0" bIns="0"/>
+          <a:lstStyle/>
+          <a:p>
+            <a:pPr algn="ctr"/>
+            <a:r>
+              <a:rPr sz="1400" b="1">
+                <a:solidFill>
+                  <a:srgbClr val="202122"/>
+                </a:solidFill>
+                <a:latin typeface="Calibri"/>
+              </a:rPr>
+              <a:t>2</a:t>
+            </a:r>
+          </a:p>
+        </p:txBody>
+      </p:sp>
+      <p:sp>
+        <p:nvSpPr>
+          <p:cNvPr id="9" name="TextBox 8"/>
+          <p:cNvSpPr txBox="1"/>
+          <p:nvPr/>
+        </p:nvSpPr>
+        <p:spPr>
+          <a:xfrm>
+            <a:off x="1234440" y="2795778"/>
+            <a:ext cx="10408615" cy="1030986"/>
+          </a:xfrm>
+          <a:prstGeom prst="rect">
+            <a:avLst/>
+          </a:prstGeom>
+          <a:noFill/>
+        </p:spPr>
+        <p:txBody>
+          <a:bodyPr wrap="square" anchor="t" lIns="0" rIns="0" tIns="0" bIns="0"/>
+          <a:lstStyle/>
+          <a:p>
+            <a:pPr algn="l"/>
+            <a:r>
+              <a:rPr sz="2200" b="0" i="0">
+                <a:solidFill>
+                  <a:srgbClr val="202122"/>
+                </a:solidFill>
+                <a:latin typeface="Calibri"/>
+              </a:rPr>
+              <a:t>What two planning documents does Task 1 require, apart from the rationale?</a:t>
+            </a:r>
+          </a:p>
+        </p:txBody>
+      </p:sp>
+      <p:sp>
+        <p:nvSpPr>
+          <p:cNvPr id="10" name="Oval 9"/>
+          <p:cNvSpPr/>
+          <p:nvPr/>
+        </p:nvSpPr>
+        <p:spPr>
+          <a:xfrm>
+            <a:off x="548640" y="4009644"/>
+            <a:ext cx="411480" cy="411480"/>
+          </a:xfrm>
+          <a:prstGeom prst="ellipse">
+            <a:avLst/>
+          </a:prstGeom>
+          <a:solidFill>
+            <a:srgbClr val="F2B705"/>
+          </a:solidFill>
+          <a:ln>
+            <a:noFill/>
+          </a:ln>
+          <a:effectLst/>
+        </p:spPr>
+        <p:style>
+          <a:lnRef idx="1">
+            <a:schemeClr val="accent1"/>
+          </a:lnRef>
+          <a:fillRef idx="3">
+            <a:schemeClr val="accent1"/>
+          </a:fillRef>
+          <a:effectRef idx="2">
+            <a:schemeClr val="accent1"/>
+          </a:effectRef>
+          <a:fontRef idx="minor">
+            <a:schemeClr val="lt1"/>
+          </a:fontRef>
+        </p:style>
+        <p:txBody>
+          <a:bodyPr rtlCol="0" anchor="ctr" lIns="0" rIns="0" tIns="0" bIns="0"/>
+          <a:lstStyle/>
+          <a:p>
+            <a:pPr algn="ctr"/>
+            <a:r>
+              <a:rPr sz="1400" b="1">
+                <a:solidFill>
+                  <a:srgbClr val="202122"/>
+                </a:solidFill>
+                <a:latin typeface="Calibri"/>
+              </a:rPr>
+              <a:t>3</a:t>
+            </a:r>
+          </a:p>
+        </p:txBody>
+      </p:sp>
+      <p:sp>
+        <p:nvSpPr>
+          <p:cNvPr id="11" name="TextBox 10"/>
+          <p:cNvSpPr txBox="1"/>
+          <p:nvPr/>
+        </p:nvSpPr>
+        <p:spPr>
+          <a:xfrm>
+            <a:off x="1234440" y="3991356"/>
+            <a:ext cx="10408615" cy="1030986"/>
+          </a:xfrm>
+          <a:prstGeom prst="rect">
+            <a:avLst/>
+          </a:prstGeom>
+          <a:noFill/>
+        </p:spPr>
+        <p:txBody>
+          <a:bodyPr wrap="square" anchor="t" lIns="0" rIns="0" tIns="0" bIns="0"/>
+          <a:lstStyle/>
+          <a:p>
+            <a:pPr algn="l"/>
+            <a:r>
+              <a:rPr sz="2200" b="0" i="0">
+                <a:solidFill>
+                  <a:srgbClr val="202122"/>
+                </a:solidFill>
+                <a:latin typeface="Calibri"/>
+              </a:rPr>
+              <a:t>What does the Cyber Security pathway produce in Task 3?</a:t>
+            </a:r>
+          </a:p>
+        </p:txBody>
+      </p:sp>
+      <p:sp>
+        <p:nvSpPr>
+          <p:cNvPr id="12" name="Oval 11"/>
+          <p:cNvSpPr/>
+          <p:nvPr/>
+        </p:nvSpPr>
+        <p:spPr>
+          <a:xfrm>
+            <a:off x="548640" y="5205221"/>
+            <a:ext cx="411480" cy="411480"/>
+          </a:xfrm>
+          <a:prstGeom prst="ellipse">
+            <a:avLst/>
+          </a:prstGeom>
+          <a:solidFill>
+            <a:srgbClr val="F2B705"/>
+          </a:solidFill>
+          <a:ln>
+            <a:noFill/>
+          </a:ln>
+          <a:effectLst/>
+        </p:spPr>
+        <p:style>
+          <a:lnRef idx="1">
+            <a:schemeClr val="accent1"/>
+          </a:lnRef>
+          <a:fillRef idx="3">
+            <a:schemeClr val="accent1"/>
+          </a:fillRef>
+          <a:effectRef idx="2">
+            <a:schemeClr val="accent1"/>
+          </a:effectRef>
+          <a:fontRef idx="minor">
+            <a:schemeClr val="lt1"/>
+          </a:fontRef>
+        </p:style>
+        <p:txBody>
+          <a:bodyPr rtlCol="0" anchor="ctr" lIns="0" rIns="0" tIns="0" bIns="0"/>
+          <a:lstStyle/>
+          <a:p>
+            <a:pPr algn="ctr"/>
+            <a:r>
+              <a:rPr sz="1400" b="1">
+                <a:solidFill>
+                  <a:srgbClr val="202122"/>
+                </a:solidFill>
+                <a:latin typeface="Calibri"/>
+              </a:rPr>
+              <a:t>4</a:t>
+            </a:r>
+          </a:p>
+        </p:txBody>
+      </p:sp>
+      <p:sp>
+        <p:nvSpPr>
+          <p:cNvPr id="13" name="TextBox 12"/>
+          <p:cNvSpPr txBox="1"/>
+          <p:nvPr/>
+        </p:nvSpPr>
+        <p:spPr>
+          <a:xfrm>
+            <a:off x="1234440" y="5186933"/>
+            <a:ext cx="10408615" cy="1030986"/>
+          </a:xfrm>
+          <a:prstGeom prst="rect">
+            <a:avLst/>
+          </a:prstGeom>
+          <a:noFill/>
+        </p:spPr>
+        <p:txBody>
+          <a:bodyPr wrap="square" anchor="t" lIns="0" rIns="0" tIns="0" bIns="0"/>
+          <a:lstStyle/>
+          <a:p>
+            <a:pPr algn="l"/>
+            <a:r>
+              <a:rPr sz="2200" b="0" i="0">
+                <a:solidFill>
+                  <a:srgbClr val="202122"/>
+                </a:solidFill>
+                <a:latin typeface="Calibri"/>
+              </a:rPr>
+              <a:t>Name the four considerations in Task 4a.</a:t>
+            </a:r>
+          </a:p>
+        </p:txBody>
+      </p:sp>
+    </p:spTree>
+  </p:cSld>
+  <p:clrMapOvr>
+    <a:masterClrMapping/>
+  </p:clrMapOvr>
+</p:sld>
+</file>
+
+<file path=ppt/slides/slide15.xml><?xml version="1.0" encoding="utf-8"?>
+<p:sld xmlns:a="http://schemas.openxmlformats.org/drawingml/2006/main" xmlns:p="http://schemas.openxmlformats.org/presentationml/2006/main" xmlns:r="http://schemas.openxmlformats.org/officeDocument/2006/relationships">
+  <p:cSld>
+    <p:bg>
+      <p:bgPr>
+        <a:solidFill>
+          <a:srgbClr val="FFFFFF"/>
+        </a:solidFill>
+        <a:effectLst/>
+      </p:bgPr>
+    </p:bg>
+    <p:spTree>
+      <p:nvGrpSpPr>
+        <p:cNvPr id="1" name=""/>
+        <p:cNvGrpSpPr/>
+        <p:nvPr/>
+      </p:nvGrpSpPr>
+      <p:grpSpPr/>
+      <p:sp>
+        <p:nvSpPr>
+          <p:cNvPr id="2" name="TextBox 1"/>
+          <p:cNvSpPr txBox="1"/>
+          <p:nvPr/>
+        </p:nvSpPr>
+        <p:spPr>
+          <a:xfrm>
+            <a:off x="548640" y="320040"/>
+            <a:ext cx="11094415" cy="274320"/>
+          </a:xfrm>
+          <a:prstGeom prst="rect">
+            <a:avLst/>
+          </a:prstGeom>
+          <a:noFill/>
+        </p:spPr>
+        <p:txBody>
+          <a:bodyPr wrap="square" anchor="t" lIns="0" rIns="0" tIns="0" bIns="0"/>
+          <a:lstStyle/>
+          <a:p>
+            <a:pPr algn="l"/>
+            <a:r>
+              <a:rPr sz="1100" b="1" i="0">
+                <a:solidFill>
+                  <a:srgbClr val="54595D"/>
+                </a:solidFill>
+                <a:latin typeface="Calibri"/>
+              </a:rPr>
+              <a:t>CORE COMPONENT  ·  Core Component</a:t>
+            </a:r>
+          </a:p>
+        </p:txBody>
+      </p:sp>
+      <p:sp>
+        <p:nvSpPr>
+          <p:cNvPr id="3" name="TextBox 2"/>
+          <p:cNvSpPr txBox="1"/>
+          <p:nvPr/>
+        </p:nvSpPr>
+        <p:spPr>
+          <a:xfrm>
+            <a:off x="548640" y="566928"/>
+            <a:ext cx="11094415" cy="822960"/>
+          </a:xfrm>
+          <a:prstGeom prst="rect">
+            <a:avLst/>
+          </a:prstGeom>
+          <a:noFill/>
+        </p:spPr>
+        <p:txBody>
+          <a:bodyPr wrap="square" anchor="ctr" lIns="0" rIns="0" tIns="0" bIns="0"/>
+          <a:lstStyle/>
+          <a:p>
+            <a:pPr algn="l"/>
+            <a:r>
+              <a:rPr sz="3200" b="1" i="0">
+                <a:solidFill>
+                  <a:srgbClr val="03306E"/>
+                </a:solidFill>
+                <a:latin typeface="Cambria"/>
+              </a:rPr>
+              <a:t>Answers</a:t>
+            </a:r>
+          </a:p>
+        </p:txBody>
+      </p:sp>
+      <p:sp>
+        <p:nvSpPr>
+          <p:cNvPr id="4" name="TextBox 3"/>
+          <p:cNvSpPr txBox="1"/>
+          <p:nvPr/>
+        </p:nvSpPr>
+        <p:spPr>
+          <a:xfrm>
+            <a:off x="548640" y="6446520"/>
+            <a:ext cx="8229600" cy="274320"/>
+          </a:xfrm>
+          <a:prstGeom prst="rect">
+            <a:avLst/>
+          </a:prstGeom>
+          <a:noFill/>
+        </p:spPr>
+        <p:txBody>
+          <a:bodyPr wrap="square" anchor="t" lIns="0" rIns="0" tIns="0" bIns="0"/>
+          <a:lstStyle/>
+          <a:p>
+            <a:pPr algn="l"/>
+            <a:r>
+              <a:rPr sz="1000" b="0" i="0">
+                <a:solidFill>
+                  <a:srgbClr val="54595D"/>
+                </a:solidFill>
+                <a:latin typeface="Calibri"/>
+              </a:rPr>
+              <a:t>Digital Support and Security T Level  ·  The Employer Set Project</a:t>
+            </a:r>
+          </a:p>
+        </p:txBody>
+      </p:sp>
+      <p:sp>
+        <p:nvSpPr>
+          <p:cNvPr id="5" name="TextBox 4"/>
+          <p:cNvSpPr txBox="1"/>
+          <p:nvPr/>
+        </p:nvSpPr>
+        <p:spPr>
+          <a:xfrm>
+            <a:off x="10728655" y="6446520"/>
+            <a:ext cx="914400" cy="274320"/>
+          </a:xfrm>
+          <a:prstGeom prst="rect">
+            <a:avLst/>
+          </a:prstGeom>
+          <a:noFill/>
+        </p:spPr>
+        <p:txBody>
+          <a:bodyPr wrap="square" anchor="t" lIns="0" rIns="0" tIns="0" bIns="0"/>
+          <a:lstStyle/>
+          <a:p>
+            <a:pPr algn="r"/>
+            <a:r>
+              <a:rPr sz="1000" b="0" i="0">
+                <a:solidFill>
+                  <a:srgbClr val="54595D"/>
+                </a:solidFill>
+                <a:latin typeface="Calibri"/>
+              </a:rPr>
+              <a:t>15</a:t>
+            </a:r>
+          </a:p>
+        </p:txBody>
+      </p:sp>
+      <p:sp>
+        <p:nvSpPr>
+          <p:cNvPr id="6" name="Oval 5"/>
+          <p:cNvSpPr/>
+          <p:nvPr/>
+        </p:nvSpPr>
+        <p:spPr>
+          <a:xfrm>
+            <a:off x="548640" y="1618488"/>
+            <a:ext cx="411480" cy="411480"/>
+          </a:xfrm>
+          <a:prstGeom prst="ellipse">
+            <a:avLst/>
+          </a:prstGeom>
+          <a:solidFill>
+            <a:srgbClr val="F2B705"/>
+          </a:solidFill>
+          <a:ln>
+            <a:noFill/>
+          </a:ln>
+          <a:effectLst/>
+        </p:spPr>
+        <p:style>
+          <a:lnRef idx="1">
+            <a:schemeClr val="accent1"/>
+          </a:lnRef>
+          <a:fillRef idx="3">
+            <a:schemeClr val="accent1"/>
+          </a:fillRef>
+          <a:effectRef idx="2">
+            <a:schemeClr val="accent1"/>
+          </a:effectRef>
+          <a:fontRef idx="minor">
+            <a:schemeClr val="lt1"/>
+          </a:fontRef>
+        </p:style>
+        <p:txBody>
+          <a:bodyPr rtlCol="0" anchor="ctr" lIns="0" rIns="0" tIns="0" bIns="0"/>
+          <a:lstStyle/>
+          <a:p>
+            <a:pPr algn="ctr"/>
+            <a:r>
+              <a:rPr sz="1400" b="1">
+                <a:solidFill>
+                  <a:srgbClr val="202122"/>
+                </a:solidFill>
+                <a:latin typeface="Calibri"/>
+              </a:rPr>
+              <a:t>1</a:t>
+            </a:r>
+          </a:p>
+        </p:txBody>
+      </p:sp>
+      <p:sp>
+        <p:nvSpPr>
+          <p:cNvPr id="7" name="TextBox 6"/>
+          <p:cNvSpPr txBox="1"/>
+          <p:nvPr/>
+        </p:nvSpPr>
+        <p:spPr>
+          <a:xfrm>
+            <a:off x="1234440" y="1600200"/>
+            <a:ext cx="10408615" cy="1030986"/>
+          </a:xfrm>
+          <a:prstGeom prst="rect">
+            <a:avLst/>
+          </a:prstGeom>
+          <a:noFill/>
+        </p:spPr>
+        <p:txBody>
+          <a:bodyPr wrap="square" anchor="t" lIns="0" rIns="0" tIns="0" bIns="0"/>
+          <a:lstStyle/>
+          <a:p>
+            <a:pPr algn="l"/>
+            <a:r>
+              <a:rPr sz="1800" b="0" i="0">
+                <a:solidFill>
+                  <a:srgbClr val="54595D"/>
+                </a:solidFill>
+                <a:latin typeface="Calibri"/>
+              </a:rPr>
+              <a:t>What percentage of the total qualification is the ESP?</a:t>
+            </a:r>
+          </a:p>
+          <a:p>
+            <a:r>
+              <a:rPr sz="1800" b="1">
+                <a:solidFill>
+                  <a:srgbClr val="03306E"/>
+                </a:solidFill>
+                <a:latin typeface="Calibri"/>
+              </a:rPr>
+              <a:t>20%.</a:t>
+            </a:r>
+          </a:p>
+        </p:txBody>
+      </p:sp>
+      <p:sp>
+        <p:nvSpPr>
+          <p:cNvPr id="8" name="Oval 7"/>
+          <p:cNvSpPr/>
+          <p:nvPr/>
+        </p:nvSpPr>
+        <p:spPr>
+          <a:xfrm>
+            <a:off x="548640" y="2814066"/>
+            <a:ext cx="411480" cy="411480"/>
+          </a:xfrm>
+          <a:prstGeom prst="ellipse">
+            <a:avLst/>
+          </a:prstGeom>
+          <a:solidFill>
+            <a:srgbClr val="F2B705"/>
+          </a:solidFill>
+          <a:ln>
+            <a:noFill/>
+          </a:ln>
+          <a:effectLst/>
+        </p:spPr>
+        <p:style>
+          <a:lnRef idx="1">
+            <a:schemeClr val="accent1"/>
+          </a:lnRef>
+          <a:fillRef idx="3">
+            <a:schemeClr val="accent1"/>
+          </a:fillRef>
+          <a:effectRef idx="2">
+            <a:schemeClr val="accent1"/>
+          </a:effectRef>
+          <a:fontRef idx="minor">
+            <a:schemeClr val="lt1"/>
+          </a:fontRef>
+        </p:style>
+        <p:txBody>
+          <a:bodyPr rtlCol="0" anchor="ctr" lIns="0" rIns="0" tIns="0" bIns="0"/>
+          <a:lstStyle/>
+          <a:p>
+            <a:pPr algn="ctr"/>
+            <a:r>
+              <a:rPr sz="1400" b="1">
+                <a:solidFill>
+                  <a:srgbClr val="202122"/>
+                </a:solidFill>
+                <a:latin typeface="Calibri"/>
+              </a:rPr>
+              <a:t>2</a:t>
+            </a:r>
+          </a:p>
+        </p:txBody>
+      </p:sp>
+      <p:sp>
+        <p:nvSpPr>
+          <p:cNvPr id="9" name="TextBox 8"/>
+          <p:cNvSpPr txBox="1"/>
+          <p:nvPr/>
+        </p:nvSpPr>
+        <p:spPr>
+          <a:xfrm>
+            <a:off x="1234440" y="2795778"/>
+            <a:ext cx="10408615" cy="1030986"/>
+          </a:xfrm>
+          <a:prstGeom prst="rect">
+            <a:avLst/>
+          </a:prstGeom>
+          <a:noFill/>
+        </p:spPr>
+        <p:txBody>
+          <a:bodyPr wrap="square" anchor="t" lIns="0" rIns="0" tIns="0" bIns="0"/>
+          <a:lstStyle/>
+          <a:p>
+            <a:pPr algn="l"/>
+            <a:r>
+              <a:rPr sz="1800" b="0" i="0">
+                <a:solidFill>
+                  <a:srgbClr val="54595D"/>
+                </a:solidFill>
+                <a:latin typeface="Calibri"/>
+              </a:rPr>
+              <a:t>What two planning documents does Task 1 require, apart from the rationale?</a:t>
+            </a:r>
+          </a:p>
+          <a:p>
+            <a:r>
+              <a:rPr sz="1800" b="1">
+                <a:solidFill>
+                  <a:srgbClr val="03306E"/>
+                </a:solidFill>
+                <a:latin typeface="Calibri"/>
+              </a:rPr>
+              <a:t>A Gantt chart and a resource and cost plan.</a:t>
+            </a:r>
+          </a:p>
+        </p:txBody>
+      </p:sp>
+      <p:sp>
+        <p:nvSpPr>
+          <p:cNvPr id="10" name="Oval 9"/>
+          <p:cNvSpPr/>
+          <p:nvPr/>
+        </p:nvSpPr>
+        <p:spPr>
+          <a:xfrm>
+            <a:off x="548640" y="4009644"/>
+            <a:ext cx="411480" cy="411480"/>
+          </a:xfrm>
+          <a:prstGeom prst="ellipse">
+            <a:avLst/>
+          </a:prstGeom>
+          <a:solidFill>
+            <a:srgbClr val="F2B705"/>
+          </a:solidFill>
+          <a:ln>
+            <a:noFill/>
+          </a:ln>
+          <a:effectLst/>
+        </p:spPr>
+        <p:style>
+          <a:lnRef idx="1">
+            <a:schemeClr val="accent1"/>
+          </a:lnRef>
+          <a:fillRef idx="3">
+            <a:schemeClr val="accent1"/>
+          </a:fillRef>
+          <a:effectRef idx="2">
+            <a:schemeClr val="accent1"/>
+          </a:effectRef>
+          <a:fontRef idx="minor">
+            <a:schemeClr val="lt1"/>
+          </a:fontRef>
+        </p:style>
+        <p:txBody>
+          <a:bodyPr rtlCol="0" anchor="ctr" lIns="0" rIns="0" tIns="0" bIns="0"/>
+          <a:lstStyle/>
+          <a:p>
+            <a:pPr algn="ctr"/>
+            <a:r>
+              <a:rPr sz="1400" b="1">
+                <a:solidFill>
+                  <a:srgbClr val="202122"/>
+                </a:solidFill>
+                <a:latin typeface="Calibri"/>
+              </a:rPr>
+              <a:t>3</a:t>
+            </a:r>
+          </a:p>
+        </p:txBody>
+      </p:sp>
+      <p:sp>
+        <p:nvSpPr>
+          <p:cNvPr id="11" name="TextBox 10"/>
+          <p:cNvSpPr txBox="1"/>
+          <p:nvPr/>
+        </p:nvSpPr>
+        <p:spPr>
+          <a:xfrm>
+            <a:off x="1234440" y="3991356"/>
+            <a:ext cx="10408615" cy="1030986"/>
+          </a:xfrm>
+          <a:prstGeom prst="rect">
+            <a:avLst/>
+          </a:prstGeom>
+          <a:noFill/>
+        </p:spPr>
+        <p:txBody>
+          <a:bodyPr wrap="square" anchor="t" lIns="0" rIns="0" tIns="0" bIns="0"/>
+          <a:lstStyle/>
+          <a:p>
+            <a:pPr algn="l"/>
+            <a:r>
+              <a:rPr sz="1800" b="0" i="0">
+                <a:solidFill>
+                  <a:srgbClr val="54595D"/>
+                </a:solidFill>
+                <a:latin typeface="Calibri"/>
+              </a:rPr>
+              <a:t>What does the Cyber Security pathway produce in Task 3?</a:t>
+            </a:r>
+          </a:p>
+          <a:p>
+            <a:r>
+              <a:rPr sz="1800" b="1">
+                <a:solidFill>
+                  <a:srgbClr val="03306E"/>
+                </a:solidFill>
+                <a:latin typeface="Calibri"/>
+              </a:rPr>
+              <a:t>A security plan.</a:t>
+            </a:r>
+          </a:p>
+        </p:txBody>
+      </p:sp>
+      <p:sp>
+        <p:nvSpPr>
+          <p:cNvPr id="12" name="Oval 11"/>
+          <p:cNvSpPr/>
+          <p:nvPr/>
+        </p:nvSpPr>
+        <p:spPr>
+          <a:xfrm>
+            <a:off x="548640" y="5205221"/>
+            <a:ext cx="411480" cy="411480"/>
+          </a:xfrm>
+          <a:prstGeom prst="ellipse">
+            <a:avLst/>
+          </a:prstGeom>
+          <a:solidFill>
+            <a:srgbClr val="F2B705"/>
+          </a:solidFill>
+          <a:ln>
+            <a:noFill/>
+          </a:ln>
+          <a:effectLst/>
+        </p:spPr>
+        <p:style>
+          <a:lnRef idx="1">
+            <a:schemeClr val="accent1"/>
+          </a:lnRef>
+          <a:fillRef idx="3">
+            <a:schemeClr val="accent1"/>
+          </a:fillRef>
+          <a:effectRef idx="2">
+            <a:schemeClr val="accent1"/>
+          </a:effectRef>
+          <a:fontRef idx="minor">
+            <a:schemeClr val="lt1"/>
+          </a:fontRef>
+        </p:style>
+        <p:txBody>
+          <a:bodyPr rtlCol="0" anchor="ctr" lIns="0" rIns="0" tIns="0" bIns="0"/>
+          <a:lstStyle/>
+          <a:p>
+            <a:pPr algn="ctr"/>
+            <a:r>
+              <a:rPr sz="1400" b="1">
+                <a:solidFill>
+                  <a:srgbClr val="202122"/>
+                </a:solidFill>
+                <a:latin typeface="Calibri"/>
+              </a:rPr>
+              <a:t>4</a:t>
+            </a:r>
+          </a:p>
+        </p:txBody>
+      </p:sp>
+      <p:sp>
+        <p:nvSpPr>
+          <p:cNvPr id="13" name="TextBox 12"/>
+          <p:cNvSpPr txBox="1"/>
+          <p:nvPr/>
+        </p:nvSpPr>
+        <p:spPr>
+          <a:xfrm>
+            <a:off x="1234440" y="5186933"/>
+            <a:ext cx="10408615" cy="1030986"/>
+          </a:xfrm>
+          <a:prstGeom prst="rect">
+            <a:avLst/>
+          </a:prstGeom>
+          <a:noFill/>
+        </p:spPr>
+        <p:txBody>
+          <a:bodyPr wrap="square" anchor="t" lIns="0" rIns="0" tIns="0" bIns="0"/>
+          <a:lstStyle/>
+          <a:p>
+            <a:pPr algn="l"/>
+            <a:r>
+              <a:rPr sz="1800" b="0" i="0">
+                <a:solidFill>
+                  <a:srgbClr val="54595D"/>
+                </a:solidFill>
+                <a:latin typeface="Calibri"/>
+              </a:rPr>
+              <a:t>Name the four considerations in Task 4a.</a:t>
+            </a:r>
+          </a:p>
+          <a:p>
+            <a:r>
+              <a:rPr sz="1800" b="1">
+                <a:solidFill>
+                  <a:srgbClr val="03306E"/>
+                </a:solidFill>
+                <a:latin typeface="Calibri"/>
+              </a:rPr>
+              <a:t>Robustness, security, organisation and user experience.</a:t>
+            </a:r>
+          </a:p>
+        </p:txBody>
+      </p:sp>
+    </p:spTree>
+  </p:cSld>
+  <p:clrMapOvr>
+    <a:masterClrMapping/>
+  </p:clrMapOvr>
+</p:sld>
+</file>
+
+<file path=ppt/slides/slide16.xml><?xml version="1.0" encoding="utf-8"?>
+<p:sld xmlns:a="http://schemas.openxmlformats.org/drawingml/2006/main" xmlns:p="http://schemas.openxmlformats.org/presentationml/2006/main" xmlns:r="http://schemas.openxmlformats.org/officeDocument/2006/relationships">
+  <p:cSld>
+    <p:bg>
+      <p:bgPr>
+        <a:solidFill>
+          <a:srgbClr val="FFFFFF"/>
+        </a:solidFill>
+        <a:effectLst/>
+      </p:bgPr>
+    </p:bg>
+    <p:spTree>
+      <p:nvGrpSpPr>
+        <p:cNvPr id="1" name=""/>
+        <p:cNvGrpSpPr/>
+        <p:nvPr/>
+      </p:nvGrpSpPr>
+      <p:grpSpPr/>
+      <p:sp>
+        <p:nvSpPr>
+          <p:cNvPr id="2" name="TextBox 1"/>
+          <p:cNvSpPr txBox="1"/>
+          <p:nvPr/>
+        </p:nvSpPr>
+        <p:spPr>
+          <a:xfrm>
+            <a:off x="548640" y="320040"/>
+            <a:ext cx="11094415" cy="274320"/>
+          </a:xfrm>
+          <a:prstGeom prst="rect">
+            <a:avLst/>
+          </a:prstGeom>
+          <a:noFill/>
+        </p:spPr>
+        <p:txBody>
+          <a:bodyPr wrap="square" anchor="t" lIns="0" rIns="0" tIns="0" bIns="0"/>
+          <a:lstStyle/>
+          <a:p>
+            <a:pPr algn="l"/>
+            <a:r>
+              <a:rPr sz="1100" b="1" i="0">
+                <a:solidFill>
+                  <a:srgbClr val="54595D"/>
+                </a:solidFill>
+                <a:latin typeface="Calibri"/>
+              </a:rPr>
+              <a:t>CORE COMPONENT  ·  Core Component</a:t>
+            </a:r>
+          </a:p>
+        </p:txBody>
+      </p:sp>
+      <p:sp>
+        <p:nvSpPr>
+          <p:cNvPr id="3" name="TextBox 2"/>
+          <p:cNvSpPr txBox="1"/>
+          <p:nvPr/>
+        </p:nvSpPr>
+        <p:spPr>
+          <a:xfrm>
+            <a:off x="548640" y="566928"/>
+            <a:ext cx="11094415" cy="822960"/>
+          </a:xfrm>
+          <a:prstGeom prst="rect">
+            <a:avLst/>
+          </a:prstGeom>
+          <a:noFill/>
+        </p:spPr>
+        <p:txBody>
+          <a:bodyPr wrap="square" anchor="ctr" lIns="0" rIns="0" tIns="0" bIns="0"/>
+          <a:lstStyle/>
+          <a:p>
+            <a:pPr algn="l"/>
+            <a:r>
+              <a:rPr sz="3200" b="1" i="0">
+                <a:solidFill>
+                  <a:srgbClr val="03306E"/>
+                </a:solidFill>
+                <a:latin typeface="Cambria"/>
+              </a:rPr>
+              <a:t>Activity: Mini ESP: Task 2 practice</a:t>
+            </a:r>
+          </a:p>
+        </p:txBody>
+      </p:sp>
+      <p:sp>
+        <p:nvSpPr>
+          <p:cNvPr id="4" name="TextBox 3"/>
+          <p:cNvSpPr txBox="1"/>
+          <p:nvPr/>
+        </p:nvSpPr>
+        <p:spPr>
+          <a:xfrm>
+            <a:off x="548640" y="6446520"/>
+            <a:ext cx="8229600" cy="274320"/>
+          </a:xfrm>
+          <a:prstGeom prst="rect">
+            <a:avLst/>
+          </a:prstGeom>
+          <a:noFill/>
+        </p:spPr>
+        <p:txBody>
+          <a:bodyPr wrap="square" anchor="t" lIns="0" rIns="0" tIns="0" bIns="0"/>
+          <a:lstStyle/>
+          <a:p>
+            <a:pPr algn="l"/>
+            <a:r>
+              <a:rPr sz="1000" b="0" i="0">
+                <a:solidFill>
+                  <a:srgbClr val="54595D"/>
+                </a:solidFill>
+                <a:latin typeface="Calibri"/>
+              </a:rPr>
+              <a:t>Digital Support and Security T Level  ·  The Employer Set Project</a:t>
+            </a:r>
+          </a:p>
+        </p:txBody>
+      </p:sp>
+      <p:sp>
+        <p:nvSpPr>
+          <p:cNvPr id="5" name="TextBox 4"/>
+          <p:cNvSpPr txBox="1"/>
+          <p:nvPr/>
+        </p:nvSpPr>
+        <p:spPr>
+          <a:xfrm>
+            <a:off x="10728655" y="6446520"/>
+            <a:ext cx="914400" cy="274320"/>
+          </a:xfrm>
+          <a:prstGeom prst="rect">
+            <a:avLst/>
+          </a:prstGeom>
+          <a:noFill/>
+        </p:spPr>
+        <p:txBody>
+          <a:bodyPr wrap="square" anchor="t" lIns="0" rIns="0" tIns="0" bIns="0"/>
+          <a:lstStyle/>
+          <a:p>
+            <a:pPr algn="r"/>
+            <a:r>
+              <a:rPr sz="1000" b="0" i="0">
+                <a:solidFill>
+                  <a:srgbClr val="54595D"/>
+                </a:solidFill>
+                <a:latin typeface="Calibri"/>
+              </a:rPr>
+              <a:t>16</a:t>
             </a:r>
           </a:p>
         </p:txBody>
@@ -4892,7 +8378,7 @@
 </p:sld>
 </file>
 
-<file path=ppt/slides/slide11.xml><?xml version="1.0" encoding="utf-8"?>
+<file path=ppt/slides/slide17.xml><?xml version="1.0" encoding="utf-8"?>
 <p:sld xmlns:a="http://schemas.openxmlformats.org/drawingml/2006/main" xmlns:p="http://schemas.openxmlformats.org/presentationml/2006/main" xmlns:r="http://schemas.openxmlformats.org/officeDocument/2006/relationships">
   <p:cSld>
     <p:bg>
@@ -6221,8 +9707,8 @@
         </p:nvSpPr>
         <p:spPr>
           <a:xfrm>
-            <a:off x="548640" y="1600200"/>
-            <a:ext cx="6675120" cy="4572000"/>
+            <a:off x="548640" y="1554480"/>
+            <a:ext cx="6720840" cy="4617720"/>
           </a:xfrm>
           <a:prstGeom prst="rect">
             <a:avLst/>
@@ -6235,96 +9721,51 @@
           </a:bodyPr>
           <a:lstStyle/>
           <a:p>
-            <a:pPr marL="274320" indent="-274320">
+            <a:pPr>
               <a:spcAft>
-                <a:spcPts val="1080"/>
+                <a:spcPts val="1200"/>
               </a:spcAft>
-              <a:buClr>
-                <a:srgbClr val="0645AD"/>
-              </a:buClr>
-              <a:buFont typeface="Arial"/>
-              <a:buChar char="•"/>
             </a:pPr>
             <a:r>
-              <a:rPr sz="2400" b="0">
+              <a:rPr sz="2000" b="0">
                 <a:solidFill>
                   <a:srgbClr val="202122"/>
                 </a:solidFill>
                 <a:latin typeface="Calibri"/>
               </a:rPr>
-              <a:t>Worth 40% of the core and 20% of the whole qualification.</a:t>
-            </a:r>
-          </a:p>
-          <a:p>
-            <a:pPr marL="274320" indent="-274320">
+              <a:t>The Employer Set Project is worth 40% of the core and 20% of the whole qualification.</a:t>
+            </a:r>
+          </a:p>
+          <a:p>
+            <a:pPr>
               <a:spcAft>
-                <a:spcPts val="1080"/>
+                <a:spcPts val="1200"/>
               </a:spcAft>
-              <a:buClr>
-                <a:srgbClr val="0645AD"/>
-              </a:buClr>
-              <a:buFont typeface="Arial"/>
-              <a:buChar char="•"/>
             </a:pPr>
             <a:r>
-              <a:rPr sz="2400" b="0">
+              <a:rPr sz="2000" b="0">
                 <a:solidFill>
                   <a:srgbClr val="202122"/>
                 </a:solidFill>
                 <a:latin typeface="Calibri"/>
               </a:rPr>
-              <a:t>Externally set, taken under supervised, controlled conditions.</a:t>
-            </a:r>
-          </a:p>
-          <a:p>
-            <a:pPr marL="274320" indent="-274320">
+              <a:t>It's set and marked externally, and taken under supervised conditions. Instead of testing topics separately, it checks you can bring the six core skills together on one realistic project: solving problems, communicating, working with stakeholders, building artefacts, troubleshooting logically, and working securely.</a:t>
+            </a:r>
+          </a:p>
+          <a:p>
+            <a:pPr>
               <a:spcAft>
-                <a:spcPts val="1080"/>
+                <a:spcPts val="1200"/>
               </a:spcAft>
-              <a:buClr>
-                <a:srgbClr val="0645AD"/>
-              </a:buClr>
-              <a:buFont typeface="Arial"/>
-              <a:buChar char="•"/>
             </a:pPr>
             <a:r>
-              <a:rPr sz="2400" b="0">
+              <a:rPr sz="2000" b="0">
                 <a:solidFill>
                   <a:srgbClr val="202122"/>
                 </a:solidFill>
                 <a:latin typeface="Calibri"/>
               </a:rPr>
-              <a:t>Assesses the six core skills together, in one connected project.</a:t>
-            </a:r>
-          </a:p>
-          <a:p>
-            <a:pPr marL="274320" indent="-274320">
-              <a:spcAft>
-                <a:spcPts val="1080"/>
-              </a:spcAft>
-              <a:buClr>
-                <a:srgbClr val="0645AD"/>
-              </a:buClr>
-              <a:buFont typeface="Arial"/>
-              <a:buChar char="•"/>
-            </a:pPr>
-            <a:r>
-              <a:rPr sz="2400" b="1">
-                <a:solidFill>
-                  <a:srgbClr val="202122"/>
-                </a:solidFill>
-                <a:latin typeface="Calibri"/>
-              </a:rPr>
-              <a:t>Three pathways:</a:t>
-            </a:r>
-            <a:r>
-              <a:rPr sz="2400" b="0">
-                <a:solidFill>
-                  <a:srgbClr val="202122"/>
-                </a:solidFill>
-                <a:latin typeface="Calibri"/>
-              </a:rPr>
-              <a:t> Digital Infrastructure and Network Cabling, Cyber Security, and Digital Support Technician.</a:t>
+              <a:t>There are three pathways, depending on your specialism: Digital Infrastructure and Network Cabling, Cyber Security, and Digital Support Technician. Each task is also linked to English, maths and digital competencies.</a:t>
             </a:r>
           </a:p>
         </p:txBody>
@@ -6337,8 +9778,8 @@
         </p:nvSpPr>
         <p:spPr>
           <a:xfrm>
-            <a:off x="7772400" y="1600200"/>
-            <a:ext cx="3867912" cy="4434840"/>
+            <a:off x="7772400" y="1554480"/>
+            <a:ext cx="3867912" cy="4526280"/>
           </a:xfrm>
           <a:prstGeom prst="roundRect">
             <a:avLst>
@@ -6381,7 +9822,7 @@
         </p:nvSpPr>
         <p:spPr>
           <a:xfrm>
-            <a:off x="8046720" y="1874519"/>
+            <a:off x="8046720" y="1828800"/>
             <a:ext cx="548640" cy="548640"/>
           </a:xfrm>
           <a:prstGeom prst="ellipse">
@@ -6415,13 +9856,13 @@
           <a:p>
             <a:pPr algn="ctr"/>
             <a:r>
-              <a:rPr sz="2000" b="1">
+              <a:rPr sz="1300" b="1">
                 <a:solidFill>
                   <a:srgbClr val="202122"/>
                 </a:solidFill>
                 <a:latin typeface="Calibri"/>
               </a:rPr>
-              <a:t>!</a:t>
+              <a:t>e.g.</a:t>
             </a:r>
           </a:p>
         </p:txBody>
@@ -6434,7 +9875,7 @@
         </p:nvSpPr>
         <p:spPr>
           <a:xfrm>
-            <a:off x="8046720" y="2606040"/>
+            <a:off x="8046720" y="2560320"/>
             <a:ext cx="3291840" cy="365760"/>
           </a:xfrm>
           <a:prstGeom prst="rect">
@@ -6454,7 +9895,7 @@
                 </a:solidFill>
                 <a:latin typeface="Calibri"/>
               </a:rPr>
-              <a:t>KEY IDEA</a:t>
+              <a:t>EXAMPLE</a:t>
             </a:r>
           </a:p>
         </p:txBody>
@@ -6467,8 +9908,8 @@
         </p:nvSpPr>
         <p:spPr>
           <a:xfrm>
-            <a:off x="8046720" y="3017520"/>
-            <a:ext cx="3291840" cy="2926080"/>
+            <a:off x="8046720" y="2971800"/>
+            <a:ext cx="3291840" cy="2971800"/>
           </a:xfrm>
           <a:prstGeom prst="rect">
             <a:avLst/>
@@ -6481,13 +9922,13 @@
           <a:p>
             <a:pPr algn="l"/>
             <a:r>
-              <a:rPr sz="2200" b="0" i="0">
+              <a:rPr sz="1900" b="0" i="0">
                 <a:solidFill>
                   <a:srgbClr val="FFFFFF"/>
                 </a:solidFill>
                 <a:latin typeface="Cambria"/>
               </a:rPr>
-              <a:t>Every task is linked to English, maths and digital competencies such as E4, M6 or D2. They show exactly which skills each task develops.</a:t>
+              <a:t>The specimen project was set in the financial sector: students planned, fixed and designed IT for a fictional finance company.</a:t>
             </a:r>
           </a:p>
         </p:txBody>
@@ -6579,7 +10020,7 @@
                 </a:solidFill>
                 <a:latin typeface="Cambria"/>
               </a:rPr>
-              <a:t>The same shape for every pathway</a:t>
+              <a:t>What is the ESP?</a:t>
             </a:r>
           </a:p>
         </p:txBody>
@@ -6652,20 +10093,138 @@
       </p:sp>
       <p:sp>
         <p:nvSpPr>
-          <p:cNvPr id="6" name="Rectangle 5"/>
+          <p:cNvPr id="6" name="TextBox 5"/>
+          <p:cNvSpPr txBox="1"/>
+          <p:nvPr/>
+        </p:nvSpPr>
+        <p:spPr>
+          <a:xfrm>
+            <a:off x="548640" y="1600200"/>
+            <a:ext cx="6675120" cy="4572000"/>
+          </a:xfrm>
+          <a:prstGeom prst="rect">
+            <a:avLst/>
+          </a:prstGeom>
+          <a:noFill/>
+        </p:spPr>
+        <p:txBody>
+          <a:bodyPr wrap="square" lIns="0" rIns="0" tIns="0" bIns="0">
+            <a:spAutoFit/>
+          </a:bodyPr>
+          <a:lstStyle/>
+          <a:p>
+            <a:pPr marL="274320" indent="-274320">
+              <a:spcAft>
+                <a:spcPts val="1080"/>
+              </a:spcAft>
+              <a:buClr>
+                <a:srgbClr val="0645AD"/>
+              </a:buClr>
+              <a:buFont typeface="Arial"/>
+              <a:buChar char="•"/>
+            </a:pPr>
+            <a:r>
+              <a:rPr sz="2400" b="0">
+                <a:solidFill>
+                  <a:srgbClr val="202122"/>
+                </a:solidFill>
+                <a:latin typeface="Calibri"/>
+              </a:rPr>
+              <a:t>Worth 40% of the core and 20% of the whole qualification.</a:t>
+            </a:r>
+          </a:p>
+          <a:p>
+            <a:pPr marL="274320" indent="-274320">
+              <a:spcAft>
+                <a:spcPts val="1080"/>
+              </a:spcAft>
+              <a:buClr>
+                <a:srgbClr val="0645AD"/>
+              </a:buClr>
+              <a:buFont typeface="Arial"/>
+              <a:buChar char="•"/>
+            </a:pPr>
+            <a:r>
+              <a:rPr sz="2400" b="0">
+                <a:solidFill>
+                  <a:srgbClr val="202122"/>
+                </a:solidFill>
+                <a:latin typeface="Calibri"/>
+              </a:rPr>
+              <a:t>Externally set, taken under supervised, controlled conditions.</a:t>
+            </a:r>
+          </a:p>
+          <a:p>
+            <a:pPr marL="274320" indent="-274320">
+              <a:spcAft>
+                <a:spcPts val="1080"/>
+              </a:spcAft>
+              <a:buClr>
+                <a:srgbClr val="0645AD"/>
+              </a:buClr>
+              <a:buFont typeface="Arial"/>
+              <a:buChar char="•"/>
+            </a:pPr>
+            <a:r>
+              <a:rPr sz="2400" b="0">
+                <a:solidFill>
+                  <a:srgbClr val="202122"/>
+                </a:solidFill>
+                <a:latin typeface="Calibri"/>
+              </a:rPr>
+              <a:t>Assesses the six core skills together, in one connected project.</a:t>
+            </a:r>
+          </a:p>
+          <a:p>
+            <a:pPr marL="274320" indent="-274320">
+              <a:spcAft>
+                <a:spcPts val="1080"/>
+              </a:spcAft>
+              <a:buClr>
+                <a:srgbClr val="0645AD"/>
+              </a:buClr>
+              <a:buFont typeface="Arial"/>
+              <a:buChar char="•"/>
+            </a:pPr>
+            <a:r>
+              <a:rPr sz="2400" b="1">
+                <a:solidFill>
+                  <a:srgbClr val="202122"/>
+                </a:solidFill>
+                <a:latin typeface="Calibri"/>
+              </a:rPr>
+              <a:t>Three pathways:</a:t>
+            </a:r>
+            <a:r>
+              <a:rPr sz="2400" b="0">
+                <a:solidFill>
+                  <a:srgbClr val="202122"/>
+                </a:solidFill>
+                <a:latin typeface="Calibri"/>
+              </a:rPr>
+              <a:t> Digital Infrastructure and Network Cabling, Cyber Security, and Digital Support Technician.</a:t>
+            </a:r>
+          </a:p>
+        </p:txBody>
+      </p:sp>
+      <p:sp>
+        <p:nvSpPr>
+          <p:cNvPr id="7" name="Rounded Rectangle 6"/>
           <p:cNvSpPr/>
           <p:nvPr/>
         </p:nvSpPr>
         <p:spPr>
           <a:xfrm>
-            <a:off x="1416024" y="2382012"/>
-            <a:ext cx="9359646" cy="36576"/>
-          </a:xfrm>
-          <a:prstGeom prst="rect">
-            <a:avLst/>
+            <a:off x="7772400" y="1600200"/>
+            <a:ext cx="3867912" cy="4434840"/>
+          </a:xfrm>
+          <a:prstGeom prst="roundRect">
+            <a:avLst>
+              <a:gd name="adj" fmla="val 8000"/>
+            </a:avLst>
           </a:prstGeom>
           <a:solidFill>
-            <a:srgbClr val="A9C8F0"/>
+            <a:srgbClr val="03306E"/>
           </a:solidFill>
           <a:ln>
             <a:noFill/>
@@ -6694,14 +10253,14 @@
       </p:sp>
       <p:sp>
         <p:nvSpPr>
-          <p:cNvPr id="7" name="Oval 6"/>
+          <p:cNvPr id="8" name="Oval 7"/>
           <p:cNvSpPr/>
           <p:nvPr/>
         </p:nvSpPr>
         <p:spPr>
           <a:xfrm>
-            <a:off x="1095984" y="2080260"/>
-            <a:ext cx="640080" cy="640080"/>
+            <a:off x="8046720" y="1874519"/>
+            <a:ext cx="548640" cy="548640"/>
           </a:xfrm>
           <a:prstGeom prst="ellipse">
             <a:avLst/>
@@ -6740,21 +10299,21 @@
                 </a:solidFill>
                 <a:latin typeface="Calibri"/>
               </a:rPr>
-              <a:t>1</a:t>
-            </a:r>
-          </a:p>
-        </p:txBody>
-      </p:sp>
-      <p:sp>
-        <p:nvSpPr>
-          <p:cNvPr id="8" name="TextBox 7"/>
-          <p:cNvSpPr txBox="1"/>
-          <p:nvPr/>
-        </p:nvSpPr>
-        <p:spPr>
-          <a:xfrm>
-            <a:off x="548640" y="2857500"/>
-            <a:ext cx="1734769" cy="731520"/>
+              <a:t>!</a:t>
+            </a:r>
+          </a:p>
+        </p:txBody>
+      </p:sp>
+      <p:sp>
+        <p:nvSpPr>
+          <p:cNvPr id="9" name="TextBox 8"/>
+          <p:cNvSpPr txBox="1"/>
+          <p:nvPr/>
+        </p:nvSpPr>
+        <p:spPr>
+          <a:xfrm>
+            <a:off x="8046720" y="2606040"/>
+            <a:ext cx="3291840" cy="365760"/>
           </a:xfrm>
           <a:prstGeom prst="rect">
             <a:avLst/>
@@ -6765,61 +10324,17 @@
           <a:bodyPr wrap="square" anchor="t" lIns="0" rIns="0" tIns="0" bIns="0"/>
           <a:lstStyle/>
           <a:p>
-            <a:pPr algn="ctr"/>
-            <a:r>
-              <a:rPr sz="1700" b="1" i="0">
-                <a:solidFill>
-                  <a:srgbClr val="03306E"/>
-                </a:solidFill>
-                <a:latin typeface="Calibri"/>
-              </a:rPr>
-              <a:t>Pre-task</a:t>
-            </a:r>
-          </a:p>
-        </p:txBody>
-      </p:sp>
-      <p:sp>
-        <p:nvSpPr>
-          <p:cNvPr id="9" name="Rounded Rectangle 8"/>
-          <p:cNvSpPr/>
-          <p:nvPr/>
-        </p:nvSpPr>
-        <p:spPr>
-          <a:xfrm>
-            <a:off x="548640" y="3634740"/>
-            <a:ext cx="1734769" cy="2057399"/>
-          </a:xfrm>
-          <a:prstGeom prst="roundRect">
-            <a:avLst>
-              <a:gd name="adj" fmla="val 6000"/>
-            </a:avLst>
-          </a:prstGeom>
-          <a:solidFill>
-            <a:srgbClr val="EAF3FF"/>
-          </a:solidFill>
-          <a:ln>
-            <a:noFill/>
-          </a:ln>
-          <a:effectLst/>
-        </p:spPr>
-        <p:style>
-          <a:lnRef idx="1">
-            <a:schemeClr val="accent1"/>
-          </a:lnRef>
-          <a:fillRef idx="3">
-            <a:schemeClr val="accent1"/>
-          </a:fillRef>
-          <a:effectRef idx="2">
-            <a:schemeClr val="accent1"/>
-          </a:effectRef>
-          <a:fontRef idx="minor">
-            <a:schemeClr val="lt1"/>
-          </a:fontRef>
-        </p:style>
-        <p:txBody>
-          <a:bodyPr rtlCol="0" anchor="ctr"/>
-          <a:lstStyle/>
-          <a:p/>
+            <a:pPr algn="l"/>
+            <a:r>
+              <a:rPr sz="1300" b="1" i="0">
+                <a:solidFill>
+                  <a:srgbClr val="A9C8F0"/>
+                </a:solidFill>
+                <a:latin typeface="Calibri"/>
+              </a:rPr>
+              <a:t>KEY IDEA</a:t>
+            </a:r>
+          </a:p>
         </p:txBody>
       </p:sp>
       <p:sp>
@@ -6830,8 +10345,8 @@
         </p:nvSpPr>
         <p:spPr>
           <a:xfrm>
-            <a:off x="685800" y="3771900"/>
-            <a:ext cx="1460449" cy="1783079"/>
+            <a:off x="8046720" y="3017520"/>
+            <a:ext cx="3291840" cy="2926080"/>
           </a:xfrm>
           <a:prstGeom prst="rect">
             <a:avLst/>
@@ -6844,828 +10359,13 @@
           <a:p>
             <a:pPr algn="l"/>
             <a:r>
-              <a:rPr sz="1800" b="0" i="0">
-                <a:solidFill>
-                  <a:srgbClr val="202122"/>
-                </a:solidFill>
-                <a:latin typeface="Calibri"/>
-              </a:rPr>
-              <a:t>Research the industry context. Not assessed.</a:t>
-            </a:r>
-          </a:p>
-        </p:txBody>
-      </p:sp>
-      <p:sp>
-        <p:nvSpPr>
-          <p:cNvPr id="11" name="Oval 10"/>
-          <p:cNvSpPr/>
-          <p:nvPr/>
-        </p:nvSpPr>
-        <p:spPr>
-          <a:xfrm>
-            <a:off x="2967913" y="2080260"/>
-            <a:ext cx="640080" cy="640080"/>
-          </a:xfrm>
-          <a:prstGeom prst="ellipse">
-            <a:avLst/>
-          </a:prstGeom>
-          <a:solidFill>
-            <a:srgbClr val="F2B705"/>
-          </a:solidFill>
-          <a:ln>
-            <a:noFill/>
-          </a:ln>
-          <a:effectLst/>
-        </p:spPr>
-        <p:style>
-          <a:lnRef idx="1">
-            <a:schemeClr val="accent1"/>
-          </a:lnRef>
-          <a:fillRef idx="3">
-            <a:schemeClr val="accent1"/>
-          </a:fillRef>
-          <a:effectRef idx="2">
-            <a:schemeClr val="accent1"/>
-          </a:effectRef>
-          <a:fontRef idx="minor">
-            <a:schemeClr val="lt1"/>
-          </a:fontRef>
-        </p:style>
-        <p:txBody>
-          <a:bodyPr rtlCol="0" anchor="ctr" lIns="0" rIns="0" tIns="0" bIns="0"/>
-          <a:lstStyle/>
-          <a:p>
-            <a:pPr algn="ctr"/>
-            <a:r>
-              <a:rPr sz="2000" b="1">
-                <a:solidFill>
-                  <a:srgbClr val="202122"/>
-                </a:solidFill>
-                <a:latin typeface="Calibri"/>
-              </a:rPr>
-              <a:t>2</a:t>
-            </a:r>
-          </a:p>
-        </p:txBody>
-      </p:sp>
-      <p:sp>
-        <p:nvSpPr>
-          <p:cNvPr id="12" name="TextBox 11"/>
-          <p:cNvSpPr txBox="1"/>
-          <p:nvPr/>
-        </p:nvSpPr>
-        <p:spPr>
-          <a:xfrm>
-            <a:off x="2420569" y="2857500"/>
-            <a:ext cx="1734769" cy="731520"/>
-          </a:xfrm>
-          <a:prstGeom prst="rect">
-            <a:avLst/>
-          </a:prstGeom>
-          <a:noFill/>
-        </p:spPr>
-        <p:txBody>
-          <a:bodyPr wrap="square" anchor="t" lIns="0" rIns="0" tIns="0" bIns="0"/>
-          <a:lstStyle/>
-          <a:p>
-            <a:pPr algn="ctr"/>
-            <a:r>
-              <a:rPr sz="1700" b="1" i="0">
-                <a:solidFill>
-                  <a:srgbClr val="03306E"/>
-                </a:solidFill>
-                <a:latin typeface="Calibri"/>
-              </a:rPr>
-              <a:t>Task 1</a:t>
-            </a:r>
-          </a:p>
-        </p:txBody>
-      </p:sp>
-      <p:sp>
-        <p:nvSpPr>
-          <p:cNvPr id="13" name="Rounded Rectangle 12"/>
-          <p:cNvSpPr/>
-          <p:nvPr/>
-        </p:nvSpPr>
-        <p:spPr>
-          <a:xfrm>
-            <a:off x="2420569" y="3634740"/>
-            <a:ext cx="1734769" cy="2057399"/>
-          </a:xfrm>
-          <a:prstGeom prst="roundRect">
-            <a:avLst>
-              <a:gd name="adj" fmla="val 6000"/>
-            </a:avLst>
-          </a:prstGeom>
-          <a:solidFill>
-            <a:srgbClr val="EAF3FF"/>
-          </a:solidFill>
-          <a:ln>
-            <a:noFill/>
-          </a:ln>
-          <a:effectLst/>
-        </p:spPr>
-        <p:style>
-          <a:lnRef idx="1">
-            <a:schemeClr val="accent1"/>
-          </a:lnRef>
-          <a:fillRef idx="3">
-            <a:schemeClr val="accent1"/>
-          </a:fillRef>
-          <a:effectRef idx="2">
-            <a:schemeClr val="accent1"/>
-          </a:effectRef>
-          <a:fontRef idx="minor">
-            <a:schemeClr val="lt1"/>
-          </a:fontRef>
-        </p:style>
-        <p:txBody>
-          <a:bodyPr rtlCol="0" anchor="ctr"/>
-          <a:lstStyle/>
-          <a:p/>
-        </p:txBody>
-      </p:sp>
-      <p:sp>
-        <p:nvSpPr>
-          <p:cNvPr id="14" name="TextBox 13"/>
-          <p:cNvSpPr txBox="1"/>
-          <p:nvPr/>
-        </p:nvSpPr>
-        <p:spPr>
-          <a:xfrm>
-            <a:off x="2557729" y="3771900"/>
-            <a:ext cx="1460449" cy="1783079"/>
-          </a:xfrm>
-          <a:prstGeom prst="rect">
-            <a:avLst/>
-          </a:prstGeom>
-          <a:noFill/>
-        </p:spPr>
-        <p:txBody>
-          <a:bodyPr wrap="square" anchor="t" lIns="0" rIns="0" tIns="0" bIns="0"/>
-          <a:lstStyle/>
-          <a:p>
-            <a:pPr algn="l"/>
-            <a:r>
-              <a:rPr sz="1800" b="0" i="0">
-                <a:solidFill>
-                  <a:srgbClr val="202122"/>
-                </a:solidFill>
-                <a:latin typeface="Calibri"/>
-              </a:rPr>
-              <a:t>Plan the project: Gantt chart, resource and cost plan, rationale.</a:t>
-            </a:r>
-          </a:p>
-        </p:txBody>
-      </p:sp>
-      <p:sp>
-        <p:nvSpPr>
-          <p:cNvPr id="15" name="Oval 14"/>
-          <p:cNvSpPr/>
-          <p:nvPr/>
-        </p:nvSpPr>
-        <p:spPr>
-          <a:xfrm>
-            <a:off x="4839843" y="2080260"/>
-            <a:ext cx="640080" cy="640080"/>
-          </a:xfrm>
-          <a:prstGeom prst="ellipse">
-            <a:avLst/>
-          </a:prstGeom>
-          <a:solidFill>
-            <a:srgbClr val="F2B705"/>
-          </a:solidFill>
-          <a:ln>
-            <a:noFill/>
-          </a:ln>
-          <a:effectLst/>
-        </p:spPr>
-        <p:style>
-          <a:lnRef idx="1">
-            <a:schemeClr val="accent1"/>
-          </a:lnRef>
-          <a:fillRef idx="3">
-            <a:schemeClr val="accent1"/>
-          </a:fillRef>
-          <a:effectRef idx="2">
-            <a:schemeClr val="accent1"/>
-          </a:effectRef>
-          <a:fontRef idx="minor">
-            <a:schemeClr val="lt1"/>
-          </a:fontRef>
-        </p:style>
-        <p:txBody>
-          <a:bodyPr rtlCol="0" anchor="ctr" lIns="0" rIns="0" tIns="0" bIns="0"/>
-          <a:lstStyle/>
-          <a:p>
-            <a:pPr algn="ctr"/>
-            <a:r>
-              <a:rPr sz="2000" b="1">
-                <a:solidFill>
-                  <a:srgbClr val="202122"/>
-                </a:solidFill>
-                <a:latin typeface="Calibri"/>
-              </a:rPr>
-              <a:t>3</a:t>
-            </a:r>
-          </a:p>
-        </p:txBody>
-      </p:sp>
-      <p:sp>
-        <p:nvSpPr>
-          <p:cNvPr id="16" name="TextBox 15"/>
-          <p:cNvSpPr txBox="1"/>
-          <p:nvPr/>
-        </p:nvSpPr>
-        <p:spPr>
-          <a:xfrm>
-            <a:off x="4292498" y="2857500"/>
-            <a:ext cx="1734769" cy="731520"/>
-          </a:xfrm>
-          <a:prstGeom prst="rect">
-            <a:avLst/>
-          </a:prstGeom>
-          <a:noFill/>
-        </p:spPr>
-        <p:txBody>
-          <a:bodyPr wrap="square" anchor="t" lIns="0" rIns="0" tIns="0" bIns="0"/>
-          <a:lstStyle/>
-          <a:p>
-            <a:pPr algn="ctr"/>
-            <a:r>
-              <a:rPr sz="1700" b="1" i="0">
-                <a:solidFill>
-                  <a:srgbClr val="03306E"/>
-                </a:solidFill>
-                <a:latin typeface="Calibri"/>
-              </a:rPr>
-              <a:t>Task 2</a:t>
-            </a:r>
-          </a:p>
-        </p:txBody>
-      </p:sp>
-      <p:sp>
-        <p:nvSpPr>
-          <p:cNvPr id="17" name="Rounded Rectangle 16"/>
-          <p:cNvSpPr/>
-          <p:nvPr/>
-        </p:nvSpPr>
-        <p:spPr>
-          <a:xfrm>
-            <a:off x="4292498" y="3634740"/>
-            <a:ext cx="1734769" cy="2057399"/>
-          </a:xfrm>
-          <a:prstGeom prst="roundRect">
-            <a:avLst>
-              <a:gd name="adj" fmla="val 6000"/>
-            </a:avLst>
-          </a:prstGeom>
-          <a:solidFill>
-            <a:srgbClr val="EAF3FF"/>
-          </a:solidFill>
-          <a:ln>
-            <a:noFill/>
-          </a:ln>
-          <a:effectLst/>
-        </p:spPr>
-        <p:style>
-          <a:lnRef idx="1">
-            <a:schemeClr val="accent1"/>
-          </a:lnRef>
-          <a:fillRef idx="3">
-            <a:schemeClr val="accent1"/>
-          </a:fillRef>
-          <a:effectRef idx="2">
-            <a:schemeClr val="accent1"/>
-          </a:effectRef>
-          <a:fontRef idx="minor">
-            <a:schemeClr val="lt1"/>
-          </a:fontRef>
-        </p:style>
-        <p:txBody>
-          <a:bodyPr rtlCol="0" anchor="ctr"/>
-          <a:lstStyle/>
-          <a:p/>
-        </p:txBody>
-      </p:sp>
-      <p:sp>
-        <p:nvSpPr>
-          <p:cNvPr id="18" name="TextBox 17"/>
-          <p:cNvSpPr txBox="1"/>
-          <p:nvPr/>
-        </p:nvSpPr>
-        <p:spPr>
-          <a:xfrm>
-            <a:off x="4429658" y="3771900"/>
-            <a:ext cx="1460449" cy="1783079"/>
-          </a:xfrm>
-          <a:prstGeom prst="rect">
-            <a:avLst/>
-          </a:prstGeom>
-          <a:noFill/>
-        </p:spPr>
-        <p:txBody>
-          <a:bodyPr wrap="square" anchor="t" lIns="0" rIns="0" tIns="0" bIns="0"/>
-          <a:lstStyle/>
-          <a:p>
-            <a:pPr algn="l"/>
-            <a:r>
-              <a:rPr sz="1800" b="0" i="0">
-                <a:solidFill>
-                  <a:srgbClr val="202122"/>
-                </a:solidFill>
-                <a:latin typeface="Calibri"/>
-              </a:rPr>
-              <a:t>Find and fix defects in a simulation or support tickets.</a:t>
-            </a:r>
-          </a:p>
-        </p:txBody>
-      </p:sp>
-      <p:sp>
-        <p:nvSpPr>
-          <p:cNvPr id="19" name="Oval 18"/>
-          <p:cNvSpPr/>
-          <p:nvPr/>
-        </p:nvSpPr>
-        <p:spPr>
-          <a:xfrm>
-            <a:off x="6711772" y="2080260"/>
-            <a:ext cx="640080" cy="640080"/>
-          </a:xfrm>
-          <a:prstGeom prst="ellipse">
-            <a:avLst/>
-          </a:prstGeom>
-          <a:solidFill>
-            <a:srgbClr val="F2B705"/>
-          </a:solidFill>
-          <a:ln>
-            <a:noFill/>
-          </a:ln>
-          <a:effectLst/>
-        </p:spPr>
-        <p:style>
-          <a:lnRef idx="1">
-            <a:schemeClr val="accent1"/>
-          </a:lnRef>
-          <a:fillRef idx="3">
-            <a:schemeClr val="accent1"/>
-          </a:fillRef>
-          <a:effectRef idx="2">
-            <a:schemeClr val="accent1"/>
-          </a:effectRef>
-          <a:fontRef idx="minor">
-            <a:schemeClr val="lt1"/>
-          </a:fontRef>
-        </p:style>
-        <p:txBody>
-          <a:bodyPr rtlCol="0" anchor="ctr" lIns="0" rIns="0" tIns="0" bIns="0"/>
-          <a:lstStyle/>
-          <a:p>
-            <a:pPr algn="ctr"/>
-            <a:r>
-              <a:rPr sz="2000" b="1">
-                <a:solidFill>
-                  <a:srgbClr val="202122"/>
-                </a:solidFill>
-                <a:latin typeface="Calibri"/>
-              </a:rPr>
-              <a:t>4</a:t>
-            </a:r>
-          </a:p>
-        </p:txBody>
-      </p:sp>
-      <p:sp>
-        <p:nvSpPr>
-          <p:cNvPr id="20" name="TextBox 19"/>
-          <p:cNvSpPr txBox="1"/>
-          <p:nvPr/>
-        </p:nvSpPr>
-        <p:spPr>
-          <a:xfrm>
-            <a:off x="6164427" y="2857500"/>
-            <a:ext cx="1734769" cy="731520"/>
-          </a:xfrm>
-          <a:prstGeom prst="rect">
-            <a:avLst/>
-          </a:prstGeom>
-          <a:noFill/>
-        </p:spPr>
-        <p:txBody>
-          <a:bodyPr wrap="square" anchor="t" lIns="0" rIns="0" tIns="0" bIns="0"/>
-          <a:lstStyle/>
-          <a:p>
-            <a:pPr algn="ctr"/>
-            <a:r>
-              <a:rPr sz="1700" b="1" i="0">
-                <a:solidFill>
-                  <a:srgbClr val="03306E"/>
-                </a:solidFill>
-                <a:latin typeface="Calibri"/>
-              </a:rPr>
-              <a:t>Task 3</a:t>
-            </a:r>
-          </a:p>
-        </p:txBody>
-      </p:sp>
-      <p:sp>
-        <p:nvSpPr>
-          <p:cNvPr id="21" name="Rounded Rectangle 20"/>
-          <p:cNvSpPr/>
-          <p:nvPr/>
-        </p:nvSpPr>
-        <p:spPr>
-          <a:xfrm>
-            <a:off x="6164427" y="3634740"/>
-            <a:ext cx="1734769" cy="2057399"/>
-          </a:xfrm>
-          <a:prstGeom prst="roundRect">
-            <a:avLst>
-              <a:gd name="adj" fmla="val 6000"/>
-            </a:avLst>
-          </a:prstGeom>
-          <a:solidFill>
-            <a:srgbClr val="EAF3FF"/>
-          </a:solidFill>
-          <a:ln>
-            <a:noFill/>
-          </a:ln>
-          <a:effectLst/>
-        </p:spPr>
-        <p:style>
-          <a:lnRef idx="1">
-            <a:schemeClr val="accent1"/>
-          </a:lnRef>
-          <a:fillRef idx="3">
-            <a:schemeClr val="accent1"/>
-          </a:fillRef>
-          <a:effectRef idx="2">
-            <a:schemeClr val="accent1"/>
-          </a:effectRef>
-          <a:fontRef idx="minor">
-            <a:schemeClr val="lt1"/>
-          </a:fontRef>
-        </p:style>
-        <p:txBody>
-          <a:bodyPr rtlCol="0" anchor="ctr"/>
-          <a:lstStyle/>
-          <a:p/>
-        </p:txBody>
-      </p:sp>
-      <p:sp>
-        <p:nvSpPr>
-          <p:cNvPr id="22" name="TextBox 21"/>
-          <p:cNvSpPr txBox="1"/>
-          <p:nvPr/>
-        </p:nvSpPr>
-        <p:spPr>
-          <a:xfrm>
-            <a:off x="6301587" y="3771900"/>
-            <a:ext cx="1460449" cy="1783079"/>
-          </a:xfrm>
-          <a:prstGeom prst="rect">
-            <a:avLst/>
-          </a:prstGeom>
-          <a:noFill/>
-        </p:spPr>
-        <p:txBody>
-          <a:bodyPr wrap="square" anchor="t" lIns="0" rIns="0" tIns="0" bIns="0"/>
-          <a:lstStyle/>
-          <a:p>
-            <a:pPr algn="l"/>
-            <a:r>
-              <a:rPr sz="1800" b="0" i="0">
-                <a:solidFill>
-                  <a:srgbClr val="202122"/>
-                </a:solidFill>
-                <a:latin typeface="Calibri"/>
-              </a:rPr>
-              <a:t>Design a solution for a client and a third party.</a:t>
-            </a:r>
-          </a:p>
-        </p:txBody>
-      </p:sp>
-      <p:sp>
-        <p:nvSpPr>
-          <p:cNvPr id="23" name="Oval 22"/>
-          <p:cNvSpPr/>
-          <p:nvPr/>
-        </p:nvSpPr>
-        <p:spPr>
-          <a:xfrm>
-            <a:off x="8583701" y="2080260"/>
-            <a:ext cx="640080" cy="640080"/>
-          </a:xfrm>
-          <a:prstGeom prst="ellipse">
-            <a:avLst/>
-          </a:prstGeom>
-          <a:solidFill>
-            <a:srgbClr val="F2B705"/>
-          </a:solidFill>
-          <a:ln>
-            <a:noFill/>
-          </a:ln>
-          <a:effectLst/>
-        </p:spPr>
-        <p:style>
-          <a:lnRef idx="1">
-            <a:schemeClr val="accent1"/>
-          </a:lnRef>
-          <a:fillRef idx="3">
-            <a:schemeClr val="accent1"/>
-          </a:fillRef>
-          <a:effectRef idx="2">
-            <a:schemeClr val="accent1"/>
-          </a:effectRef>
-          <a:fontRef idx="minor">
-            <a:schemeClr val="lt1"/>
-          </a:fontRef>
-        </p:style>
-        <p:txBody>
-          <a:bodyPr rtlCol="0" anchor="ctr" lIns="0" rIns="0" tIns="0" bIns="0"/>
-          <a:lstStyle/>
-          <a:p>
-            <a:pPr algn="ctr"/>
-            <a:r>
-              <a:rPr sz="2000" b="1">
-                <a:solidFill>
-                  <a:srgbClr val="202122"/>
-                </a:solidFill>
-                <a:latin typeface="Calibri"/>
-              </a:rPr>
-              <a:t>5</a:t>
-            </a:r>
-          </a:p>
-        </p:txBody>
-      </p:sp>
-      <p:sp>
-        <p:nvSpPr>
-          <p:cNvPr id="24" name="TextBox 23"/>
-          <p:cNvSpPr txBox="1"/>
-          <p:nvPr/>
-        </p:nvSpPr>
-        <p:spPr>
-          <a:xfrm>
-            <a:off x="8036356" y="2857500"/>
-            <a:ext cx="1734769" cy="731520"/>
-          </a:xfrm>
-          <a:prstGeom prst="rect">
-            <a:avLst/>
-          </a:prstGeom>
-          <a:noFill/>
-        </p:spPr>
-        <p:txBody>
-          <a:bodyPr wrap="square" anchor="t" lIns="0" rIns="0" tIns="0" bIns="0"/>
-          <a:lstStyle/>
-          <a:p>
-            <a:pPr algn="ctr"/>
-            <a:r>
-              <a:rPr sz="1700" b="1" i="0">
-                <a:solidFill>
-                  <a:srgbClr val="03306E"/>
-                </a:solidFill>
-                <a:latin typeface="Calibri"/>
-              </a:rPr>
-              <a:t>Task 4a</a:t>
-            </a:r>
-          </a:p>
-        </p:txBody>
-      </p:sp>
-      <p:sp>
-        <p:nvSpPr>
-          <p:cNvPr id="25" name="Rounded Rectangle 24"/>
-          <p:cNvSpPr/>
-          <p:nvPr/>
-        </p:nvSpPr>
-        <p:spPr>
-          <a:xfrm>
-            <a:off x="8036356" y="3634740"/>
-            <a:ext cx="1734769" cy="2057399"/>
-          </a:xfrm>
-          <a:prstGeom prst="roundRect">
-            <a:avLst>
-              <a:gd name="adj" fmla="val 6000"/>
-            </a:avLst>
-          </a:prstGeom>
-          <a:solidFill>
-            <a:srgbClr val="EAF3FF"/>
-          </a:solidFill>
-          <a:ln>
-            <a:noFill/>
-          </a:ln>
-          <a:effectLst/>
-        </p:spPr>
-        <p:style>
-          <a:lnRef idx="1">
-            <a:schemeClr val="accent1"/>
-          </a:lnRef>
-          <a:fillRef idx="3">
-            <a:schemeClr val="accent1"/>
-          </a:fillRef>
-          <a:effectRef idx="2">
-            <a:schemeClr val="accent1"/>
-          </a:effectRef>
-          <a:fontRef idx="minor">
-            <a:schemeClr val="lt1"/>
-          </a:fontRef>
-        </p:style>
-        <p:txBody>
-          <a:bodyPr rtlCol="0" anchor="ctr"/>
-          <a:lstStyle/>
-          <a:p/>
-        </p:txBody>
-      </p:sp>
-      <p:sp>
-        <p:nvSpPr>
-          <p:cNvPr id="26" name="TextBox 25"/>
-          <p:cNvSpPr txBox="1"/>
-          <p:nvPr/>
-        </p:nvSpPr>
-        <p:spPr>
-          <a:xfrm>
-            <a:off x="8173516" y="3771900"/>
-            <a:ext cx="1460449" cy="1783079"/>
-          </a:xfrm>
-          <a:prstGeom prst="rect">
-            <a:avLst/>
-          </a:prstGeom>
-          <a:noFill/>
-        </p:spPr>
-        <p:txBody>
-          <a:bodyPr wrap="square" anchor="t" lIns="0" rIns="0" tIns="0" bIns="0"/>
-          <a:lstStyle/>
-          <a:p>
-            <a:pPr algn="l"/>
-            <a:r>
-              <a:rPr sz="1800" b="0" i="0">
-                <a:solidFill>
-                  <a:srgbClr val="202122"/>
-                </a:solidFill>
-                <a:latin typeface="Calibri"/>
-              </a:rPr>
-              <a:t>Develop the solution: robust, secure, organised, user-friendly.</a:t>
-            </a:r>
-          </a:p>
-        </p:txBody>
-      </p:sp>
-      <p:sp>
-        <p:nvSpPr>
-          <p:cNvPr id="27" name="Oval 26"/>
-          <p:cNvSpPr/>
-          <p:nvPr/>
-        </p:nvSpPr>
-        <p:spPr>
-          <a:xfrm>
-            <a:off x="10455630" y="2080260"/>
-            <a:ext cx="640080" cy="640080"/>
-          </a:xfrm>
-          <a:prstGeom prst="ellipse">
-            <a:avLst/>
-          </a:prstGeom>
-          <a:solidFill>
-            <a:srgbClr val="F2B705"/>
-          </a:solidFill>
-          <a:ln>
-            <a:noFill/>
-          </a:ln>
-          <a:effectLst/>
-        </p:spPr>
-        <p:style>
-          <a:lnRef idx="1">
-            <a:schemeClr val="accent1"/>
-          </a:lnRef>
-          <a:fillRef idx="3">
-            <a:schemeClr val="accent1"/>
-          </a:fillRef>
-          <a:effectRef idx="2">
-            <a:schemeClr val="accent1"/>
-          </a:effectRef>
-          <a:fontRef idx="minor">
-            <a:schemeClr val="lt1"/>
-          </a:fontRef>
-        </p:style>
-        <p:txBody>
-          <a:bodyPr rtlCol="0" anchor="ctr" lIns="0" rIns="0" tIns="0" bIns="0"/>
-          <a:lstStyle/>
-          <a:p>
-            <a:pPr algn="ctr"/>
-            <a:r>
-              <a:rPr sz="2000" b="1">
-                <a:solidFill>
-                  <a:srgbClr val="202122"/>
-                </a:solidFill>
-                <a:latin typeface="Calibri"/>
-              </a:rPr>
-              <a:t>6</a:t>
-            </a:r>
-          </a:p>
-        </p:txBody>
-      </p:sp>
-      <p:sp>
-        <p:nvSpPr>
-          <p:cNvPr id="28" name="TextBox 27"/>
-          <p:cNvSpPr txBox="1"/>
-          <p:nvPr/>
-        </p:nvSpPr>
-        <p:spPr>
-          <a:xfrm>
-            <a:off x="9908286" y="2857500"/>
-            <a:ext cx="1734769" cy="731520"/>
-          </a:xfrm>
-          <a:prstGeom prst="rect">
-            <a:avLst/>
-          </a:prstGeom>
-          <a:noFill/>
-        </p:spPr>
-        <p:txBody>
-          <a:bodyPr wrap="square" anchor="t" lIns="0" rIns="0" tIns="0" bIns="0"/>
-          <a:lstStyle/>
-          <a:p>
-            <a:pPr algn="ctr"/>
-            <a:r>
-              <a:rPr sz="1700" b="1" i="0">
-                <a:solidFill>
-                  <a:srgbClr val="03306E"/>
-                </a:solidFill>
-                <a:latin typeface="Calibri"/>
-              </a:rPr>
-              <a:t>Task 4b</a:t>
-            </a:r>
-          </a:p>
-        </p:txBody>
-      </p:sp>
-      <p:sp>
-        <p:nvSpPr>
-          <p:cNvPr id="29" name="Rounded Rectangle 28"/>
-          <p:cNvSpPr/>
-          <p:nvPr/>
-        </p:nvSpPr>
-        <p:spPr>
-          <a:xfrm>
-            <a:off x="9908286" y="3634740"/>
-            <a:ext cx="1734769" cy="2057399"/>
-          </a:xfrm>
-          <a:prstGeom prst="roundRect">
-            <a:avLst>
-              <a:gd name="adj" fmla="val 6000"/>
-            </a:avLst>
-          </a:prstGeom>
-          <a:solidFill>
-            <a:srgbClr val="EAF3FF"/>
-          </a:solidFill>
-          <a:ln>
-            <a:noFill/>
-          </a:ln>
-          <a:effectLst/>
-        </p:spPr>
-        <p:style>
-          <a:lnRef idx="1">
-            <a:schemeClr val="accent1"/>
-          </a:lnRef>
-          <a:fillRef idx="3">
-            <a:schemeClr val="accent1"/>
-          </a:fillRef>
-          <a:effectRef idx="2">
-            <a:schemeClr val="accent1"/>
-          </a:effectRef>
-          <a:fontRef idx="minor">
-            <a:schemeClr val="lt1"/>
-          </a:fontRef>
-        </p:style>
-        <p:txBody>
-          <a:bodyPr rtlCol="0" anchor="ctr"/>
-          <a:lstStyle/>
-          <a:p/>
-        </p:txBody>
-      </p:sp>
-      <p:sp>
-        <p:nvSpPr>
-          <p:cNvPr id="30" name="TextBox 29"/>
-          <p:cNvSpPr txBox="1"/>
-          <p:nvPr/>
-        </p:nvSpPr>
-        <p:spPr>
-          <a:xfrm>
-            <a:off x="10045446" y="3771900"/>
-            <a:ext cx="1460449" cy="1783079"/>
-          </a:xfrm>
-          <a:prstGeom prst="rect">
-            <a:avLst/>
-          </a:prstGeom>
-          <a:noFill/>
-        </p:spPr>
-        <p:txBody>
-          <a:bodyPr wrap="square" anchor="t" lIns="0" rIns="0" tIns="0" bIns="0"/>
-          <a:lstStyle/>
-          <a:p>
-            <a:pPr algn="l"/>
-            <a:r>
-              <a:rPr sz="1800" b="0" i="0">
-                <a:solidFill>
-                  <a:srgbClr val="202122"/>
-                </a:solidFill>
-                <a:latin typeface="Calibri"/>
-              </a:rPr>
-              <a:t>Reflective evaluation against the brief.</a:t>
+              <a:rPr sz="2200" b="0" i="0">
+                <a:solidFill>
+                  <a:srgbClr val="FFFFFF"/>
+                </a:solidFill>
+                <a:latin typeface="Cambria"/>
+              </a:rPr>
+              <a:t>Every task is linked to English, maths and digital competencies such as E4, M6 or D2. They show exactly which skills each task develops.</a:t>
             </a:r>
           </a:p>
         </p:txBody>
@@ -7757,7 +10457,7 @@
                 </a:solidFill>
                 <a:latin typeface="Cambria"/>
               </a:rPr>
-              <a:t>The three pathways</a:t>
+              <a:t>Quick check: What is the ESP?</a:t>
             </a:r>
           </a:p>
         </p:txBody>
@@ -7824,6 +10524,2567 @@
                 <a:latin typeface="Calibri"/>
               </a:rPr>
               <a:t>5</a:t>
+            </a:r>
+          </a:p>
+        </p:txBody>
+      </p:sp>
+      <p:sp>
+        <p:nvSpPr>
+          <p:cNvPr id="6" name="Oval 5"/>
+          <p:cNvSpPr/>
+          <p:nvPr/>
+        </p:nvSpPr>
+        <p:spPr>
+          <a:xfrm>
+            <a:off x="548640" y="1691640"/>
+            <a:ext cx="502920" cy="502920"/>
+          </a:xfrm>
+          <a:prstGeom prst="ellipse">
+            <a:avLst/>
+          </a:prstGeom>
+          <a:solidFill>
+            <a:srgbClr val="F2B705"/>
+          </a:solidFill>
+          <a:ln>
+            <a:noFill/>
+          </a:ln>
+          <a:effectLst/>
+        </p:spPr>
+        <p:style>
+          <a:lnRef idx="1">
+            <a:schemeClr val="accent1"/>
+          </a:lnRef>
+          <a:fillRef idx="3">
+            <a:schemeClr val="accent1"/>
+          </a:fillRef>
+          <a:effectRef idx="2">
+            <a:schemeClr val="accent1"/>
+          </a:effectRef>
+          <a:fontRef idx="minor">
+            <a:schemeClr val="lt1"/>
+          </a:fontRef>
+        </p:style>
+        <p:txBody>
+          <a:bodyPr rtlCol="0" anchor="ctr" lIns="0" rIns="0" tIns="0" bIns="0"/>
+          <a:lstStyle/>
+          <a:p>
+            <a:pPr algn="ctr"/>
+            <a:r>
+              <a:rPr sz="1600" b="1">
+                <a:solidFill>
+                  <a:srgbClr val="202122"/>
+                </a:solidFill>
+                <a:latin typeface="Calibri"/>
+              </a:rPr>
+              <a:t>1</a:t>
+            </a:r>
+          </a:p>
+        </p:txBody>
+      </p:sp>
+      <p:sp>
+        <p:nvSpPr>
+          <p:cNvPr id="7" name="TextBox 6"/>
+          <p:cNvSpPr txBox="1"/>
+          <p:nvPr/>
+        </p:nvSpPr>
+        <p:spPr>
+          <a:xfrm>
+            <a:off x="1371600" y="1645920"/>
+            <a:ext cx="10271455" cy="1188720"/>
+          </a:xfrm>
+          <a:prstGeom prst="rect">
+            <a:avLst/>
+          </a:prstGeom>
+          <a:noFill/>
+        </p:spPr>
+        <p:txBody>
+          <a:bodyPr wrap="square" anchor="t" lIns="0" rIns="0" tIns="0" bIns="0"/>
+          <a:lstStyle/>
+          <a:p>
+            <a:pPr algn="l"/>
+            <a:r>
+              <a:rPr sz="2400" b="0" i="0">
+                <a:solidFill>
+                  <a:srgbClr val="202122"/>
+                </a:solidFill>
+                <a:latin typeface="Calibri"/>
+              </a:rPr>
+              <a:t>What percentage of the whole qualification is the ESP?</a:t>
+            </a:r>
+          </a:p>
+        </p:txBody>
+      </p:sp>
+      <p:sp>
+        <p:nvSpPr>
+          <p:cNvPr id="8" name="Oval 7"/>
+          <p:cNvSpPr/>
+          <p:nvPr/>
+        </p:nvSpPr>
+        <p:spPr>
+          <a:xfrm>
+            <a:off x="548640" y="3108960"/>
+            <a:ext cx="502920" cy="502920"/>
+          </a:xfrm>
+          <a:prstGeom prst="ellipse">
+            <a:avLst/>
+          </a:prstGeom>
+          <a:solidFill>
+            <a:srgbClr val="F2B705"/>
+          </a:solidFill>
+          <a:ln>
+            <a:noFill/>
+          </a:ln>
+          <a:effectLst/>
+        </p:spPr>
+        <p:style>
+          <a:lnRef idx="1">
+            <a:schemeClr val="accent1"/>
+          </a:lnRef>
+          <a:fillRef idx="3">
+            <a:schemeClr val="accent1"/>
+          </a:fillRef>
+          <a:effectRef idx="2">
+            <a:schemeClr val="accent1"/>
+          </a:effectRef>
+          <a:fontRef idx="minor">
+            <a:schemeClr val="lt1"/>
+          </a:fontRef>
+        </p:style>
+        <p:txBody>
+          <a:bodyPr rtlCol="0" anchor="ctr" lIns="0" rIns="0" tIns="0" bIns="0"/>
+          <a:lstStyle/>
+          <a:p>
+            <a:pPr algn="ctr"/>
+            <a:r>
+              <a:rPr sz="1600" b="1">
+                <a:solidFill>
+                  <a:srgbClr val="202122"/>
+                </a:solidFill>
+                <a:latin typeface="Calibri"/>
+              </a:rPr>
+              <a:t>2</a:t>
+            </a:r>
+          </a:p>
+        </p:txBody>
+      </p:sp>
+      <p:sp>
+        <p:nvSpPr>
+          <p:cNvPr id="9" name="TextBox 8"/>
+          <p:cNvSpPr txBox="1"/>
+          <p:nvPr/>
+        </p:nvSpPr>
+        <p:spPr>
+          <a:xfrm>
+            <a:off x="1371600" y="3063240"/>
+            <a:ext cx="10271455" cy="1188720"/>
+          </a:xfrm>
+          <a:prstGeom prst="rect">
+            <a:avLst/>
+          </a:prstGeom>
+          <a:noFill/>
+        </p:spPr>
+        <p:txBody>
+          <a:bodyPr wrap="square" anchor="t" lIns="0" rIns="0" tIns="0" bIns="0"/>
+          <a:lstStyle/>
+          <a:p>
+            <a:pPr algn="l"/>
+            <a:r>
+              <a:rPr sz="2400" b="0" i="0">
+                <a:solidFill>
+                  <a:srgbClr val="202122"/>
+                </a:solidFill>
+                <a:latin typeface="Calibri"/>
+              </a:rPr>
+              <a:t>How many pathways are there?</a:t>
+            </a:r>
+          </a:p>
+        </p:txBody>
+      </p:sp>
+      <p:sp>
+        <p:nvSpPr>
+          <p:cNvPr id="10" name="Oval 9"/>
+          <p:cNvSpPr/>
+          <p:nvPr/>
+        </p:nvSpPr>
+        <p:spPr>
+          <a:xfrm>
+            <a:off x="548640" y="4526280"/>
+            <a:ext cx="502920" cy="502920"/>
+          </a:xfrm>
+          <a:prstGeom prst="ellipse">
+            <a:avLst/>
+          </a:prstGeom>
+          <a:solidFill>
+            <a:srgbClr val="F2B705"/>
+          </a:solidFill>
+          <a:ln>
+            <a:noFill/>
+          </a:ln>
+          <a:effectLst/>
+        </p:spPr>
+        <p:style>
+          <a:lnRef idx="1">
+            <a:schemeClr val="accent1"/>
+          </a:lnRef>
+          <a:fillRef idx="3">
+            <a:schemeClr val="accent1"/>
+          </a:fillRef>
+          <a:effectRef idx="2">
+            <a:schemeClr val="accent1"/>
+          </a:effectRef>
+          <a:fontRef idx="minor">
+            <a:schemeClr val="lt1"/>
+          </a:fontRef>
+        </p:style>
+        <p:txBody>
+          <a:bodyPr rtlCol="0" anchor="ctr" lIns="0" rIns="0" tIns="0" bIns="0"/>
+          <a:lstStyle/>
+          <a:p>
+            <a:pPr algn="ctr"/>
+            <a:r>
+              <a:rPr sz="1600" b="1">
+                <a:solidFill>
+                  <a:srgbClr val="202122"/>
+                </a:solidFill>
+                <a:latin typeface="Calibri"/>
+              </a:rPr>
+              <a:t>3</a:t>
+            </a:r>
+          </a:p>
+        </p:txBody>
+      </p:sp>
+      <p:sp>
+        <p:nvSpPr>
+          <p:cNvPr id="11" name="TextBox 10"/>
+          <p:cNvSpPr txBox="1"/>
+          <p:nvPr/>
+        </p:nvSpPr>
+        <p:spPr>
+          <a:xfrm>
+            <a:off x="1371600" y="4480560"/>
+            <a:ext cx="10271455" cy="1188720"/>
+          </a:xfrm>
+          <a:prstGeom prst="rect">
+            <a:avLst/>
+          </a:prstGeom>
+          <a:noFill/>
+        </p:spPr>
+        <p:txBody>
+          <a:bodyPr wrap="square" anchor="t" lIns="0" rIns="0" tIns="0" bIns="0"/>
+          <a:lstStyle/>
+          <a:p>
+            <a:pPr algn="l"/>
+            <a:r>
+              <a:rPr sz="2400" b="0" i="0">
+                <a:solidFill>
+                  <a:srgbClr val="202122"/>
+                </a:solidFill>
+                <a:latin typeface="Calibri"/>
+              </a:rPr>
+              <a:t>Is the ESP marked by your teacher?</a:t>
+            </a:r>
+          </a:p>
+        </p:txBody>
+      </p:sp>
+      <p:sp>
+        <p:nvSpPr>
+          <p:cNvPr id="12" name="TextBox 11"/>
+          <p:cNvSpPr txBox="1"/>
+          <p:nvPr/>
+        </p:nvSpPr>
+        <p:spPr>
+          <a:xfrm>
+            <a:off x="548640" y="5852160"/>
+            <a:ext cx="11094415" cy="365760"/>
+          </a:xfrm>
+          <a:prstGeom prst="rect">
+            <a:avLst/>
+          </a:prstGeom>
+          <a:noFill/>
+        </p:spPr>
+        <p:txBody>
+          <a:bodyPr wrap="square" anchor="t" lIns="0" rIns="0" tIns="0" bIns="0"/>
+          <a:lstStyle/>
+          <a:p>
+            <a:pPr algn="l"/>
+            <a:r>
+              <a:rPr sz="1300" b="0" i="1">
+                <a:solidFill>
+                  <a:srgbClr val="54595D"/>
+                </a:solidFill>
+                <a:latin typeface="Calibri"/>
+              </a:rPr>
+              <a:t>Answer on mini whiteboards or in your book. Answers are in the speaker notes.</a:t>
+            </a:r>
+          </a:p>
+        </p:txBody>
+      </p:sp>
+    </p:spTree>
+  </p:cSld>
+  <p:clrMapOvr>
+    <a:masterClrMapping/>
+  </p:clrMapOvr>
+</p:sld>
+</file>
+
+<file path=ppt/slides/slide6.xml><?xml version="1.0" encoding="utf-8"?>
+<p:sld xmlns:a="http://schemas.openxmlformats.org/drawingml/2006/main" xmlns:p="http://schemas.openxmlformats.org/presentationml/2006/main" xmlns:r="http://schemas.openxmlformats.org/officeDocument/2006/relationships">
+  <p:cSld>
+    <p:bg>
+      <p:bgPr>
+        <a:solidFill>
+          <a:srgbClr val="FFFFFF"/>
+        </a:solidFill>
+        <a:effectLst/>
+      </p:bgPr>
+    </p:bg>
+    <p:spTree>
+      <p:nvGrpSpPr>
+        <p:cNvPr id="1" name=""/>
+        <p:cNvGrpSpPr/>
+        <p:nvPr/>
+      </p:nvGrpSpPr>
+      <p:grpSpPr/>
+      <p:sp>
+        <p:nvSpPr>
+          <p:cNvPr id="2" name="TextBox 1"/>
+          <p:cNvSpPr txBox="1"/>
+          <p:nvPr/>
+        </p:nvSpPr>
+        <p:spPr>
+          <a:xfrm>
+            <a:off x="548640" y="320040"/>
+            <a:ext cx="11094415" cy="274320"/>
+          </a:xfrm>
+          <a:prstGeom prst="rect">
+            <a:avLst/>
+          </a:prstGeom>
+          <a:noFill/>
+        </p:spPr>
+        <p:txBody>
+          <a:bodyPr wrap="square" anchor="t" lIns="0" rIns="0" tIns="0" bIns="0"/>
+          <a:lstStyle/>
+          <a:p>
+            <a:pPr algn="l"/>
+            <a:r>
+              <a:rPr sz="1100" b="1" i="0">
+                <a:solidFill>
+                  <a:srgbClr val="54595D"/>
+                </a:solidFill>
+                <a:latin typeface="Calibri"/>
+              </a:rPr>
+              <a:t>CORE COMPONENT  ·  Core Component</a:t>
+            </a:r>
+          </a:p>
+        </p:txBody>
+      </p:sp>
+      <p:sp>
+        <p:nvSpPr>
+          <p:cNvPr id="3" name="TextBox 2"/>
+          <p:cNvSpPr txBox="1"/>
+          <p:nvPr/>
+        </p:nvSpPr>
+        <p:spPr>
+          <a:xfrm>
+            <a:off x="548640" y="566928"/>
+            <a:ext cx="11094415" cy="822960"/>
+          </a:xfrm>
+          <a:prstGeom prst="rect">
+            <a:avLst/>
+          </a:prstGeom>
+          <a:noFill/>
+        </p:spPr>
+        <p:txBody>
+          <a:bodyPr wrap="square" anchor="ctr" lIns="0" rIns="0" tIns="0" bIns="0"/>
+          <a:lstStyle/>
+          <a:p>
+            <a:pPr algn="l"/>
+            <a:r>
+              <a:rPr sz="3200" b="1" i="0">
+                <a:solidFill>
+                  <a:srgbClr val="03306E"/>
+                </a:solidFill>
+                <a:latin typeface="Cambria"/>
+              </a:rPr>
+              <a:t>The same shape for every pathway</a:t>
+            </a:r>
+          </a:p>
+        </p:txBody>
+      </p:sp>
+      <p:sp>
+        <p:nvSpPr>
+          <p:cNvPr id="4" name="TextBox 3"/>
+          <p:cNvSpPr txBox="1"/>
+          <p:nvPr/>
+        </p:nvSpPr>
+        <p:spPr>
+          <a:xfrm>
+            <a:off x="548640" y="6446520"/>
+            <a:ext cx="8229600" cy="274320"/>
+          </a:xfrm>
+          <a:prstGeom prst="rect">
+            <a:avLst/>
+          </a:prstGeom>
+          <a:noFill/>
+        </p:spPr>
+        <p:txBody>
+          <a:bodyPr wrap="square" anchor="t" lIns="0" rIns="0" tIns="0" bIns="0"/>
+          <a:lstStyle/>
+          <a:p>
+            <a:pPr algn="l"/>
+            <a:r>
+              <a:rPr sz="1000" b="0" i="0">
+                <a:solidFill>
+                  <a:srgbClr val="54595D"/>
+                </a:solidFill>
+                <a:latin typeface="Calibri"/>
+              </a:rPr>
+              <a:t>Digital Support and Security T Level  ·  The Employer Set Project</a:t>
+            </a:r>
+          </a:p>
+        </p:txBody>
+      </p:sp>
+      <p:sp>
+        <p:nvSpPr>
+          <p:cNvPr id="5" name="TextBox 4"/>
+          <p:cNvSpPr txBox="1"/>
+          <p:nvPr/>
+        </p:nvSpPr>
+        <p:spPr>
+          <a:xfrm>
+            <a:off x="10728655" y="6446520"/>
+            <a:ext cx="914400" cy="274320"/>
+          </a:xfrm>
+          <a:prstGeom prst="rect">
+            <a:avLst/>
+          </a:prstGeom>
+          <a:noFill/>
+        </p:spPr>
+        <p:txBody>
+          <a:bodyPr wrap="square" anchor="t" lIns="0" rIns="0" tIns="0" bIns="0"/>
+          <a:lstStyle/>
+          <a:p>
+            <a:pPr algn="r"/>
+            <a:r>
+              <a:rPr sz="1000" b="0" i="0">
+                <a:solidFill>
+                  <a:srgbClr val="54595D"/>
+                </a:solidFill>
+                <a:latin typeface="Calibri"/>
+              </a:rPr>
+              <a:t>6</a:t>
+            </a:r>
+          </a:p>
+        </p:txBody>
+      </p:sp>
+      <p:sp>
+        <p:nvSpPr>
+          <p:cNvPr id="6" name="TextBox 5"/>
+          <p:cNvSpPr txBox="1"/>
+          <p:nvPr/>
+        </p:nvSpPr>
+        <p:spPr>
+          <a:xfrm>
+            <a:off x="548640" y="1554480"/>
+            <a:ext cx="6720840" cy="4617720"/>
+          </a:xfrm>
+          <a:prstGeom prst="rect">
+            <a:avLst/>
+          </a:prstGeom>
+          <a:noFill/>
+        </p:spPr>
+        <p:txBody>
+          <a:bodyPr wrap="square" lIns="0" rIns="0" tIns="0" bIns="0">
+            <a:spAutoFit/>
+          </a:bodyPr>
+          <a:lstStyle/>
+          <a:p>
+            <a:pPr>
+              <a:spcAft>
+                <a:spcPts val="1200"/>
+              </a:spcAft>
+            </a:pPr>
+            <a:r>
+              <a:rPr sz="2000" b="0">
+                <a:solidFill>
+                  <a:srgbClr val="202122"/>
+                </a:solidFill>
+                <a:latin typeface="Calibri"/>
+              </a:rPr>
+              <a:t>Every pathway follows the same sequence of tasks.</a:t>
+            </a:r>
+          </a:p>
+          <a:p>
+            <a:pPr>
+              <a:spcAft>
+                <a:spcPts val="1200"/>
+              </a:spcAft>
+            </a:pPr>
+            <a:r>
+              <a:rPr sz="2000" b="1">
+                <a:solidFill>
+                  <a:srgbClr val="202122"/>
+                </a:solidFill>
+                <a:latin typeface="Calibri"/>
+              </a:rPr>
+              <a:t>The pre-task isn't assessed:</a:t>
+            </a:r>
+            <a:r>
+              <a:rPr sz="2000" b="0">
+                <a:solidFill>
+                  <a:srgbClr val="202122"/>
+                </a:solidFill>
+                <a:latin typeface="Calibri"/>
+              </a:rPr>
+              <a:t> you research the industry context of the brief.</a:t>
+            </a:r>
+          </a:p>
+          <a:p>
+            <a:pPr>
+              <a:spcAft>
+                <a:spcPts val="1200"/>
+              </a:spcAft>
+            </a:pPr>
+            <a:r>
+              <a:rPr sz="2000" b="1">
+                <a:solidFill>
+                  <a:srgbClr val="202122"/>
+                </a:solidFill>
+                <a:latin typeface="Calibri"/>
+              </a:rPr>
+              <a:t>Task 1:</a:t>
+            </a:r>
+            <a:r>
+              <a:rPr sz="2000" b="0">
+                <a:solidFill>
+                  <a:srgbClr val="202122"/>
+                </a:solidFill>
+                <a:latin typeface="Calibri"/>
+              </a:rPr>
+              <a:t> plan the project with a Gantt chart, a resource and cost plan, and a written rationale.</a:t>
+            </a:r>
+          </a:p>
+          <a:p>
+            <a:pPr>
+              <a:spcAft>
+                <a:spcPts val="1200"/>
+              </a:spcAft>
+            </a:pPr>
+            <a:r>
+              <a:rPr sz="2000" b="1">
+                <a:solidFill>
+                  <a:srgbClr val="202122"/>
+                </a:solidFill>
+                <a:latin typeface="Calibri"/>
+              </a:rPr>
+              <a:t>Task 2:</a:t>
+            </a:r>
+            <a:r>
+              <a:rPr sz="2000" b="0">
+                <a:solidFill>
+                  <a:srgbClr val="202122"/>
+                </a:solidFill>
+                <a:latin typeface="Calibri"/>
+              </a:rPr>
+              <a:t> find and fix defects in a simulation (usually Cisco Packet Tracer) or support tickets, documenting your testing.</a:t>
+            </a:r>
+          </a:p>
+          <a:p>
+            <a:pPr>
+              <a:spcAft>
+                <a:spcPts val="1200"/>
+              </a:spcAft>
+            </a:pPr>
+            <a:r>
+              <a:rPr sz="2000" b="1">
+                <a:solidFill>
+                  <a:srgbClr val="202122"/>
+                </a:solidFill>
+                <a:latin typeface="Calibri"/>
+              </a:rPr>
+              <a:t>Task 3:</a:t>
+            </a:r>
+            <a:r>
+              <a:rPr sz="2000" b="0">
+                <a:solidFill>
+                  <a:srgbClr val="202122"/>
+                </a:solidFill>
+                <a:latin typeface="Calibri"/>
+              </a:rPr>
+              <a:t> design a solution clear enough for a client to approve and a third party to build.</a:t>
+            </a:r>
+          </a:p>
+          <a:p>
+            <a:pPr>
+              <a:spcAft>
+                <a:spcPts val="1200"/>
+              </a:spcAft>
+            </a:pPr>
+            <a:r>
+              <a:rPr sz="2000" b="1">
+                <a:solidFill>
+                  <a:srgbClr val="202122"/>
+                </a:solidFill>
+                <a:latin typeface="Calibri"/>
+              </a:rPr>
+              <a:t>Task 4a:</a:t>
+            </a:r>
+            <a:r>
+              <a:rPr sz="2000" b="0">
+                <a:solidFill>
+                  <a:srgbClr val="202122"/>
+                </a:solidFill>
+                <a:latin typeface="Calibri"/>
+              </a:rPr>
+              <a:t> develop the solution. Task 4b: evaluate it against the brief and suggest improvements.</a:t>
+            </a:r>
+          </a:p>
+        </p:txBody>
+      </p:sp>
+      <p:sp>
+        <p:nvSpPr>
+          <p:cNvPr id="7" name="Rounded Rectangle 6"/>
+          <p:cNvSpPr/>
+          <p:nvPr/>
+        </p:nvSpPr>
+        <p:spPr>
+          <a:xfrm>
+            <a:off x="7772400" y="1554480"/>
+            <a:ext cx="3867912" cy="4526280"/>
+          </a:xfrm>
+          <a:prstGeom prst="roundRect">
+            <a:avLst>
+              <a:gd name="adj" fmla="val 8000"/>
+            </a:avLst>
+          </a:prstGeom>
+          <a:solidFill>
+            <a:srgbClr val="03306E"/>
+          </a:solidFill>
+          <a:ln>
+            <a:noFill/>
+          </a:ln>
+          <a:effectLst/>
+        </p:spPr>
+        <p:style>
+          <a:lnRef idx="1">
+            <a:schemeClr val="accent1"/>
+          </a:lnRef>
+          <a:fillRef idx="3">
+            <a:schemeClr val="accent1"/>
+          </a:fillRef>
+          <a:effectRef idx="2">
+            <a:schemeClr val="accent1"/>
+          </a:effectRef>
+          <a:fontRef idx="minor">
+            <a:schemeClr val="lt1"/>
+          </a:fontRef>
+        </p:style>
+        <p:txBody>
+          <a:bodyPr rtlCol="0" anchor="ctr"/>
+          <a:lstStyle/>
+          <a:p/>
+        </p:txBody>
+      </p:sp>
+      <p:sp>
+        <p:nvSpPr>
+          <p:cNvPr id="8" name="Oval 7"/>
+          <p:cNvSpPr/>
+          <p:nvPr/>
+        </p:nvSpPr>
+        <p:spPr>
+          <a:xfrm>
+            <a:off x="8046720" y="1828800"/>
+            <a:ext cx="548640" cy="548640"/>
+          </a:xfrm>
+          <a:prstGeom prst="ellipse">
+            <a:avLst/>
+          </a:prstGeom>
+          <a:solidFill>
+            <a:srgbClr val="F2B705"/>
+          </a:solidFill>
+          <a:ln>
+            <a:noFill/>
+          </a:ln>
+          <a:effectLst/>
+        </p:spPr>
+        <p:style>
+          <a:lnRef idx="1">
+            <a:schemeClr val="accent1"/>
+          </a:lnRef>
+          <a:fillRef idx="3">
+            <a:schemeClr val="accent1"/>
+          </a:fillRef>
+          <a:effectRef idx="2">
+            <a:schemeClr val="accent1"/>
+          </a:effectRef>
+          <a:fontRef idx="minor">
+            <a:schemeClr val="lt1"/>
+          </a:fontRef>
+        </p:style>
+        <p:txBody>
+          <a:bodyPr rtlCol="0" anchor="ctr" lIns="0" rIns="0" tIns="0" bIns="0"/>
+          <a:lstStyle/>
+          <a:p>
+            <a:pPr algn="ctr"/>
+            <a:r>
+              <a:rPr sz="1300" b="1">
+                <a:solidFill>
+                  <a:srgbClr val="202122"/>
+                </a:solidFill>
+                <a:latin typeface="Calibri"/>
+              </a:rPr>
+              <a:t>e.g.</a:t>
+            </a:r>
+          </a:p>
+        </p:txBody>
+      </p:sp>
+      <p:sp>
+        <p:nvSpPr>
+          <p:cNvPr id="9" name="TextBox 8"/>
+          <p:cNvSpPr txBox="1"/>
+          <p:nvPr/>
+        </p:nvSpPr>
+        <p:spPr>
+          <a:xfrm>
+            <a:off x="8046720" y="2560320"/>
+            <a:ext cx="3291840" cy="365760"/>
+          </a:xfrm>
+          <a:prstGeom prst="rect">
+            <a:avLst/>
+          </a:prstGeom>
+          <a:noFill/>
+        </p:spPr>
+        <p:txBody>
+          <a:bodyPr wrap="square" anchor="t" lIns="0" rIns="0" tIns="0" bIns="0"/>
+          <a:lstStyle/>
+          <a:p>
+            <a:pPr algn="l"/>
+            <a:r>
+              <a:rPr sz="1300" b="1" i="0">
+                <a:solidFill>
+                  <a:srgbClr val="A9C8F0"/>
+                </a:solidFill>
+                <a:latin typeface="Calibri"/>
+              </a:rPr>
+              <a:t>EXAMPLE</a:t>
+            </a:r>
+          </a:p>
+        </p:txBody>
+      </p:sp>
+      <p:sp>
+        <p:nvSpPr>
+          <p:cNvPr id="10" name="TextBox 9"/>
+          <p:cNvSpPr txBox="1"/>
+          <p:nvPr/>
+        </p:nvSpPr>
+        <p:spPr>
+          <a:xfrm>
+            <a:off x="8046720" y="2971800"/>
+            <a:ext cx="3291840" cy="2971800"/>
+          </a:xfrm>
+          <a:prstGeom prst="rect">
+            <a:avLst/>
+          </a:prstGeom>
+          <a:noFill/>
+        </p:spPr>
+        <p:txBody>
+          <a:bodyPr wrap="square" anchor="t" lIns="0" rIns="0" tIns="0" bIns="0"/>
+          <a:lstStyle/>
+          <a:p>
+            <a:pPr algn="l"/>
+            <a:r>
+              <a:rPr sz="1900" b="0" i="0">
+                <a:solidFill>
+                  <a:srgbClr val="FFFFFF"/>
+                </a:solidFill>
+                <a:latin typeface="Cambria"/>
+              </a:rPr>
+              <a:t>In Task 2 you might find a PC with the wrong default gateway: you'd record the ping test that failed, the fix, and the ping test that then worked.</a:t>
+            </a:r>
+          </a:p>
+        </p:txBody>
+      </p:sp>
+    </p:spTree>
+  </p:cSld>
+  <p:clrMapOvr>
+    <a:masterClrMapping/>
+  </p:clrMapOvr>
+</p:sld>
+</file>
+
+<file path=ppt/slides/slide7.xml><?xml version="1.0" encoding="utf-8"?>
+<p:sld xmlns:a="http://schemas.openxmlformats.org/drawingml/2006/main" xmlns:p="http://schemas.openxmlformats.org/presentationml/2006/main" xmlns:r="http://schemas.openxmlformats.org/officeDocument/2006/relationships">
+  <p:cSld>
+    <p:bg>
+      <p:bgPr>
+        <a:solidFill>
+          <a:srgbClr val="FFFFFF"/>
+        </a:solidFill>
+        <a:effectLst/>
+      </p:bgPr>
+    </p:bg>
+    <p:spTree>
+      <p:nvGrpSpPr>
+        <p:cNvPr id="1" name=""/>
+        <p:cNvGrpSpPr/>
+        <p:nvPr/>
+      </p:nvGrpSpPr>
+      <p:grpSpPr/>
+      <p:sp>
+        <p:nvSpPr>
+          <p:cNvPr id="2" name="TextBox 1"/>
+          <p:cNvSpPr txBox="1"/>
+          <p:nvPr/>
+        </p:nvSpPr>
+        <p:spPr>
+          <a:xfrm>
+            <a:off x="548640" y="320040"/>
+            <a:ext cx="11094415" cy="274320"/>
+          </a:xfrm>
+          <a:prstGeom prst="rect">
+            <a:avLst/>
+          </a:prstGeom>
+          <a:noFill/>
+        </p:spPr>
+        <p:txBody>
+          <a:bodyPr wrap="square" anchor="t" lIns="0" rIns="0" tIns="0" bIns="0"/>
+          <a:lstStyle/>
+          <a:p>
+            <a:pPr algn="l"/>
+            <a:r>
+              <a:rPr sz="1100" b="1" i="0">
+                <a:solidFill>
+                  <a:srgbClr val="54595D"/>
+                </a:solidFill>
+                <a:latin typeface="Calibri"/>
+              </a:rPr>
+              <a:t>CORE COMPONENT  ·  Core Component</a:t>
+            </a:r>
+          </a:p>
+        </p:txBody>
+      </p:sp>
+      <p:sp>
+        <p:nvSpPr>
+          <p:cNvPr id="3" name="TextBox 2"/>
+          <p:cNvSpPr txBox="1"/>
+          <p:nvPr/>
+        </p:nvSpPr>
+        <p:spPr>
+          <a:xfrm>
+            <a:off x="548640" y="566928"/>
+            <a:ext cx="11094415" cy="822960"/>
+          </a:xfrm>
+          <a:prstGeom prst="rect">
+            <a:avLst/>
+          </a:prstGeom>
+          <a:noFill/>
+        </p:spPr>
+        <p:txBody>
+          <a:bodyPr wrap="square" anchor="ctr" lIns="0" rIns="0" tIns="0" bIns="0"/>
+          <a:lstStyle/>
+          <a:p>
+            <a:pPr algn="l"/>
+            <a:r>
+              <a:rPr sz="3200" b="1" i="0">
+                <a:solidFill>
+                  <a:srgbClr val="03306E"/>
+                </a:solidFill>
+                <a:latin typeface="Cambria"/>
+              </a:rPr>
+              <a:t>The same shape for every pathway</a:t>
+            </a:r>
+          </a:p>
+        </p:txBody>
+      </p:sp>
+      <p:sp>
+        <p:nvSpPr>
+          <p:cNvPr id="4" name="TextBox 3"/>
+          <p:cNvSpPr txBox="1"/>
+          <p:nvPr/>
+        </p:nvSpPr>
+        <p:spPr>
+          <a:xfrm>
+            <a:off x="548640" y="6446520"/>
+            <a:ext cx="8229600" cy="274320"/>
+          </a:xfrm>
+          <a:prstGeom prst="rect">
+            <a:avLst/>
+          </a:prstGeom>
+          <a:noFill/>
+        </p:spPr>
+        <p:txBody>
+          <a:bodyPr wrap="square" anchor="t" lIns="0" rIns="0" tIns="0" bIns="0"/>
+          <a:lstStyle/>
+          <a:p>
+            <a:pPr algn="l"/>
+            <a:r>
+              <a:rPr sz="1000" b="0" i="0">
+                <a:solidFill>
+                  <a:srgbClr val="54595D"/>
+                </a:solidFill>
+                <a:latin typeface="Calibri"/>
+              </a:rPr>
+              <a:t>Digital Support and Security T Level  ·  The Employer Set Project</a:t>
+            </a:r>
+          </a:p>
+        </p:txBody>
+      </p:sp>
+      <p:sp>
+        <p:nvSpPr>
+          <p:cNvPr id="5" name="TextBox 4"/>
+          <p:cNvSpPr txBox="1"/>
+          <p:nvPr/>
+        </p:nvSpPr>
+        <p:spPr>
+          <a:xfrm>
+            <a:off x="10728655" y="6446520"/>
+            <a:ext cx="914400" cy="274320"/>
+          </a:xfrm>
+          <a:prstGeom prst="rect">
+            <a:avLst/>
+          </a:prstGeom>
+          <a:noFill/>
+        </p:spPr>
+        <p:txBody>
+          <a:bodyPr wrap="square" anchor="t" lIns="0" rIns="0" tIns="0" bIns="0"/>
+          <a:lstStyle/>
+          <a:p>
+            <a:pPr algn="r"/>
+            <a:r>
+              <a:rPr sz="1000" b="0" i="0">
+                <a:solidFill>
+                  <a:srgbClr val="54595D"/>
+                </a:solidFill>
+                <a:latin typeface="Calibri"/>
+              </a:rPr>
+              <a:t>7</a:t>
+            </a:r>
+          </a:p>
+        </p:txBody>
+      </p:sp>
+      <p:sp>
+        <p:nvSpPr>
+          <p:cNvPr id="6" name="Rectangle 5"/>
+          <p:cNvSpPr/>
+          <p:nvPr/>
+        </p:nvSpPr>
+        <p:spPr>
+          <a:xfrm>
+            <a:off x="1416024" y="2382012"/>
+            <a:ext cx="9359646" cy="36576"/>
+          </a:xfrm>
+          <a:prstGeom prst="rect">
+            <a:avLst/>
+          </a:prstGeom>
+          <a:solidFill>
+            <a:srgbClr val="A9C8F0"/>
+          </a:solidFill>
+          <a:ln>
+            <a:noFill/>
+          </a:ln>
+          <a:effectLst/>
+        </p:spPr>
+        <p:style>
+          <a:lnRef idx="1">
+            <a:schemeClr val="accent1"/>
+          </a:lnRef>
+          <a:fillRef idx="3">
+            <a:schemeClr val="accent1"/>
+          </a:fillRef>
+          <a:effectRef idx="2">
+            <a:schemeClr val="accent1"/>
+          </a:effectRef>
+          <a:fontRef idx="minor">
+            <a:schemeClr val="lt1"/>
+          </a:fontRef>
+        </p:style>
+        <p:txBody>
+          <a:bodyPr rtlCol="0" anchor="ctr"/>
+          <a:lstStyle/>
+          <a:p/>
+        </p:txBody>
+      </p:sp>
+      <p:sp>
+        <p:nvSpPr>
+          <p:cNvPr id="7" name="Oval 6"/>
+          <p:cNvSpPr/>
+          <p:nvPr/>
+        </p:nvSpPr>
+        <p:spPr>
+          <a:xfrm>
+            <a:off x="1095984" y="2080260"/>
+            <a:ext cx="640080" cy="640080"/>
+          </a:xfrm>
+          <a:prstGeom prst="ellipse">
+            <a:avLst/>
+          </a:prstGeom>
+          <a:solidFill>
+            <a:srgbClr val="F2B705"/>
+          </a:solidFill>
+          <a:ln>
+            <a:noFill/>
+          </a:ln>
+          <a:effectLst/>
+        </p:spPr>
+        <p:style>
+          <a:lnRef idx="1">
+            <a:schemeClr val="accent1"/>
+          </a:lnRef>
+          <a:fillRef idx="3">
+            <a:schemeClr val="accent1"/>
+          </a:fillRef>
+          <a:effectRef idx="2">
+            <a:schemeClr val="accent1"/>
+          </a:effectRef>
+          <a:fontRef idx="minor">
+            <a:schemeClr val="lt1"/>
+          </a:fontRef>
+        </p:style>
+        <p:txBody>
+          <a:bodyPr rtlCol="0" anchor="ctr" lIns="0" rIns="0" tIns="0" bIns="0"/>
+          <a:lstStyle/>
+          <a:p>
+            <a:pPr algn="ctr"/>
+            <a:r>
+              <a:rPr sz="2000" b="1">
+                <a:solidFill>
+                  <a:srgbClr val="202122"/>
+                </a:solidFill>
+                <a:latin typeface="Calibri"/>
+              </a:rPr>
+              <a:t>1</a:t>
+            </a:r>
+          </a:p>
+        </p:txBody>
+      </p:sp>
+      <p:sp>
+        <p:nvSpPr>
+          <p:cNvPr id="8" name="TextBox 7"/>
+          <p:cNvSpPr txBox="1"/>
+          <p:nvPr/>
+        </p:nvSpPr>
+        <p:spPr>
+          <a:xfrm>
+            <a:off x="548640" y="2857500"/>
+            <a:ext cx="1734769" cy="731520"/>
+          </a:xfrm>
+          <a:prstGeom prst="rect">
+            <a:avLst/>
+          </a:prstGeom>
+          <a:noFill/>
+        </p:spPr>
+        <p:txBody>
+          <a:bodyPr wrap="square" anchor="t" lIns="0" rIns="0" tIns="0" bIns="0"/>
+          <a:lstStyle/>
+          <a:p>
+            <a:pPr algn="ctr"/>
+            <a:r>
+              <a:rPr sz="1700" b="1" i="0">
+                <a:solidFill>
+                  <a:srgbClr val="03306E"/>
+                </a:solidFill>
+                <a:latin typeface="Calibri"/>
+              </a:rPr>
+              <a:t>Pre-task</a:t>
+            </a:r>
+          </a:p>
+        </p:txBody>
+      </p:sp>
+      <p:sp>
+        <p:nvSpPr>
+          <p:cNvPr id="9" name="Rounded Rectangle 8"/>
+          <p:cNvSpPr/>
+          <p:nvPr/>
+        </p:nvSpPr>
+        <p:spPr>
+          <a:xfrm>
+            <a:off x="548640" y="3634740"/>
+            <a:ext cx="1734769" cy="2057399"/>
+          </a:xfrm>
+          <a:prstGeom prst="roundRect">
+            <a:avLst>
+              <a:gd name="adj" fmla="val 6000"/>
+            </a:avLst>
+          </a:prstGeom>
+          <a:solidFill>
+            <a:srgbClr val="EAF3FF"/>
+          </a:solidFill>
+          <a:ln>
+            <a:noFill/>
+          </a:ln>
+          <a:effectLst/>
+        </p:spPr>
+        <p:style>
+          <a:lnRef idx="1">
+            <a:schemeClr val="accent1"/>
+          </a:lnRef>
+          <a:fillRef idx="3">
+            <a:schemeClr val="accent1"/>
+          </a:fillRef>
+          <a:effectRef idx="2">
+            <a:schemeClr val="accent1"/>
+          </a:effectRef>
+          <a:fontRef idx="minor">
+            <a:schemeClr val="lt1"/>
+          </a:fontRef>
+        </p:style>
+        <p:txBody>
+          <a:bodyPr rtlCol="0" anchor="ctr"/>
+          <a:lstStyle/>
+          <a:p/>
+        </p:txBody>
+      </p:sp>
+      <p:sp>
+        <p:nvSpPr>
+          <p:cNvPr id="10" name="TextBox 9"/>
+          <p:cNvSpPr txBox="1"/>
+          <p:nvPr/>
+        </p:nvSpPr>
+        <p:spPr>
+          <a:xfrm>
+            <a:off x="685800" y="3771900"/>
+            <a:ext cx="1460449" cy="1783079"/>
+          </a:xfrm>
+          <a:prstGeom prst="rect">
+            <a:avLst/>
+          </a:prstGeom>
+          <a:noFill/>
+        </p:spPr>
+        <p:txBody>
+          <a:bodyPr wrap="square" anchor="t" lIns="0" rIns="0" tIns="0" bIns="0"/>
+          <a:lstStyle/>
+          <a:p>
+            <a:pPr algn="l"/>
+            <a:r>
+              <a:rPr sz="1800" b="0" i="0">
+                <a:solidFill>
+                  <a:srgbClr val="202122"/>
+                </a:solidFill>
+                <a:latin typeface="Calibri"/>
+              </a:rPr>
+              <a:t>Research the industry context. Not assessed.</a:t>
+            </a:r>
+          </a:p>
+        </p:txBody>
+      </p:sp>
+      <p:sp>
+        <p:nvSpPr>
+          <p:cNvPr id="11" name="Oval 10"/>
+          <p:cNvSpPr/>
+          <p:nvPr/>
+        </p:nvSpPr>
+        <p:spPr>
+          <a:xfrm>
+            <a:off x="2967913" y="2080260"/>
+            <a:ext cx="640080" cy="640080"/>
+          </a:xfrm>
+          <a:prstGeom prst="ellipse">
+            <a:avLst/>
+          </a:prstGeom>
+          <a:solidFill>
+            <a:srgbClr val="F2B705"/>
+          </a:solidFill>
+          <a:ln>
+            <a:noFill/>
+          </a:ln>
+          <a:effectLst/>
+        </p:spPr>
+        <p:style>
+          <a:lnRef idx="1">
+            <a:schemeClr val="accent1"/>
+          </a:lnRef>
+          <a:fillRef idx="3">
+            <a:schemeClr val="accent1"/>
+          </a:fillRef>
+          <a:effectRef idx="2">
+            <a:schemeClr val="accent1"/>
+          </a:effectRef>
+          <a:fontRef idx="minor">
+            <a:schemeClr val="lt1"/>
+          </a:fontRef>
+        </p:style>
+        <p:txBody>
+          <a:bodyPr rtlCol="0" anchor="ctr" lIns="0" rIns="0" tIns="0" bIns="0"/>
+          <a:lstStyle/>
+          <a:p>
+            <a:pPr algn="ctr"/>
+            <a:r>
+              <a:rPr sz="2000" b="1">
+                <a:solidFill>
+                  <a:srgbClr val="202122"/>
+                </a:solidFill>
+                <a:latin typeface="Calibri"/>
+              </a:rPr>
+              <a:t>2</a:t>
+            </a:r>
+          </a:p>
+        </p:txBody>
+      </p:sp>
+      <p:sp>
+        <p:nvSpPr>
+          <p:cNvPr id="12" name="TextBox 11"/>
+          <p:cNvSpPr txBox="1"/>
+          <p:nvPr/>
+        </p:nvSpPr>
+        <p:spPr>
+          <a:xfrm>
+            <a:off x="2420569" y="2857500"/>
+            <a:ext cx="1734769" cy="731520"/>
+          </a:xfrm>
+          <a:prstGeom prst="rect">
+            <a:avLst/>
+          </a:prstGeom>
+          <a:noFill/>
+        </p:spPr>
+        <p:txBody>
+          <a:bodyPr wrap="square" anchor="t" lIns="0" rIns="0" tIns="0" bIns="0"/>
+          <a:lstStyle/>
+          <a:p>
+            <a:pPr algn="ctr"/>
+            <a:r>
+              <a:rPr sz="1700" b="1" i="0">
+                <a:solidFill>
+                  <a:srgbClr val="03306E"/>
+                </a:solidFill>
+                <a:latin typeface="Calibri"/>
+              </a:rPr>
+              <a:t>Task 1</a:t>
+            </a:r>
+          </a:p>
+        </p:txBody>
+      </p:sp>
+      <p:sp>
+        <p:nvSpPr>
+          <p:cNvPr id="13" name="Rounded Rectangle 12"/>
+          <p:cNvSpPr/>
+          <p:nvPr/>
+        </p:nvSpPr>
+        <p:spPr>
+          <a:xfrm>
+            <a:off x="2420569" y="3634740"/>
+            <a:ext cx="1734769" cy="2057399"/>
+          </a:xfrm>
+          <a:prstGeom prst="roundRect">
+            <a:avLst>
+              <a:gd name="adj" fmla="val 6000"/>
+            </a:avLst>
+          </a:prstGeom>
+          <a:solidFill>
+            <a:srgbClr val="EAF3FF"/>
+          </a:solidFill>
+          <a:ln>
+            <a:noFill/>
+          </a:ln>
+          <a:effectLst/>
+        </p:spPr>
+        <p:style>
+          <a:lnRef idx="1">
+            <a:schemeClr val="accent1"/>
+          </a:lnRef>
+          <a:fillRef idx="3">
+            <a:schemeClr val="accent1"/>
+          </a:fillRef>
+          <a:effectRef idx="2">
+            <a:schemeClr val="accent1"/>
+          </a:effectRef>
+          <a:fontRef idx="minor">
+            <a:schemeClr val="lt1"/>
+          </a:fontRef>
+        </p:style>
+        <p:txBody>
+          <a:bodyPr rtlCol="0" anchor="ctr"/>
+          <a:lstStyle/>
+          <a:p/>
+        </p:txBody>
+      </p:sp>
+      <p:sp>
+        <p:nvSpPr>
+          <p:cNvPr id="14" name="TextBox 13"/>
+          <p:cNvSpPr txBox="1"/>
+          <p:nvPr/>
+        </p:nvSpPr>
+        <p:spPr>
+          <a:xfrm>
+            <a:off x="2557729" y="3771900"/>
+            <a:ext cx="1460449" cy="1783079"/>
+          </a:xfrm>
+          <a:prstGeom prst="rect">
+            <a:avLst/>
+          </a:prstGeom>
+          <a:noFill/>
+        </p:spPr>
+        <p:txBody>
+          <a:bodyPr wrap="square" anchor="t" lIns="0" rIns="0" tIns="0" bIns="0"/>
+          <a:lstStyle/>
+          <a:p>
+            <a:pPr algn="l"/>
+            <a:r>
+              <a:rPr sz="1800" b="0" i="0">
+                <a:solidFill>
+                  <a:srgbClr val="202122"/>
+                </a:solidFill>
+                <a:latin typeface="Calibri"/>
+              </a:rPr>
+              <a:t>Plan the project: Gantt chart, resource and cost plan, rationale.</a:t>
+            </a:r>
+          </a:p>
+        </p:txBody>
+      </p:sp>
+      <p:sp>
+        <p:nvSpPr>
+          <p:cNvPr id="15" name="Oval 14"/>
+          <p:cNvSpPr/>
+          <p:nvPr/>
+        </p:nvSpPr>
+        <p:spPr>
+          <a:xfrm>
+            <a:off x="4839843" y="2080260"/>
+            <a:ext cx="640080" cy="640080"/>
+          </a:xfrm>
+          <a:prstGeom prst="ellipse">
+            <a:avLst/>
+          </a:prstGeom>
+          <a:solidFill>
+            <a:srgbClr val="F2B705"/>
+          </a:solidFill>
+          <a:ln>
+            <a:noFill/>
+          </a:ln>
+          <a:effectLst/>
+        </p:spPr>
+        <p:style>
+          <a:lnRef idx="1">
+            <a:schemeClr val="accent1"/>
+          </a:lnRef>
+          <a:fillRef idx="3">
+            <a:schemeClr val="accent1"/>
+          </a:fillRef>
+          <a:effectRef idx="2">
+            <a:schemeClr val="accent1"/>
+          </a:effectRef>
+          <a:fontRef idx="minor">
+            <a:schemeClr val="lt1"/>
+          </a:fontRef>
+        </p:style>
+        <p:txBody>
+          <a:bodyPr rtlCol="0" anchor="ctr" lIns="0" rIns="0" tIns="0" bIns="0"/>
+          <a:lstStyle/>
+          <a:p>
+            <a:pPr algn="ctr"/>
+            <a:r>
+              <a:rPr sz="2000" b="1">
+                <a:solidFill>
+                  <a:srgbClr val="202122"/>
+                </a:solidFill>
+                <a:latin typeface="Calibri"/>
+              </a:rPr>
+              <a:t>3</a:t>
+            </a:r>
+          </a:p>
+        </p:txBody>
+      </p:sp>
+      <p:sp>
+        <p:nvSpPr>
+          <p:cNvPr id="16" name="TextBox 15"/>
+          <p:cNvSpPr txBox="1"/>
+          <p:nvPr/>
+        </p:nvSpPr>
+        <p:spPr>
+          <a:xfrm>
+            <a:off x="4292498" y="2857500"/>
+            <a:ext cx="1734769" cy="731520"/>
+          </a:xfrm>
+          <a:prstGeom prst="rect">
+            <a:avLst/>
+          </a:prstGeom>
+          <a:noFill/>
+        </p:spPr>
+        <p:txBody>
+          <a:bodyPr wrap="square" anchor="t" lIns="0" rIns="0" tIns="0" bIns="0"/>
+          <a:lstStyle/>
+          <a:p>
+            <a:pPr algn="ctr"/>
+            <a:r>
+              <a:rPr sz="1700" b="1" i="0">
+                <a:solidFill>
+                  <a:srgbClr val="03306E"/>
+                </a:solidFill>
+                <a:latin typeface="Calibri"/>
+              </a:rPr>
+              <a:t>Task 2</a:t>
+            </a:r>
+          </a:p>
+        </p:txBody>
+      </p:sp>
+      <p:sp>
+        <p:nvSpPr>
+          <p:cNvPr id="17" name="Rounded Rectangle 16"/>
+          <p:cNvSpPr/>
+          <p:nvPr/>
+        </p:nvSpPr>
+        <p:spPr>
+          <a:xfrm>
+            <a:off x="4292498" y="3634740"/>
+            <a:ext cx="1734769" cy="2057399"/>
+          </a:xfrm>
+          <a:prstGeom prst="roundRect">
+            <a:avLst>
+              <a:gd name="adj" fmla="val 6000"/>
+            </a:avLst>
+          </a:prstGeom>
+          <a:solidFill>
+            <a:srgbClr val="EAF3FF"/>
+          </a:solidFill>
+          <a:ln>
+            <a:noFill/>
+          </a:ln>
+          <a:effectLst/>
+        </p:spPr>
+        <p:style>
+          <a:lnRef idx="1">
+            <a:schemeClr val="accent1"/>
+          </a:lnRef>
+          <a:fillRef idx="3">
+            <a:schemeClr val="accent1"/>
+          </a:fillRef>
+          <a:effectRef idx="2">
+            <a:schemeClr val="accent1"/>
+          </a:effectRef>
+          <a:fontRef idx="minor">
+            <a:schemeClr val="lt1"/>
+          </a:fontRef>
+        </p:style>
+        <p:txBody>
+          <a:bodyPr rtlCol="0" anchor="ctr"/>
+          <a:lstStyle/>
+          <a:p/>
+        </p:txBody>
+      </p:sp>
+      <p:sp>
+        <p:nvSpPr>
+          <p:cNvPr id="18" name="TextBox 17"/>
+          <p:cNvSpPr txBox="1"/>
+          <p:nvPr/>
+        </p:nvSpPr>
+        <p:spPr>
+          <a:xfrm>
+            <a:off x="4429658" y="3771900"/>
+            <a:ext cx="1460449" cy="1783079"/>
+          </a:xfrm>
+          <a:prstGeom prst="rect">
+            <a:avLst/>
+          </a:prstGeom>
+          <a:noFill/>
+        </p:spPr>
+        <p:txBody>
+          <a:bodyPr wrap="square" anchor="t" lIns="0" rIns="0" tIns="0" bIns="0"/>
+          <a:lstStyle/>
+          <a:p>
+            <a:pPr algn="l"/>
+            <a:r>
+              <a:rPr sz="1800" b="0" i="0">
+                <a:solidFill>
+                  <a:srgbClr val="202122"/>
+                </a:solidFill>
+                <a:latin typeface="Calibri"/>
+              </a:rPr>
+              <a:t>Find and fix defects in a simulation or support tickets.</a:t>
+            </a:r>
+          </a:p>
+        </p:txBody>
+      </p:sp>
+      <p:sp>
+        <p:nvSpPr>
+          <p:cNvPr id="19" name="Oval 18"/>
+          <p:cNvSpPr/>
+          <p:nvPr/>
+        </p:nvSpPr>
+        <p:spPr>
+          <a:xfrm>
+            <a:off x="6711772" y="2080260"/>
+            <a:ext cx="640080" cy="640080"/>
+          </a:xfrm>
+          <a:prstGeom prst="ellipse">
+            <a:avLst/>
+          </a:prstGeom>
+          <a:solidFill>
+            <a:srgbClr val="F2B705"/>
+          </a:solidFill>
+          <a:ln>
+            <a:noFill/>
+          </a:ln>
+          <a:effectLst/>
+        </p:spPr>
+        <p:style>
+          <a:lnRef idx="1">
+            <a:schemeClr val="accent1"/>
+          </a:lnRef>
+          <a:fillRef idx="3">
+            <a:schemeClr val="accent1"/>
+          </a:fillRef>
+          <a:effectRef idx="2">
+            <a:schemeClr val="accent1"/>
+          </a:effectRef>
+          <a:fontRef idx="minor">
+            <a:schemeClr val="lt1"/>
+          </a:fontRef>
+        </p:style>
+        <p:txBody>
+          <a:bodyPr rtlCol="0" anchor="ctr" lIns="0" rIns="0" tIns="0" bIns="0"/>
+          <a:lstStyle/>
+          <a:p>
+            <a:pPr algn="ctr"/>
+            <a:r>
+              <a:rPr sz="2000" b="1">
+                <a:solidFill>
+                  <a:srgbClr val="202122"/>
+                </a:solidFill>
+                <a:latin typeface="Calibri"/>
+              </a:rPr>
+              <a:t>4</a:t>
+            </a:r>
+          </a:p>
+        </p:txBody>
+      </p:sp>
+      <p:sp>
+        <p:nvSpPr>
+          <p:cNvPr id="20" name="TextBox 19"/>
+          <p:cNvSpPr txBox="1"/>
+          <p:nvPr/>
+        </p:nvSpPr>
+        <p:spPr>
+          <a:xfrm>
+            <a:off x="6164427" y="2857500"/>
+            <a:ext cx="1734769" cy="731520"/>
+          </a:xfrm>
+          <a:prstGeom prst="rect">
+            <a:avLst/>
+          </a:prstGeom>
+          <a:noFill/>
+        </p:spPr>
+        <p:txBody>
+          <a:bodyPr wrap="square" anchor="t" lIns="0" rIns="0" tIns="0" bIns="0"/>
+          <a:lstStyle/>
+          <a:p>
+            <a:pPr algn="ctr"/>
+            <a:r>
+              <a:rPr sz="1700" b="1" i="0">
+                <a:solidFill>
+                  <a:srgbClr val="03306E"/>
+                </a:solidFill>
+                <a:latin typeface="Calibri"/>
+              </a:rPr>
+              <a:t>Task 3</a:t>
+            </a:r>
+          </a:p>
+        </p:txBody>
+      </p:sp>
+      <p:sp>
+        <p:nvSpPr>
+          <p:cNvPr id="21" name="Rounded Rectangle 20"/>
+          <p:cNvSpPr/>
+          <p:nvPr/>
+        </p:nvSpPr>
+        <p:spPr>
+          <a:xfrm>
+            <a:off x="6164427" y="3634740"/>
+            <a:ext cx="1734769" cy="2057399"/>
+          </a:xfrm>
+          <a:prstGeom prst="roundRect">
+            <a:avLst>
+              <a:gd name="adj" fmla="val 6000"/>
+            </a:avLst>
+          </a:prstGeom>
+          <a:solidFill>
+            <a:srgbClr val="EAF3FF"/>
+          </a:solidFill>
+          <a:ln>
+            <a:noFill/>
+          </a:ln>
+          <a:effectLst/>
+        </p:spPr>
+        <p:style>
+          <a:lnRef idx="1">
+            <a:schemeClr val="accent1"/>
+          </a:lnRef>
+          <a:fillRef idx="3">
+            <a:schemeClr val="accent1"/>
+          </a:fillRef>
+          <a:effectRef idx="2">
+            <a:schemeClr val="accent1"/>
+          </a:effectRef>
+          <a:fontRef idx="minor">
+            <a:schemeClr val="lt1"/>
+          </a:fontRef>
+        </p:style>
+        <p:txBody>
+          <a:bodyPr rtlCol="0" anchor="ctr"/>
+          <a:lstStyle/>
+          <a:p/>
+        </p:txBody>
+      </p:sp>
+      <p:sp>
+        <p:nvSpPr>
+          <p:cNvPr id="22" name="TextBox 21"/>
+          <p:cNvSpPr txBox="1"/>
+          <p:nvPr/>
+        </p:nvSpPr>
+        <p:spPr>
+          <a:xfrm>
+            <a:off x="6301587" y="3771900"/>
+            <a:ext cx="1460449" cy="1783079"/>
+          </a:xfrm>
+          <a:prstGeom prst="rect">
+            <a:avLst/>
+          </a:prstGeom>
+          <a:noFill/>
+        </p:spPr>
+        <p:txBody>
+          <a:bodyPr wrap="square" anchor="t" lIns="0" rIns="0" tIns="0" bIns="0"/>
+          <a:lstStyle/>
+          <a:p>
+            <a:pPr algn="l"/>
+            <a:r>
+              <a:rPr sz="1800" b="0" i="0">
+                <a:solidFill>
+                  <a:srgbClr val="202122"/>
+                </a:solidFill>
+                <a:latin typeface="Calibri"/>
+              </a:rPr>
+              <a:t>Design a solution for a client and a third party.</a:t>
+            </a:r>
+          </a:p>
+        </p:txBody>
+      </p:sp>
+      <p:sp>
+        <p:nvSpPr>
+          <p:cNvPr id="23" name="Oval 22"/>
+          <p:cNvSpPr/>
+          <p:nvPr/>
+        </p:nvSpPr>
+        <p:spPr>
+          <a:xfrm>
+            <a:off x="8583701" y="2080260"/>
+            <a:ext cx="640080" cy="640080"/>
+          </a:xfrm>
+          <a:prstGeom prst="ellipse">
+            <a:avLst/>
+          </a:prstGeom>
+          <a:solidFill>
+            <a:srgbClr val="F2B705"/>
+          </a:solidFill>
+          <a:ln>
+            <a:noFill/>
+          </a:ln>
+          <a:effectLst/>
+        </p:spPr>
+        <p:style>
+          <a:lnRef idx="1">
+            <a:schemeClr val="accent1"/>
+          </a:lnRef>
+          <a:fillRef idx="3">
+            <a:schemeClr val="accent1"/>
+          </a:fillRef>
+          <a:effectRef idx="2">
+            <a:schemeClr val="accent1"/>
+          </a:effectRef>
+          <a:fontRef idx="minor">
+            <a:schemeClr val="lt1"/>
+          </a:fontRef>
+        </p:style>
+        <p:txBody>
+          <a:bodyPr rtlCol="0" anchor="ctr" lIns="0" rIns="0" tIns="0" bIns="0"/>
+          <a:lstStyle/>
+          <a:p>
+            <a:pPr algn="ctr"/>
+            <a:r>
+              <a:rPr sz="2000" b="1">
+                <a:solidFill>
+                  <a:srgbClr val="202122"/>
+                </a:solidFill>
+                <a:latin typeface="Calibri"/>
+              </a:rPr>
+              <a:t>5</a:t>
+            </a:r>
+          </a:p>
+        </p:txBody>
+      </p:sp>
+      <p:sp>
+        <p:nvSpPr>
+          <p:cNvPr id="24" name="TextBox 23"/>
+          <p:cNvSpPr txBox="1"/>
+          <p:nvPr/>
+        </p:nvSpPr>
+        <p:spPr>
+          <a:xfrm>
+            <a:off x="8036356" y="2857500"/>
+            <a:ext cx="1734769" cy="731520"/>
+          </a:xfrm>
+          <a:prstGeom prst="rect">
+            <a:avLst/>
+          </a:prstGeom>
+          <a:noFill/>
+        </p:spPr>
+        <p:txBody>
+          <a:bodyPr wrap="square" anchor="t" lIns="0" rIns="0" tIns="0" bIns="0"/>
+          <a:lstStyle/>
+          <a:p>
+            <a:pPr algn="ctr"/>
+            <a:r>
+              <a:rPr sz="1700" b="1" i="0">
+                <a:solidFill>
+                  <a:srgbClr val="03306E"/>
+                </a:solidFill>
+                <a:latin typeface="Calibri"/>
+              </a:rPr>
+              <a:t>Task 4a</a:t>
+            </a:r>
+          </a:p>
+        </p:txBody>
+      </p:sp>
+      <p:sp>
+        <p:nvSpPr>
+          <p:cNvPr id="25" name="Rounded Rectangle 24"/>
+          <p:cNvSpPr/>
+          <p:nvPr/>
+        </p:nvSpPr>
+        <p:spPr>
+          <a:xfrm>
+            <a:off x="8036356" y="3634740"/>
+            <a:ext cx="1734769" cy="2057399"/>
+          </a:xfrm>
+          <a:prstGeom prst="roundRect">
+            <a:avLst>
+              <a:gd name="adj" fmla="val 6000"/>
+            </a:avLst>
+          </a:prstGeom>
+          <a:solidFill>
+            <a:srgbClr val="EAF3FF"/>
+          </a:solidFill>
+          <a:ln>
+            <a:noFill/>
+          </a:ln>
+          <a:effectLst/>
+        </p:spPr>
+        <p:style>
+          <a:lnRef idx="1">
+            <a:schemeClr val="accent1"/>
+          </a:lnRef>
+          <a:fillRef idx="3">
+            <a:schemeClr val="accent1"/>
+          </a:fillRef>
+          <a:effectRef idx="2">
+            <a:schemeClr val="accent1"/>
+          </a:effectRef>
+          <a:fontRef idx="minor">
+            <a:schemeClr val="lt1"/>
+          </a:fontRef>
+        </p:style>
+        <p:txBody>
+          <a:bodyPr rtlCol="0" anchor="ctr"/>
+          <a:lstStyle/>
+          <a:p/>
+        </p:txBody>
+      </p:sp>
+      <p:sp>
+        <p:nvSpPr>
+          <p:cNvPr id="26" name="TextBox 25"/>
+          <p:cNvSpPr txBox="1"/>
+          <p:nvPr/>
+        </p:nvSpPr>
+        <p:spPr>
+          <a:xfrm>
+            <a:off x="8173516" y="3771900"/>
+            <a:ext cx="1460449" cy="1783079"/>
+          </a:xfrm>
+          <a:prstGeom prst="rect">
+            <a:avLst/>
+          </a:prstGeom>
+          <a:noFill/>
+        </p:spPr>
+        <p:txBody>
+          <a:bodyPr wrap="square" anchor="t" lIns="0" rIns="0" tIns="0" bIns="0"/>
+          <a:lstStyle/>
+          <a:p>
+            <a:pPr algn="l"/>
+            <a:r>
+              <a:rPr sz="1800" b="0" i="0">
+                <a:solidFill>
+                  <a:srgbClr val="202122"/>
+                </a:solidFill>
+                <a:latin typeface="Calibri"/>
+              </a:rPr>
+              <a:t>Develop the solution: robust, secure, organised, user-friendly.</a:t>
+            </a:r>
+          </a:p>
+        </p:txBody>
+      </p:sp>
+      <p:sp>
+        <p:nvSpPr>
+          <p:cNvPr id="27" name="Oval 26"/>
+          <p:cNvSpPr/>
+          <p:nvPr/>
+        </p:nvSpPr>
+        <p:spPr>
+          <a:xfrm>
+            <a:off x="10455630" y="2080260"/>
+            <a:ext cx="640080" cy="640080"/>
+          </a:xfrm>
+          <a:prstGeom prst="ellipse">
+            <a:avLst/>
+          </a:prstGeom>
+          <a:solidFill>
+            <a:srgbClr val="F2B705"/>
+          </a:solidFill>
+          <a:ln>
+            <a:noFill/>
+          </a:ln>
+          <a:effectLst/>
+        </p:spPr>
+        <p:style>
+          <a:lnRef idx="1">
+            <a:schemeClr val="accent1"/>
+          </a:lnRef>
+          <a:fillRef idx="3">
+            <a:schemeClr val="accent1"/>
+          </a:fillRef>
+          <a:effectRef idx="2">
+            <a:schemeClr val="accent1"/>
+          </a:effectRef>
+          <a:fontRef idx="minor">
+            <a:schemeClr val="lt1"/>
+          </a:fontRef>
+        </p:style>
+        <p:txBody>
+          <a:bodyPr rtlCol="0" anchor="ctr" lIns="0" rIns="0" tIns="0" bIns="0"/>
+          <a:lstStyle/>
+          <a:p>
+            <a:pPr algn="ctr"/>
+            <a:r>
+              <a:rPr sz="2000" b="1">
+                <a:solidFill>
+                  <a:srgbClr val="202122"/>
+                </a:solidFill>
+                <a:latin typeface="Calibri"/>
+              </a:rPr>
+              <a:t>6</a:t>
+            </a:r>
+          </a:p>
+        </p:txBody>
+      </p:sp>
+      <p:sp>
+        <p:nvSpPr>
+          <p:cNvPr id="28" name="TextBox 27"/>
+          <p:cNvSpPr txBox="1"/>
+          <p:nvPr/>
+        </p:nvSpPr>
+        <p:spPr>
+          <a:xfrm>
+            <a:off x="9908286" y="2857500"/>
+            <a:ext cx="1734769" cy="731520"/>
+          </a:xfrm>
+          <a:prstGeom prst="rect">
+            <a:avLst/>
+          </a:prstGeom>
+          <a:noFill/>
+        </p:spPr>
+        <p:txBody>
+          <a:bodyPr wrap="square" anchor="t" lIns="0" rIns="0" tIns="0" bIns="0"/>
+          <a:lstStyle/>
+          <a:p>
+            <a:pPr algn="ctr"/>
+            <a:r>
+              <a:rPr sz="1700" b="1" i="0">
+                <a:solidFill>
+                  <a:srgbClr val="03306E"/>
+                </a:solidFill>
+                <a:latin typeface="Calibri"/>
+              </a:rPr>
+              <a:t>Task 4b</a:t>
+            </a:r>
+          </a:p>
+        </p:txBody>
+      </p:sp>
+      <p:sp>
+        <p:nvSpPr>
+          <p:cNvPr id="29" name="Rounded Rectangle 28"/>
+          <p:cNvSpPr/>
+          <p:nvPr/>
+        </p:nvSpPr>
+        <p:spPr>
+          <a:xfrm>
+            <a:off x="9908286" y="3634740"/>
+            <a:ext cx="1734769" cy="2057399"/>
+          </a:xfrm>
+          <a:prstGeom prst="roundRect">
+            <a:avLst>
+              <a:gd name="adj" fmla="val 6000"/>
+            </a:avLst>
+          </a:prstGeom>
+          <a:solidFill>
+            <a:srgbClr val="EAF3FF"/>
+          </a:solidFill>
+          <a:ln>
+            <a:noFill/>
+          </a:ln>
+          <a:effectLst/>
+        </p:spPr>
+        <p:style>
+          <a:lnRef idx="1">
+            <a:schemeClr val="accent1"/>
+          </a:lnRef>
+          <a:fillRef idx="3">
+            <a:schemeClr val="accent1"/>
+          </a:fillRef>
+          <a:effectRef idx="2">
+            <a:schemeClr val="accent1"/>
+          </a:effectRef>
+          <a:fontRef idx="minor">
+            <a:schemeClr val="lt1"/>
+          </a:fontRef>
+        </p:style>
+        <p:txBody>
+          <a:bodyPr rtlCol="0" anchor="ctr"/>
+          <a:lstStyle/>
+          <a:p/>
+        </p:txBody>
+      </p:sp>
+      <p:sp>
+        <p:nvSpPr>
+          <p:cNvPr id="30" name="TextBox 29"/>
+          <p:cNvSpPr txBox="1"/>
+          <p:nvPr/>
+        </p:nvSpPr>
+        <p:spPr>
+          <a:xfrm>
+            <a:off x="10045446" y="3771900"/>
+            <a:ext cx="1460449" cy="1783079"/>
+          </a:xfrm>
+          <a:prstGeom prst="rect">
+            <a:avLst/>
+          </a:prstGeom>
+          <a:noFill/>
+        </p:spPr>
+        <p:txBody>
+          <a:bodyPr wrap="square" anchor="t" lIns="0" rIns="0" tIns="0" bIns="0"/>
+          <a:lstStyle/>
+          <a:p>
+            <a:pPr algn="l"/>
+            <a:r>
+              <a:rPr sz="1800" b="0" i="0">
+                <a:solidFill>
+                  <a:srgbClr val="202122"/>
+                </a:solidFill>
+                <a:latin typeface="Calibri"/>
+              </a:rPr>
+              <a:t>Reflective evaluation against the brief.</a:t>
+            </a:r>
+          </a:p>
+        </p:txBody>
+      </p:sp>
+    </p:spTree>
+  </p:cSld>
+  <p:clrMapOvr>
+    <a:masterClrMapping/>
+  </p:clrMapOvr>
+</p:sld>
+</file>
+
+<file path=ppt/slides/slide8.xml><?xml version="1.0" encoding="utf-8"?>
+<p:sld xmlns:a="http://schemas.openxmlformats.org/drawingml/2006/main" xmlns:p="http://schemas.openxmlformats.org/presentationml/2006/main" xmlns:r="http://schemas.openxmlformats.org/officeDocument/2006/relationships">
+  <p:cSld>
+    <p:bg>
+      <p:bgPr>
+        <a:solidFill>
+          <a:srgbClr val="FFFFFF"/>
+        </a:solidFill>
+        <a:effectLst/>
+      </p:bgPr>
+    </p:bg>
+    <p:spTree>
+      <p:nvGrpSpPr>
+        <p:cNvPr id="1" name=""/>
+        <p:cNvGrpSpPr/>
+        <p:nvPr/>
+      </p:nvGrpSpPr>
+      <p:grpSpPr/>
+      <p:sp>
+        <p:nvSpPr>
+          <p:cNvPr id="2" name="TextBox 1"/>
+          <p:cNvSpPr txBox="1"/>
+          <p:nvPr/>
+        </p:nvSpPr>
+        <p:spPr>
+          <a:xfrm>
+            <a:off x="548640" y="320040"/>
+            <a:ext cx="11094415" cy="274320"/>
+          </a:xfrm>
+          <a:prstGeom prst="rect">
+            <a:avLst/>
+          </a:prstGeom>
+          <a:noFill/>
+        </p:spPr>
+        <p:txBody>
+          <a:bodyPr wrap="square" anchor="t" lIns="0" rIns="0" tIns="0" bIns="0"/>
+          <a:lstStyle/>
+          <a:p>
+            <a:pPr algn="l"/>
+            <a:r>
+              <a:rPr sz="1100" b="1" i="0">
+                <a:solidFill>
+                  <a:srgbClr val="54595D"/>
+                </a:solidFill>
+                <a:latin typeface="Calibri"/>
+              </a:rPr>
+              <a:t>CORE COMPONENT  ·  Core Component</a:t>
+            </a:r>
+          </a:p>
+        </p:txBody>
+      </p:sp>
+      <p:sp>
+        <p:nvSpPr>
+          <p:cNvPr id="3" name="TextBox 2"/>
+          <p:cNvSpPr txBox="1"/>
+          <p:nvPr/>
+        </p:nvSpPr>
+        <p:spPr>
+          <a:xfrm>
+            <a:off x="548640" y="566928"/>
+            <a:ext cx="11094415" cy="822960"/>
+          </a:xfrm>
+          <a:prstGeom prst="rect">
+            <a:avLst/>
+          </a:prstGeom>
+          <a:noFill/>
+        </p:spPr>
+        <p:txBody>
+          <a:bodyPr wrap="square" anchor="ctr" lIns="0" rIns="0" tIns="0" bIns="0"/>
+          <a:lstStyle/>
+          <a:p>
+            <a:pPr algn="l"/>
+            <a:r>
+              <a:rPr sz="3200" b="1" i="0">
+                <a:solidFill>
+                  <a:srgbClr val="03306E"/>
+                </a:solidFill>
+                <a:latin typeface="Cambria"/>
+              </a:rPr>
+              <a:t>Quick check: The same shape for every pathway</a:t>
+            </a:r>
+          </a:p>
+        </p:txBody>
+      </p:sp>
+      <p:sp>
+        <p:nvSpPr>
+          <p:cNvPr id="4" name="TextBox 3"/>
+          <p:cNvSpPr txBox="1"/>
+          <p:nvPr/>
+        </p:nvSpPr>
+        <p:spPr>
+          <a:xfrm>
+            <a:off x="548640" y="6446520"/>
+            <a:ext cx="8229600" cy="274320"/>
+          </a:xfrm>
+          <a:prstGeom prst="rect">
+            <a:avLst/>
+          </a:prstGeom>
+          <a:noFill/>
+        </p:spPr>
+        <p:txBody>
+          <a:bodyPr wrap="square" anchor="t" lIns="0" rIns="0" tIns="0" bIns="0"/>
+          <a:lstStyle/>
+          <a:p>
+            <a:pPr algn="l"/>
+            <a:r>
+              <a:rPr sz="1000" b="0" i="0">
+                <a:solidFill>
+                  <a:srgbClr val="54595D"/>
+                </a:solidFill>
+                <a:latin typeface="Calibri"/>
+              </a:rPr>
+              <a:t>Digital Support and Security T Level  ·  The Employer Set Project</a:t>
+            </a:r>
+          </a:p>
+        </p:txBody>
+      </p:sp>
+      <p:sp>
+        <p:nvSpPr>
+          <p:cNvPr id="5" name="TextBox 4"/>
+          <p:cNvSpPr txBox="1"/>
+          <p:nvPr/>
+        </p:nvSpPr>
+        <p:spPr>
+          <a:xfrm>
+            <a:off x="10728655" y="6446520"/>
+            <a:ext cx="914400" cy="274320"/>
+          </a:xfrm>
+          <a:prstGeom prst="rect">
+            <a:avLst/>
+          </a:prstGeom>
+          <a:noFill/>
+        </p:spPr>
+        <p:txBody>
+          <a:bodyPr wrap="square" anchor="t" lIns="0" rIns="0" tIns="0" bIns="0"/>
+          <a:lstStyle/>
+          <a:p>
+            <a:pPr algn="r"/>
+            <a:r>
+              <a:rPr sz="1000" b="0" i="0">
+                <a:solidFill>
+                  <a:srgbClr val="54595D"/>
+                </a:solidFill>
+                <a:latin typeface="Calibri"/>
+              </a:rPr>
+              <a:t>8</a:t>
+            </a:r>
+          </a:p>
+        </p:txBody>
+      </p:sp>
+      <p:sp>
+        <p:nvSpPr>
+          <p:cNvPr id="6" name="Oval 5"/>
+          <p:cNvSpPr/>
+          <p:nvPr/>
+        </p:nvSpPr>
+        <p:spPr>
+          <a:xfrm>
+            <a:off x="548640" y="1691640"/>
+            <a:ext cx="502920" cy="502920"/>
+          </a:xfrm>
+          <a:prstGeom prst="ellipse">
+            <a:avLst/>
+          </a:prstGeom>
+          <a:solidFill>
+            <a:srgbClr val="F2B705"/>
+          </a:solidFill>
+          <a:ln>
+            <a:noFill/>
+          </a:ln>
+          <a:effectLst/>
+        </p:spPr>
+        <p:style>
+          <a:lnRef idx="1">
+            <a:schemeClr val="accent1"/>
+          </a:lnRef>
+          <a:fillRef idx="3">
+            <a:schemeClr val="accent1"/>
+          </a:fillRef>
+          <a:effectRef idx="2">
+            <a:schemeClr val="accent1"/>
+          </a:effectRef>
+          <a:fontRef idx="minor">
+            <a:schemeClr val="lt1"/>
+          </a:fontRef>
+        </p:style>
+        <p:txBody>
+          <a:bodyPr rtlCol="0" anchor="ctr" lIns="0" rIns="0" tIns="0" bIns="0"/>
+          <a:lstStyle/>
+          <a:p>
+            <a:pPr algn="ctr"/>
+            <a:r>
+              <a:rPr sz="1600" b="1">
+                <a:solidFill>
+                  <a:srgbClr val="202122"/>
+                </a:solidFill>
+                <a:latin typeface="Calibri"/>
+              </a:rPr>
+              <a:t>1</a:t>
+            </a:r>
+          </a:p>
+        </p:txBody>
+      </p:sp>
+      <p:sp>
+        <p:nvSpPr>
+          <p:cNvPr id="7" name="TextBox 6"/>
+          <p:cNvSpPr txBox="1"/>
+          <p:nvPr/>
+        </p:nvSpPr>
+        <p:spPr>
+          <a:xfrm>
+            <a:off x="1371600" y="1645920"/>
+            <a:ext cx="10271455" cy="1188720"/>
+          </a:xfrm>
+          <a:prstGeom prst="rect">
+            <a:avLst/>
+          </a:prstGeom>
+          <a:noFill/>
+        </p:spPr>
+        <p:txBody>
+          <a:bodyPr wrap="square" anchor="t" lIns="0" rIns="0" tIns="0" bIns="0"/>
+          <a:lstStyle/>
+          <a:p>
+            <a:pPr algn="l"/>
+            <a:r>
+              <a:rPr sz="2400" b="0" i="0">
+                <a:solidFill>
+                  <a:srgbClr val="202122"/>
+                </a:solidFill>
+                <a:latin typeface="Calibri"/>
+              </a:rPr>
+              <a:t>What three things does Task 1 produce?</a:t>
+            </a:r>
+          </a:p>
+        </p:txBody>
+      </p:sp>
+      <p:sp>
+        <p:nvSpPr>
+          <p:cNvPr id="8" name="Oval 7"/>
+          <p:cNvSpPr/>
+          <p:nvPr/>
+        </p:nvSpPr>
+        <p:spPr>
+          <a:xfrm>
+            <a:off x="548640" y="3108960"/>
+            <a:ext cx="502920" cy="502920"/>
+          </a:xfrm>
+          <a:prstGeom prst="ellipse">
+            <a:avLst/>
+          </a:prstGeom>
+          <a:solidFill>
+            <a:srgbClr val="F2B705"/>
+          </a:solidFill>
+          <a:ln>
+            <a:noFill/>
+          </a:ln>
+          <a:effectLst/>
+        </p:spPr>
+        <p:style>
+          <a:lnRef idx="1">
+            <a:schemeClr val="accent1"/>
+          </a:lnRef>
+          <a:fillRef idx="3">
+            <a:schemeClr val="accent1"/>
+          </a:fillRef>
+          <a:effectRef idx="2">
+            <a:schemeClr val="accent1"/>
+          </a:effectRef>
+          <a:fontRef idx="minor">
+            <a:schemeClr val="lt1"/>
+          </a:fontRef>
+        </p:style>
+        <p:txBody>
+          <a:bodyPr rtlCol="0" anchor="ctr" lIns="0" rIns="0" tIns="0" bIns="0"/>
+          <a:lstStyle/>
+          <a:p>
+            <a:pPr algn="ctr"/>
+            <a:r>
+              <a:rPr sz="1600" b="1">
+                <a:solidFill>
+                  <a:srgbClr val="202122"/>
+                </a:solidFill>
+                <a:latin typeface="Calibri"/>
+              </a:rPr>
+              <a:t>2</a:t>
+            </a:r>
+          </a:p>
+        </p:txBody>
+      </p:sp>
+      <p:sp>
+        <p:nvSpPr>
+          <p:cNvPr id="9" name="TextBox 8"/>
+          <p:cNvSpPr txBox="1"/>
+          <p:nvPr/>
+        </p:nvSpPr>
+        <p:spPr>
+          <a:xfrm>
+            <a:off x="1371600" y="3063240"/>
+            <a:ext cx="10271455" cy="1188720"/>
+          </a:xfrm>
+          <a:prstGeom prst="rect">
+            <a:avLst/>
+          </a:prstGeom>
+          <a:noFill/>
+        </p:spPr>
+        <p:txBody>
+          <a:bodyPr wrap="square" anchor="t" lIns="0" rIns="0" tIns="0" bIns="0"/>
+          <a:lstStyle/>
+          <a:p>
+            <a:pPr algn="l"/>
+            <a:r>
+              <a:rPr sz="2400" b="0" i="0">
+                <a:solidFill>
+                  <a:srgbClr val="202122"/>
+                </a:solidFill>
+                <a:latin typeface="Calibri"/>
+              </a:rPr>
+              <a:t>Is the pre-task assessed?</a:t>
+            </a:r>
+          </a:p>
+        </p:txBody>
+      </p:sp>
+      <p:sp>
+        <p:nvSpPr>
+          <p:cNvPr id="10" name="Oval 9"/>
+          <p:cNvSpPr/>
+          <p:nvPr/>
+        </p:nvSpPr>
+        <p:spPr>
+          <a:xfrm>
+            <a:off x="548640" y="4526280"/>
+            <a:ext cx="502920" cy="502920"/>
+          </a:xfrm>
+          <a:prstGeom prst="ellipse">
+            <a:avLst/>
+          </a:prstGeom>
+          <a:solidFill>
+            <a:srgbClr val="F2B705"/>
+          </a:solidFill>
+          <a:ln>
+            <a:noFill/>
+          </a:ln>
+          <a:effectLst/>
+        </p:spPr>
+        <p:style>
+          <a:lnRef idx="1">
+            <a:schemeClr val="accent1"/>
+          </a:lnRef>
+          <a:fillRef idx="3">
+            <a:schemeClr val="accent1"/>
+          </a:fillRef>
+          <a:effectRef idx="2">
+            <a:schemeClr val="accent1"/>
+          </a:effectRef>
+          <a:fontRef idx="minor">
+            <a:schemeClr val="lt1"/>
+          </a:fontRef>
+        </p:style>
+        <p:txBody>
+          <a:bodyPr rtlCol="0" anchor="ctr" lIns="0" rIns="0" tIns="0" bIns="0"/>
+          <a:lstStyle/>
+          <a:p>
+            <a:pPr algn="ctr"/>
+            <a:r>
+              <a:rPr sz="1600" b="1">
+                <a:solidFill>
+                  <a:srgbClr val="202122"/>
+                </a:solidFill>
+                <a:latin typeface="Calibri"/>
+              </a:rPr>
+              <a:t>3</a:t>
+            </a:r>
+          </a:p>
+        </p:txBody>
+      </p:sp>
+      <p:sp>
+        <p:nvSpPr>
+          <p:cNvPr id="11" name="TextBox 10"/>
+          <p:cNvSpPr txBox="1"/>
+          <p:nvPr/>
+        </p:nvSpPr>
+        <p:spPr>
+          <a:xfrm>
+            <a:off x="1371600" y="4480560"/>
+            <a:ext cx="10271455" cy="1188720"/>
+          </a:xfrm>
+          <a:prstGeom prst="rect">
+            <a:avLst/>
+          </a:prstGeom>
+          <a:noFill/>
+        </p:spPr>
+        <p:txBody>
+          <a:bodyPr wrap="square" anchor="t" lIns="0" rIns="0" tIns="0" bIns="0"/>
+          <a:lstStyle/>
+          <a:p>
+            <a:pPr algn="l"/>
+            <a:r>
+              <a:rPr sz="2400" b="0" i="0">
+                <a:solidFill>
+                  <a:srgbClr val="202122"/>
+                </a:solidFill>
+                <a:latin typeface="Calibri"/>
+              </a:rPr>
+              <a:t>What happens in Task 4b?</a:t>
+            </a:r>
+          </a:p>
+        </p:txBody>
+      </p:sp>
+      <p:sp>
+        <p:nvSpPr>
+          <p:cNvPr id="12" name="TextBox 11"/>
+          <p:cNvSpPr txBox="1"/>
+          <p:nvPr/>
+        </p:nvSpPr>
+        <p:spPr>
+          <a:xfrm>
+            <a:off x="548640" y="5852160"/>
+            <a:ext cx="11094415" cy="365760"/>
+          </a:xfrm>
+          <a:prstGeom prst="rect">
+            <a:avLst/>
+          </a:prstGeom>
+          <a:noFill/>
+        </p:spPr>
+        <p:txBody>
+          <a:bodyPr wrap="square" anchor="t" lIns="0" rIns="0" tIns="0" bIns="0"/>
+          <a:lstStyle/>
+          <a:p>
+            <a:pPr algn="l"/>
+            <a:r>
+              <a:rPr sz="1300" b="0" i="1">
+                <a:solidFill>
+                  <a:srgbClr val="54595D"/>
+                </a:solidFill>
+                <a:latin typeface="Calibri"/>
+              </a:rPr>
+              <a:t>Answer on mini whiteboards or in your book. Answers are in the speaker notes.</a:t>
+            </a:r>
+          </a:p>
+        </p:txBody>
+      </p:sp>
+    </p:spTree>
+  </p:cSld>
+  <p:clrMapOvr>
+    <a:masterClrMapping/>
+  </p:clrMapOvr>
+</p:sld>
+</file>
+
+<file path=ppt/slides/slide9.xml><?xml version="1.0" encoding="utf-8"?>
+<p:sld xmlns:a="http://schemas.openxmlformats.org/drawingml/2006/main" xmlns:p="http://schemas.openxmlformats.org/presentationml/2006/main" xmlns:r="http://schemas.openxmlformats.org/officeDocument/2006/relationships">
+  <p:cSld>
+    <p:bg>
+      <p:bgPr>
+        <a:solidFill>
+          <a:srgbClr val="FFFFFF"/>
+        </a:solidFill>
+        <a:effectLst/>
+      </p:bgPr>
+    </p:bg>
+    <p:spTree>
+      <p:nvGrpSpPr>
+        <p:cNvPr id="1" name=""/>
+        <p:cNvGrpSpPr/>
+        <p:nvPr/>
+      </p:nvGrpSpPr>
+      <p:grpSpPr/>
+      <p:sp>
+        <p:nvSpPr>
+          <p:cNvPr id="2" name="TextBox 1"/>
+          <p:cNvSpPr txBox="1"/>
+          <p:nvPr/>
+        </p:nvSpPr>
+        <p:spPr>
+          <a:xfrm>
+            <a:off x="548640" y="320040"/>
+            <a:ext cx="11094415" cy="274320"/>
+          </a:xfrm>
+          <a:prstGeom prst="rect">
+            <a:avLst/>
+          </a:prstGeom>
+          <a:noFill/>
+        </p:spPr>
+        <p:txBody>
+          <a:bodyPr wrap="square" anchor="t" lIns="0" rIns="0" tIns="0" bIns="0"/>
+          <a:lstStyle/>
+          <a:p>
+            <a:pPr algn="l"/>
+            <a:r>
+              <a:rPr sz="1100" b="1" i="0">
+                <a:solidFill>
+                  <a:srgbClr val="54595D"/>
+                </a:solidFill>
+                <a:latin typeface="Calibri"/>
+              </a:rPr>
+              <a:t>CORE COMPONENT  ·  Core Component</a:t>
+            </a:r>
+          </a:p>
+        </p:txBody>
+      </p:sp>
+      <p:sp>
+        <p:nvSpPr>
+          <p:cNvPr id="3" name="TextBox 2"/>
+          <p:cNvSpPr txBox="1"/>
+          <p:nvPr/>
+        </p:nvSpPr>
+        <p:spPr>
+          <a:xfrm>
+            <a:off x="548640" y="566928"/>
+            <a:ext cx="11094415" cy="822960"/>
+          </a:xfrm>
+          <a:prstGeom prst="rect">
+            <a:avLst/>
+          </a:prstGeom>
+          <a:noFill/>
+        </p:spPr>
+        <p:txBody>
+          <a:bodyPr wrap="square" anchor="ctr" lIns="0" rIns="0" tIns="0" bIns="0"/>
+          <a:lstStyle/>
+          <a:p>
+            <a:pPr algn="l"/>
+            <a:r>
+              <a:rPr sz="3200" b="1" i="0">
+                <a:solidFill>
+                  <a:srgbClr val="03306E"/>
+                </a:solidFill>
+                <a:latin typeface="Cambria"/>
+              </a:rPr>
+              <a:t>The three pathways</a:t>
+            </a:r>
+          </a:p>
+        </p:txBody>
+      </p:sp>
+      <p:sp>
+        <p:nvSpPr>
+          <p:cNvPr id="4" name="TextBox 3"/>
+          <p:cNvSpPr txBox="1"/>
+          <p:nvPr/>
+        </p:nvSpPr>
+        <p:spPr>
+          <a:xfrm>
+            <a:off x="548640" y="6446520"/>
+            <a:ext cx="8229600" cy="274320"/>
+          </a:xfrm>
+          <a:prstGeom prst="rect">
+            <a:avLst/>
+          </a:prstGeom>
+          <a:noFill/>
+        </p:spPr>
+        <p:txBody>
+          <a:bodyPr wrap="square" anchor="t" lIns="0" rIns="0" tIns="0" bIns="0"/>
+          <a:lstStyle/>
+          <a:p>
+            <a:pPr algn="l"/>
+            <a:r>
+              <a:rPr sz="1000" b="0" i="0">
+                <a:solidFill>
+                  <a:srgbClr val="54595D"/>
+                </a:solidFill>
+                <a:latin typeface="Calibri"/>
+              </a:rPr>
+              <a:t>Digital Support and Security T Level  ·  The Employer Set Project</a:t>
+            </a:r>
+          </a:p>
+        </p:txBody>
+      </p:sp>
+      <p:sp>
+        <p:nvSpPr>
+          <p:cNvPr id="5" name="TextBox 4"/>
+          <p:cNvSpPr txBox="1"/>
+          <p:nvPr/>
+        </p:nvSpPr>
+        <p:spPr>
+          <a:xfrm>
+            <a:off x="10728655" y="6446520"/>
+            <a:ext cx="914400" cy="274320"/>
+          </a:xfrm>
+          <a:prstGeom prst="rect">
+            <a:avLst/>
+          </a:prstGeom>
+          <a:noFill/>
+        </p:spPr>
+        <p:txBody>
+          <a:bodyPr wrap="square" anchor="t" lIns="0" rIns="0" tIns="0" bIns="0"/>
+          <a:lstStyle/>
+          <a:p>
+            <a:pPr algn="r"/>
+            <a:r>
+              <a:rPr sz="1000" b="0" i="0">
+                <a:solidFill>
+                  <a:srgbClr val="54595D"/>
+                </a:solidFill>
+                <a:latin typeface="Calibri"/>
+              </a:rPr>
+              <a:t>9</a:t>
             </a:r>
           </a:p>
         </p:txBody>
@@ -8127,2322 +13388,6 @@
           </a:graphicData>
         </a:graphic>
       </p:graphicFrame>
-    </p:spTree>
-  </p:cSld>
-  <p:clrMapOvr>
-    <a:masterClrMapping/>
-  </p:clrMapOvr>
-</p:sld>
-</file>
-
-<file path=ppt/slides/slide6.xml><?xml version="1.0" encoding="utf-8"?>
-<p:sld xmlns:a="http://schemas.openxmlformats.org/drawingml/2006/main" xmlns:p="http://schemas.openxmlformats.org/presentationml/2006/main" xmlns:r="http://schemas.openxmlformats.org/officeDocument/2006/relationships">
-  <p:cSld>
-    <p:bg>
-      <p:bgPr>
-        <a:solidFill>
-          <a:srgbClr val="FFFFFF"/>
-        </a:solidFill>
-        <a:effectLst/>
-      </p:bgPr>
-    </p:bg>
-    <p:spTree>
-      <p:nvGrpSpPr>
-        <p:cNvPr id="1" name=""/>
-        <p:cNvGrpSpPr/>
-        <p:nvPr/>
-      </p:nvGrpSpPr>
-      <p:grpSpPr/>
-      <p:sp>
-        <p:nvSpPr>
-          <p:cNvPr id="2" name="TextBox 1"/>
-          <p:cNvSpPr txBox="1"/>
-          <p:nvPr/>
-        </p:nvSpPr>
-        <p:spPr>
-          <a:xfrm>
-            <a:off x="548640" y="320040"/>
-            <a:ext cx="11094415" cy="274320"/>
-          </a:xfrm>
-          <a:prstGeom prst="rect">
-            <a:avLst/>
-          </a:prstGeom>
-          <a:noFill/>
-        </p:spPr>
-        <p:txBody>
-          <a:bodyPr wrap="square" anchor="t" lIns="0" rIns="0" tIns="0" bIns="0"/>
-          <a:lstStyle/>
-          <a:p>
-            <a:pPr algn="l"/>
-            <a:r>
-              <a:rPr sz="1100" b="1" i="0">
-                <a:solidFill>
-                  <a:srgbClr val="54595D"/>
-                </a:solidFill>
-                <a:latin typeface="Calibri"/>
-              </a:rPr>
-              <a:t>CORE COMPONENT  ·  Core Component</a:t>
-            </a:r>
-          </a:p>
-        </p:txBody>
-      </p:sp>
-      <p:sp>
-        <p:nvSpPr>
-          <p:cNvPr id="3" name="TextBox 2"/>
-          <p:cNvSpPr txBox="1"/>
-          <p:nvPr/>
-        </p:nvSpPr>
-        <p:spPr>
-          <a:xfrm>
-            <a:off x="548640" y="566928"/>
-            <a:ext cx="11094415" cy="822960"/>
-          </a:xfrm>
-          <a:prstGeom prst="rect">
-            <a:avLst/>
-          </a:prstGeom>
-          <a:noFill/>
-        </p:spPr>
-        <p:txBody>
-          <a:bodyPr wrap="square" anchor="ctr" lIns="0" rIns="0" tIns="0" bIns="0"/>
-          <a:lstStyle/>
-          <a:p>
-            <a:pPr algn="l"/>
-            <a:r>
-              <a:rPr sz="3200" b="1" i="0">
-                <a:solidFill>
-                  <a:srgbClr val="03306E"/>
-                </a:solidFill>
-                <a:latin typeface="Cambria"/>
-              </a:rPr>
-              <a:t>What Task 4a looks for</a:t>
-            </a:r>
-          </a:p>
-        </p:txBody>
-      </p:sp>
-      <p:sp>
-        <p:nvSpPr>
-          <p:cNvPr id="4" name="TextBox 3"/>
-          <p:cNvSpPr txBox="1"/>
-          <p:nvPr/>
-        </p:nvSpPr>
-        <p:spPr>
-          <a:xfrm>
-            <a:off x="548640" y="6446520"/>
-            <a:ext cx="8229600" cy="274320"/>
-          </a:xfrm>
-          <a:prstGeom prst="rect">
-            <a:avLst/>
-          </a:prstGeom>
-          <a:noFill/>
-        </p:spPr>
-        <p:txBody>
-          <a:bodyPr wrap="square" anchor="t" lIns="0" rIns="0" tIns="0" bIns="0"/>
-          <a:lstStyle/>
-          <a:p>
-            <a:pPr algn="l"/>
-            <a:r>
-              <a:rPr sz="1000" b="0" i="0">
-                <a:solidFill>
-                  <a:srgbClr val="54595D"/>
-                </a:solidFill>
-                <a:latin typeface="Calibri"/>
-              </a:rPr>
-              <a:t>Digital Support and Security T Level  ·  The Employer Set Project</a:t>
-            </a:r>
-          </a:p>
-        </p:txBody>
-      </p:sp>
-      <p:sp>
-        <p:nvSpPr>
-          <p:cNvPr id="5" name="TextBox 4"/>
-          <p:cNvSpPr txBox="1"/>
-          <p:nvPr/>
-        </p:nvSpPr>
-        <p:spPr>
-          <a:xfrm>
-            <a:off x="10728655" y="6446520"/>
-            <a:ext cx="914400" cy="274320"/>
-          </a:xfrm>
-          <a:prstGeom prst="rect">
-            <a:avLst/>
-          </a:prstGeom>
-          <a:noFill/>
-        </p:spPr>
-        <p:txBody>
-          <a:bodyPr wrap="square" anchor="t" lIns="0" rIns="0" tIns="0" bIns="0"/>
-          <a:lstStyle/>
-          <a:p>
-            <a:pPr algn="r"/>
-            <a:r>
-              <a:rPr sz="1000" b="0" i="0">
-                <a:solidFill>
-                  <a:srgbClr val="54595D"/>
-                </a:solidFill>
-                <a:latin typeface="Calibri"/>
-              </a:rPr>
-              <a:t>6</a:t>
-            </a:r>
-          </a:p>
-        </p:txBody>
-      </p:sp>
-      <p:sp>
-        <p:nvSpPr>
-          <p:cNvPr id="6" name="Rounded Rectangle 5"/>
-          <p:cNvSpPr/>
-          <p:nvPr/>
-        </p:nvSpPr>
-        <p:spPr>
-          <a:xfrm>
-            <a:off x="548640" y="1600200"/>
-            <a:ext cx="5410047" cy="2148840"/>
-          </a:xfrm>
-          <a:prstGeom prst="roundRect">
-            <a:avLst>
-              <a:gd name="adj" fmla="val 6000"/>
-            </a:avLst>
-          </a:prstGeom>
-          <a:solidFill>
-            <a:srgbClr val="EAF3FF"/>
-          </a:solidFill>
-          <a:ln>
-            <a:noFill/>
-          </a:ln>
-          <a:effectLst/>
-        </p:spPr>
-        <p:style>
-          <a:lnRef idx="1">
-            <a:schemeClr val="accent1"/>
-          </a:lnRef>
-          <a:fillRef idx="3">
-            <a:schemeClr val="accent1"/>
-          </a:fillRef>
-          <a:effectRef idx="2">
-            <a:schemeClr val="accent1"/>
-          </a:effectRef>
-          <a:fontRef idx="minor">
-            <a:schemeClr val="lt1"/>
-          </a:fontRef>
-        </p:style>
-        <p:txBody>
-          <a:bodyPr rtlCol="0" anchor="ctr"/>
-          <a:lstStyle/>
-          <a:p/>
-        </p:txBody>
-      </p:sp>
-      <p:sp>
-        <p:nvSpPr>
-          <p:cNvPr id="7" name="Oval 6"/>
-          <p:cNvSpPr/>
-          <p:nvPr/>
-        </p:nvSpPr>
-        <p:spPr>
-          <a:xfrm>
-            <a:off x="777240" y="1828800"/>
-            <a:ext cx="457200" cy="457200"/>
-          </a:xfrm>
-          <a:prstGeom prst="ellipse">
-            <a:avLst/>
-          </a:prstGeom>
-          <a:solidFill>
-            <a:srgbClr val="F2B705"/>
-          </a:solidFill>
-          <a:ln>
-            <a:noFill/>
-          </a:ln>
-          <a:effectLst/>
-        </p:spPr>
-        <p:style>
-          <a:lnRef idx="1">
-            <a:schemeClr val="accent1"/>
-          </a:lnRef>
-          <a:fillRef idx="3">
-            <a:schemeClr val="accent1"/>
-          </a:fillRef>
-          <a:effectRef idx="2">
-            <a:schemeClr val="accent1"/>
-          </a:effectRef>
-          <a:fontRef idx="minor">
-            <a:schemeClr val="lt1"/>
-          </a:fontRef>
-        </p:style>
-        <p:txBody>
-          <a:bodyPr rtlCol="0" anchor="ctr" lIns="0" rIns="0" tIns="0" bIns="0"/>
-          <a:lstStyle/>
-          <a:p>
-            <a:pPr algn="ctr"/>
-            <a:r>
-              <a:rPr sz="1500" b="1">
-                <a:solidFill>
-                  <a:srgbClr val="202122"/>
-                </a:solidFill>
-                <a:latin typeface="Calibri"/>
-              </a:rPr>
-              <a:t>1</a:t>
-            </a:r>
-          </a:p>
-        </p:txBody>
-      </p:sp>
-      <p:sp>
-        <p:nvSpPr>
-          <p:cNvPr id="8" name="TextBox 7"/>
-          <p:cNvSpPr txBox="1"/>
-          <p:nvPr/>
-        </p:nvSpPr>
-        <p:spPr>
-          <a:xfrm>
-            <a:off x="1371600" y="1801368"/>
-            <a:ext cx="4404207" cy="512064"/>
-          </a:xfrm>
-          <a:prstGeom prst="rect">
-            <a:avLst/>
-          </a:prstGeom>
-          <a:noFill/>
-        </p:spPr>
-        <p:txBody>
-          <a:bodyPr wrap="square" anchor="ctr" lIns="0" rIns="0" tIns="0" bIns="0"/>
-          <a:lstStyle/>
-          <a:p>
-            <a:pPr algn="l"/>
-            <a:r>
-              <a:rPr sz="1900" b="1" i="0">
-                <a:solidFill>
-                  <a:srgbClr val="03306E"/>
-                </a:solidFill>
-                <a:latin typeface="Calibri"/>
-              </a:rPr>
-              <a:t>Robustness</a:t>
-            </a:r>
-          </a:p>
-        </p:txBody>
-      </p:sp>
-      <p:sp>
-        <p:nvSpPr>
-          <p:cNvPr id="9" name="TextBox 8"/>
-          <p:cNvSpPr txBox="1"/>
-          <p:nvPr/>
-        </p:nvSpPr>
-        <p:spPr>
-          <a:xfrm>
-            <a:off x="777240" y="2468880"/>
-            <a:ext cx="4952847" cy="1143000"/>
-          </a:xfrm>
-          <a:prstGeom prst="rect">
-            <a:avLst/>
-          </a:prstGeom>
-          <a:noFill/>
-        </p:spPr>
-        <p:txBody>
-          <a:bodyPr wrap="square" anchor="t" lIns="0" rIns="0" tIns="0" bIns="0"/>
-          <a:lstStyle/>
-          <a:p>
-            <a:pPr algn="l"/>
-            <a:r>
-              <a:rPr sz="2000" b="0" i="0">
-                <a:solidFill>
-                  <a:srgbClr val="202122"/>
-                </a:solidFill>
-                <a:latin typeface="Calibri"/>
-              </a:rPr>
-              <a:t>Resilience and redundancy: backups, fallbacks, UPS.</a:t>
-            </a:r>
-          </a:p>
-        </p:txBody>
-      </p:sp>
-      <p:sp>
-        <p:nvSpPr>
-          <p:cNvPr id="10" name="Rounded Rectangle 9"/>
-          <p:cNvSpPr/>
-          <p:nvPr/>
-        </p:nvSpPr>
-        <p:spPr>
-          <a:xfrm>
-            <a:off x="6233007" y="1600200"/>
-            <a:ext cx="5410047" cy="2148840"/>
-          </a:xfrm>
-          <a:prstGeom prst="roundRect">
-            <a:avLst>
-              <a:gd name="adj" fmla="val 6000"/>
-            </a:avLst>
-          </a:prstGeom>
-          <a:solidFill>
-            <a:srgbClr val="EAF3FF"/>
-          </a:solidFill>
-          <a:ln>
-            <a:noFill/>
-          </a:ln>
-          <a:effectLst/>
-        </p:spPr>
-        <p:style>
-          <a:lnRef idx="1">
-            <a:schemeClr val="accent1"/>
-          </a:lnRef>
-          <a:fillRef idx="3">
-            <a:schemeClr val="accent1"/>
-          </a:fillRef>
-          <a:effectRef idx="2">
-            <a:schemeClr val="accent1"/>
-          </a:effectRef>
-          <a:fontRef idx="minor">
-            <a:schemeClr val="lt1"/>
-          </a:fontRef>
-        </p:style>
-        <p:txBody>
-          <a:bodyPr rtlCol="0" anchor="ctr"/>
-          <a:lstStyle/>
-          <a:p/>
-        </p:txBody>
-      </p:sp>
-      <p:sp>
-        <p:nvSpPr>
-          <p:cNvPr id="11" name="Oval 10"/>
-          <p:cNvSpPr/>
-          <p:nvPr/>
-        </p:nvSpPr>
-        <p:spPr>
-          <a:xfrm>
-            <a:off x="6461607" y="1828800"/>
-            <a:ext cx="457200" cy="457200"/>
-          </a:xfrm>
-          <a:prstGeom prst="ellipse">
-            <a:avLst/>
-          </a:prstGeom>
-          <a:solidFill>
-            <a:srgbClr val="F2B705"/>
-          </a:solidFill>
-          <a:ln>
-            <a:noFill/>
-          </a:ln>
-          <a:effectLst/>
-        </p:spPr>
-        <p:style>
-          <a:lnRef idx="1">
-            <a:schemeClr val="accent1"/>
-          </a:lnRef>
-          <a:fillRef idx="3">
-            <a:schemeClr val="accent1"/>
-          </a:fillRef>
-          <a:effectRef idx="2">
-            <a:schemeClr val="accent1"/>
-          </a:effectRef>
-          <a:fontRef idx="minor">
-            <a:schemeClr val="lt1"/>
-          </a:fontRef>
-        </p:style>
-        <p:txBody>
-          <a:bodyPr rtlCol="0" anchor="ctr" lIns="0" rIns="0" tIns="0" bIns="0"/>
-          <a:lstStyle/>
-          <a:p>
-            <a:pPr algn="ctr"/>
-            <a:r>
-              <a:rPr sz="1500" b="1">
-                <a:solidFill>
-                  <a:srgbClr val="202122"/>
-                </a:solidFill>
-                <a:latin typeface="Calibri"/>
-              </a:rPr>
-              <a:t>2</a:t>
-            </a:r>
-          </a:p>
-        </p:txBody>
-      </p:sp>
-      <p:sp>
-        <p:nvSpPr>
-          <p:cNvPr id="12" name="TextBox 11"/>
-          <p:cNvSpPr txBox="1"/>
-          <p:nvPr/>
-        </p:nvSpPr>
-        <p:spPr>
-          <a:xfrm>
-            <a:off x="7055967" y="1801368"/>
-            <a:ext cx="4404207" cy="512064"/>
-          </a:xfrm>
-          <a:prstGeom prst="rect">
-            <a:avLst/>
-          </a:prstGeom>
-          <a:noFill/>
-        </p:spPr>
-        <p:txBody>
-          <a:bodyPr wrap="square" anchor="ctr" lIns="0" rIns="0" tIns="0" bIns="0"/>
-          <a:lstStyle/>
-          <a:p>
-            <a:pPr algn="l"/>
-            <a:r>
-              <a:rPr sz="1900" b="1" i="0">
-                <a:solidFill>
-                  <a:srgbClr val="03306E"/>
-                </a:solidFill>
-                <a:latin typeface="Calibri"/>
-              </a:rPr>
-              <a:t>Security</a:t>
-            </a:r>
-          </a:p>
-        </p:txBody>
-      </p:sp>
-      <p:sp>
-        <p:nvSpPr>
-          <p:cNvPr id="13" name="TextBox 12"/>
-          <p:cNvSpPr txBox="1"/>
-          <p:nvPr/>
-        </p:nvSpPr>
-        <p:spPr>
-          <a:xfrm>
-            <a:off x="6461607" y="2468880"/>
-            <a:ext cx="4952847" cy="1143000"/>
-          </a:xfrm>
-          <a:prstGeom prst="rect">
-            <a:avLst/>
-          </a:prstGeom>
-          <a:noFill/>
-        </p:spPr>
-        <p:txBody>
-          <a:bodyPr wrap="square" anchor="t" lIns="0" rIns="0" tIns="0" bIns="0"/>
-          <a:lstStyle/>
-          <a:p>
-            <a:pPr algn="l"/>
-            <a:r>
-              <a:rPr sz="2000" b="0" i="0">
-                <a:solidFill>
-                  <a:srgbClr val="202122"/>
-                </a:solidFill>
-                <a:latin typeface="Calibri"/>
-              </a:rPr>
-              <a:t>Anti-malware and firewall configuration, user roles and permissions, hardening, air gaps.</a:t>
-            </a:r>
-          </a:p>
-        </p:txBody>
-      </p:sp>
-      <p:sp>
-        <p:nvSpPr>
-          <p:cNvPr id="14" name="Rounded Rectangle 13"/>
-          <p:cNvSpPr/>
-          <p:nvPr/>
-        </p:nvSpPr>
-        <p:spPr>
-          <a:xfrm>
-            <a:off x="548640" y="4023360"/>
-            <a:ext cx="5410047" cy="2148840"/>
-          </a:xfrm>
-          <a:prstGeom prst="roundRect">
-            <a:avLst>
-              <a:gd name="adj" fmla="val 6000"/>
-            </a:avLst>
-          </a:prstGeom>
-          <a:solidFill>
-            <a:srgbClr val="EAF3FF"/>
-          </a:solidFill>
-          <a:ln>
-            <a:noFill/>
-          </a:ln>
-          <a:effectLst/>
-        </p:spPr>
-        <p:style>
-          <a:lnRef idx="1">
-            <a:schemeClr val="accent1"/>
-          </a:lnRef>
-          <a:fillRef idx="3">
-            <a:schemeClr val="accent1"/>
-          </a:fillRef>
-          <a:effectRef idx="2">
-            <a:schemeClr val="accent1"/>
-          </a:effectRef>
-          <a:fontRef idx="minor">
-            <a:schemeClr val="lt1"/>
-          </a:fontRef>
-        </p:style>
-        <p:txBody>
-          <a:bodyPr rtlCol="0" anchor="ctr"/>
-          <a:lstStyle/>
-          <a:p/>
-        </p:txBody>
-      </p:sp>
-      <p:sp>
-        <p:nvSpPr>
-          <p:cNvPr id="15" name="Oval 14"/>
-          <p:cNvSpPr/>
-          <p:nvPr/>
-        </p:nvSpPr>
-        <p:spPr>
-          <a:xfrm>
-            <a:off x="777240" y="4251960"/>
-            <a:ext cx="457200" cy="457200"/>
-          </a:xfrm>
-          <a:prstGeom prst="ellipse">
-            <a:avLst/>
-          </a:prstGeom>
-          <a:solidFill>
-            <a:srgbClr val="F2B705"/>
-          </a:solidFill>
-          <a:ln>
-            <a:noFill/>
-          </a:ln>
-          <a:effectLst/>
-        </p:spPr>
-        <p:style>
-          <a:lnRef idx="1">
-            <a:schemeClr val="accent1"/>
-          </a:lnRef>
-          <a:fillRef idx="3">
-            <a:schemeClr val="accent1"/>
-          </a:fillRef>
-          <a:effectRef idx="2">
-            <a:schemeClr val="accent1"/>
-          </a:effectRef>
-          <a:fontRef idx="minor">
-            <a:schemeClr val="lt1"/>
-          </a:fontRef>
-        </p:style>
-        <p:txBody>
-          <a:bodyPr rtlCol="0" anchor="ctr" lIns="0" rIns="0" tIns="0" bIns="0"/>
-          <a:lstStyle/>
-          <a:p>
-            <a:pPr algn="ctr"/>
-            <a:r>
-              <a:rPr sz="1500" b="1">
-                <a:solidFill>
-                  <a:srgbClr val="202122"/>
-                </a:solidFill>
-                <a:latin typeface="Calibri"/>
-              </a:rPr>
-              <a:t>3</a:t>
-            </a:r>
-          </a:p>
-        </p:txBody>
-      </p:sp>
-      <p:sp>
-        <p:nvSpPr>
-          <p:cNvPr id="16" name="TextBox 15"/>
-          <p:cNvSpPr txBox="1"/>
-          <p:nvPr/>
-        </p:nvSpPr>
-        <p:spPr>
-          <a:xfrm>
-            <a:off x="1371600" y="4224528"/>
-            <a:ext cx="4404207" cy="512064"/>
-          </a:xfrm>
-          <a:prstGeom prst="rect">
-            <a:avLst/>
-          </a:prstGeom>
-          <a:noFill/>
-        </p:spPr>
-        <p:txBody>
-          <a:bodyPr wrap="square" anchor="ctr" lIns="0" rIns="0" tIns="0" bIns="0"/>
-          <a:lstStyle/>
-          <a:p>
-            <a:pPr algn="l"/>
-            <a:r>
-              <a:rPr sz="1900" b="1" i="0">
-                <a:solidFill>
-                  <a:srgbClr val="03306E"/>
-                </a:solidFill>
-                <a:latin typeface="Calibri"/>
-              </a:rPr>
-              <a:t>Organisation</a:t>
-            </a:r>
-          </a:p>
-        </p:txBody>
-      </p:sp>
-      <p:sp>
-        <p:nvSpPr>
-          <p:cNvPr id="17" name="TextBox 16"/>
-          <p:cNvSpPr txBox="1"/>
-          <p:nvPr/>
-        </p:nvSpPr>
-        <p:spPr>
-          <a:xfrm>
-            <a:off x="777240" y="4892040"/>
-            <a:ext cx="4952847" cy="1143000"/>
-          </a:xfrm>
-          <a:prstGeom prst="rect">
-            <a:avLst/>
-          </a:prstGeom>
-          <a:noFill/>
-        </p:spPr>
-        <p:txBody>
-          <a:bodyPr wrap="square" anchor="t" lIns="0" rIns="0" tIns="0" bIns="0"/>
-          <a:lstStyle/>
-          <a:p>
-            <a:pPr algn="l"/>
-            <a:r>
-              <a:rPr sz="2000" b="0" i="0">
-                <a:solidFill>
-                  <a:srgbClr val="202122"/>
-                </a:solidFill>
-                <a:latin typeface="Calibri"/>
-              </a:rPr>
-              <a:t>Server configuration, node deployment, media, subnetting.</a:t>
-            </a:r>
-          </a:p>
-        </p:txBody>
-      </p:sp>
-      <p:sp>
-        <p:nvSpPr>
-          <p:cNvPr id="18" name="Rounded Rectangle 17"/>
-          <p:cNvSpPr/>
-          <p:nvPr/>
-        </p:nvSpPr>
-        <p:spPr>
-          <a:xfrm>
-            <a:off x="6233007" y="4023360"/>
-            <a:ext cx="5410047" cy="2148840"/>
-          </a:xfrm>
-          <a:prstGeom prst="roundRect">
-            <a:avLst>
-              <a:gd name="adj" fmla="val 6000"/>
-            </a:avLst>
-          </a:prstGeom>
-          <a:solidFill>
-            <a:srgbClr val="EAF3FF"/>
-          </a:solidFill>
-          <a:ln>
-            <a:noFill/>
-          </a:ln>
-          <a:effectLst/>
-        </p:spPr>
-        <p:style>
-          <a:lnRef idx="1">
-            <a:schemeClr val="accent1"/>
-          </a:lnRef>
-          <a:fillRef idx="3">
-            <a:schemeClr val="accent1"/>
-          </a:fillRef>
-          <a:effectRef idx="2">
-            <a:schemeClr val="accent1"/>
-          </a:effectRef>
-          <a:fontRef idx="minor">
-            <a:schemeClr val="lt1"/>
-          </a:fontRef>
-        </p:style>
-        <p:txBody>
-          <a:bodyPr rtlCol="0" anchor="ctr"/>
-          <a:lstStyle/>
-          <a:p/>
-        </p:txBody>
-      </p:sp>
-      <p:sp>
-        <p:nvSpPr>
-          <p:cNvPr id="19" name="Oval 18"/>
-          <p:cNvSpPr/>
-          <p:nvPr/>
-        </p:nvSpPr>
-        <p:spPr>
-          <a:xfrm>
-            <a:off x="6461607" y="4251960"/>
-            <a:ext cx="457200" cy="457200"/>
-          </a:xfrm>
-          <a:prstGeom prst="ellipse">
-            <a:avLst/>
-          </a:prstGeom>
-          <a:solidFill>
-            <a:srgbClr val="F2B705"/>
-          </a:solidFill>
-          <a:ln>
-            <a:noFill/>
-          </a:ln>
-          <a:effectLst/>
-        </p:spPr>
-        <p:style>
-          <a:lnRef idx="1">
-            <a:schemeClr val="accent1"/>
-          </a:lnRef>
-          <a:fillRef idx="3">
-            <a:schemeClr val="accent1"/>
-          </a:fillRef>
-          <a:effectRef idx="2">
-            <a:schemeClr val="accent1"/>
-          </a:effectRef>
-          <a:fontRef idx="minor">
-            <a:schemeClr val="lt1"/>
-          </a:fontRef>
-        </p:style>
-        <p:txBody>
-          <a:bodyPr rtlCol="0" anchor="ctr" lIns="0" rIns="0" tIns="0" bIns="0"/>
-          <a:lstStyle/>
-          <a:p>
-            <a:pPr algn="ctr"/>
-            <a:r>
-              <a:rPr sz="1500" b="1">
-                <a:solidFill>
-                  <a:srgbClr val="202122"/>
-                </a:solidFill>
-                <a:latin typeface="Calibri"/>
-              </a:rPr>
-              <a:t>4</a:t>
-            </a:r>
-          </a:p>
-        </p:txBody>
-      </p:sp>
-      <p:sp>
-        <p:nvSpPr>
-          <p:cNvPr id="20" name="TextBox 19"/>
-          <p:cNvSpPr txBox="1"/>
-          <p:nvPr/>
-        </p:nvSpPr>
-        <p:spPr>
-          <a:xfrm>
-            <a:off x="7055967" y="4224528"/>
-            <a:ext cx="4404207" cy="512064"/>
-          </a:xfrm>
-          <a:prstGeom prst="rect">
-            <a:avLst/>
-          </a:prstGeom>
-          <a:noFill/>
-        </p:spPr>
-        <p:txBody>
-          <a:bodyPr wrap="square" anchor="ctr" lIns="0" rIns="0" tIns="0" bIns="0"/>
-          <a:lstStyle/>
-          <a:p>
-            <a:pPr algn="l"/>
-            <a:r>
-              <a:rPr sz="1900" b="1" i="0">
-                <a:solidFill>
-                  <a:srgbClr val="03306E"/>
-                </a:solidFill>
-                <a:latin typeface="Calibri"/>
-              </a:rPr>
-              <a:t>User experience</a:t>
-            </a:r>
-          </a:p>
-        </p:txBody>
-      </p:sp>
-      <p:sp>
-        <p:nvSpPr>
-          <p:cNvPr id="21" name="TextBox 20"/>
-          <p:cNvSpPr txBox="1"/>
-          <p:nvPr/>
-        </p:nvSpPr>
-        <p:spPr>
-          <a:xfrm>
-            <a:off x="6461607" y="4892040"/>
-            <a:ext cx="4952847" cy="1143000"/>
-          </a:xfrm>
-          <a:prstGeom prst="rect">
-            <a:avLst/>
-          </a:prstGeom>
-          <a:noFill/>
-        </p:spPr>
-        <p:txBody>
-          <a:bodyPr wrap="square" anchor="t" lIns="0" rIns="0" tIns="0" bIns="0"/>
-          <a:lstStyle/>
-          <a:p>
-            <a:pPr algn="l"/>
-            <a:r>
-              <a:rPr sz="2000" b="0" i="0">
-                <a:solidFill>
-                  <a:srgbClr val="202122"/>
-                </a:solidFill>
-                <a:latin typeface="Calibri"/>
-              </a:rPr>
-              <a:t>End-user devices, connections, back-end systems, access and availability.</a:t>
-            </a:r>
-          </a:p>
-        </p:txBody>
-      </p:sp>
-    </p:spTree>
-  </p:cSld>
-  <p:clrMapOvr>
-    <a:masterClrMapping/>
-  </p:clrMapOvr>
-</p:sld>
-</file>
-
-<file path=ppt/slides/slide7.xml><?xml version="1.0" encoding="utf-8"?>
-<p:sld xmlns:a="http://schemas.openxmlformats.org/drawingml/2006/main" xmlns:p="http://schemas.openxmlformats.org/presentationml/2006/main" xmlns:r="http://schemas.openxmlformats.org/officeDocument/2006/relationships">
-  <p:cSld>
-    <p:bg>
-      <p:bgPr>
-        <a:solidFill>
-          <a:srgbClr val="FFFFFF"/>
-        </a:solidFill>
-        <a:effectLst/>
-      </p:bgPr>
-    </p:bg>
-    <p:spTree>
-      <p:nvGrpSpPr>
-        <p:cNvPr id="1" name=""/>
-        <p:cNvGrpSpPr/>
-        <p:nvPr/>
-      </p:nvGrpSpPr>
-      <p:grpSpPr/>
-      <p:sp>
-        <p:nvSpPr>
-          <p:cNvPr id="2" name="TextBox 1"/>
-          <p:cNvSpPr txBox="1"/>
-          <p:nvPr/>
-        </p:nvSpPr>
-        <p:spPr>
-          <a:xfrm>
-            <a:off x="548640" y="320040"/>
-            <a:ext cx="11094415" cy="274320"/>
-          </a:xfrm>
-          <a:prstGeom prst="rect">
-            <a:avLst/>
-          </a:prstGeom>
-          <a:noFill/>
-        </p:spPr>
-        <p:txBody>
-          <a:bodyPr wrap="square" anchor="t" lIns="0" rIns="0" tIns="0" bIns="0"/>
-          <a:lstStyle/>
-          <a:p>
-            <a:pPr algn="l"/>
-            <a:r>
-              <a:rPr sz="1100" b="1" i="0">
-                <a:solidFill>
-                  <a:srgbClr val="54595D"/>
-                </a:solidFill>
-                <a:latin typeface="Calibri"/>
-              </a:rPr>
-              <a:t>CORE COMPONENT  ·  Core Component</a:t>
-            </a:r>
-          </a:p>
-        </p:txBody>
-      </p:sp>
-      <p:sp>
-        <p:nvSpPr>
-          <p:cNvPr id="3" name="TextBox 2"/>
-          <p:cNvSpPr txBox="1"/>
-          <p:nvPr/>
-        </p:nvSpPr>
-        <p:spPr>
-          <a:xfrm>
-            <a:off x="548640" y="566928"/>
-            <a:ext cx="11094415" cy="822960"/>
-          </a:xfrm>
-          <a:prstGeom prst="rect">
-            <a:avLst/>
-          </a:prstGeom>
-          <a:noFill/>
-        </p:spPr>
-        <p:txBody>
-          <a:bodyPr wrap="square" anchor="ctr" lIns="0" rIns="0" tIns="0" bIns="0"/>
-          <a:lstStyle/>
-          <a:p>
-            <a:pPr algn="l"/>
-            <a:r>
-              <a:rPr sz="3200" b="1" i="0">
-                <a:solidFill>
-                  <a:srgbClr val="03306E"/>
-                </a:solidFill>
-                <a:latin typeface="Cambria"/>
-              </a:rPr>
-              <a:t>How to prepare</a:t>
-            </a:r>
-          </a:p>
-        </p:txBody>
-      </p:sp>
-      <p:sp>
-        <p:nvSpPr>
-          <p:cNvPr id="4" name="TextBox 3"/>
-          <p:cNvSpPr txBox="1"/>
-          <p:nvPr/>
-        </p:nvSpPr>
-        <p:spPr>
-          <a:xfrm>
-            <a:off x="548640" y="6446520"/>
-            <a:ext cx="8229600" cy="274320"/>
-          </a:xfrm>
-          <a:prstGeom prst="rect">
-            <a:avLst/>
-          </a:prstGeom>
-          <a:noFill/>
-        </p:spPr>
-        <p:txBody>
-          <a:bodyPr wrap="square" anchor="t" lIns="0" rIns="0" tIns="0" bIns="0"/>
-          <a:lstStyle/>
-          <a:p>
-            <a:pPr algn="l"/>
-            <a:r>
-              <a:rPr sz="1000" b="0" i="0">
-                <a:solidFill>
-                  <a:srgbClr val="54595D"/>
-                </a:solidFill>
-                <a:latin typeface="Calibri"/>
-              </a:rPr>
-              <a:t>Digital Support and Security T Level  ·  The Employer Set Project</a:t>
-            </a:r>
-          </a:p>
-        </p:txBody>
-      </p:sp>
-      <p:sp>
-        <p:nvSpPr>
-          <p:cNvPr id="5" name="TextBox 4"/>
-          <p:cNvSpPr txBox="1"/>
-          <p:nvPr/>
-        </p:nvSpPr>
-        <p:spPr>
-          <a:xfrm>
-            <a:off x="10728655" y="6446520"/>
-            <a:ext cx="914400" cy="274320"/>
-          </a:xfrm>
-          <a:prstGeom prst="rect">
-            <a:avLst/>
-          </a:prstGeom>
-          <a:noFill/>
-        </p:spPr>
-        <p:txBody>
-          <a:bodyPr wrap="square" anchor="t" lIns="0" rIns="0" tIns="0" bIns="0"/>
-          <a:lstStyle/>
-          <a:p>
-            <a:pPr algn="r"/>
-            <a:r>
-              <a:rPr sz="1000" b="0" i="0">
-                <a:solidFill>
-                  <a:srgbClr val="54595D"/>
-                </a:solidFill>
-                <a:latin typeface="Calibri"/>
-              </a:rPr>
-              <a:t>7</a:t>
-            </a:r>
-          </a:p>
-        </p:txBody>
-      </p:sp>
-      <p:sp>
-        <p:nvSpPr>
-          <p:cNvPr id="6" name="TextBox 5"/>
-          <p:cNvSpPr txBox="1"/>
-          <p:nvPr/>
-        </p:nvSpPr>
-        <p:spPr>
-          <a:xfrm>
-            <a:off x="548640" y="1600200"/>
-            <a:ext cx="6675120" cy="4572000"/>
-          </a:xfrm>
-          <a:prstGeom prst="rect">
-            <a:avLst/>
-          </a:prstGeom>
-          <a:noFill/>
-        </p:spPr>
-        <p:txBody>
-          <a:bodyPr wrap="square" lIns="0" rIns="0" tIns="0" bIns="0">
-            <a:spAutoFit/>
-          </a:bodyPr>
-          <a:lstStyle/>
-          <a:p>
-            <a:pPr marL="274320" indent="-274320">
-              <a:spcAft>
-                <a:spcPts val="1080"/>
-              </a:spcAft>
-              <a:buClr>
-                <a:srgbClr val="0645AD"/>
-              </a:buClr>
-              <a:buFont typeface="Arial"/>
-              <a:buChar char="•"/>
-            </a:pPr>
-            <a:r>
-              <a:rPr sz="2400" b="0">
-                <a:solidFill>
-                  <a:srgbClr val="202122"/>
-                </a:solidFill>
-                <a:latin typeface="Calibri"/>
-              </a:rPr>
-              <a:t>Practise Gantt charts and cost plans until they are quick.</a:t>
-            </a:r>
-          </a:p>
-          <a:p>
-            <a:pPr marL="274320" indent="-274320">
-              <a:spcAft>
-                <a:spcPts val="1080"/>
-              </a:spcAft>
-              <a:buClr>
-                <a:srgbClr val="0645AD"/>
-              </a:buClr>
-              <a:buFont typeface="Arial"/>
-              <a:buChar char="•"/>
-            </a:pPr>
-            <a:r>
-              <a:rPr sz="2400" b="1">
-                <a:solidFill>
-                  <a:srgbClr val="202122"/>
-                </a:solidFill>
-                <a:latin typeface="Calibri"/>
-              </a:rPr>
-              <a:t>Get fluent in Packet Tracer:</a:t>
-            </a:r>
-            <a:r>
-              <a:rPr sz="2400" b="0">
-                <a:solidFill>
-                  <a:srgbClr val="202122"/>
-                </a:solidFill>
-                <a:latin typeface="Calibri"/>
-              </a:rPr>
-              <a:t> ping, tracert, device configuration, subnetting.</a:t>
-            </a:r>
-          </a:p>
-          <a:p>
-            <a:pPr marL="274320" indent="-274320">
-              <a:spcAft>
-                <a:spcPts val="1080"/>
-              </a:spcAft>
-              <a:buClr>
-                <a:srgbClr val="0645AD"/>
-              </a:buClr>
-              <a:buFont typeface="Arial"/>
-              <a:buChar char="•"/>
-            </a:pPr>
-            <a:r>
-              <a:rPr sz="2400" b="0">
-                <a:solidFill>
-                  <a:srgbClr val="202122"/>
-                </a:solidFill>
-                <a:latin typeface="Calibri"/>
-              </a:rPr>
-              <a:t>Practise structured troubleshooting and documenting each test.</a:t>
-            </a:r>
-          </a:p>
-          <a:p>
-            <a:pPr marL="274320" indent="-274320">
-              <a:spcAft>
-                <a:spcPts val="1080"/>
-              </a:spcAft>
-              <a:buClr>
-                <a:srgbClr val="0645AD"/>
-              </a:buClr>
-              <a:buFont typeface="Arial"/>
-              <a:buChar char="•"/>
-            </a:pPr>
-            <a:r>
-              <a:rPr sz="2400" b="0">
-                <a:solidFill>
-                  <a:srgbClr val="202122"/>
-                </a:solidFill>
-                <a:latin typeface="Calibri"/>
-              </a:rPr>
-              <a:t>Practise drawing clear network diagrams with correct symbols and IP addresses.</a:t>
-            </a:r>
-          </a:p>
-          <a:p>
-            <a:pPr marL="274320" indent="-274320">
-              <a:spcAft>
-                <a:spcPts val="1080"/>
-              </a:spcAft>
-              <a:buClr>
-                <a:srgbClr val="0645AD"/>
-              </a:buClr>
-              <a:buFont typeface="Arial"/>
-              <a:buChar char="•"/>
-            </a:pPr>
-            <a:r>
-              <a:rPr sz="2400" b="0">
-                <a:solidFill>
-                  <a:srgbClr val="202122"/>
-                </a:solidFill>
-                <a:latin typeface="Calibri"/>
-              </a:rPr>
-              <a:t>Write reflections using a model such as Gibbs.</a:t>
-            </a:r>
-          </a:p>
-        </p:txBody>
-      </p:sp>
-      <p:sp>
-        <p:nvSpPr>
-          <p:cNvPr id="7" name="Rounded Rectangle 6"/>
-          <p:cNvSpPr/>
-          <p:nvPr/>
-        </p:nvSpPr>
-        <p:spPr>
-          <a:xfrm>
-            <a:off x="7772400" y="1600200"/>
-            <a:ext cx="3867912" cy="4434840"/>
-          </a:xfrm>
-          <a:prstGeom prst="roundRect">
-            <a:avLst>
-              <a:gd name="adj" fmla="val 8000"/>
-            </a:avLst>
-          </a:prstGeom>
-          <a:solidFill>
-            <a:srgbClr val="03306E"/>
-          </a:solidFill>
-          <a:ln>
-            <a:noFill/>
-          </a:ln>
-          <a:effectLst/>
-        </p:spPr>
-        <p:style>
-          <a:lnRef idx="1">
-            <a:schemeClr val="accent1"/>
-          </a:lnRef>
-          <a:fillRef idx="3">
-            <a:schemeClr val="accent1"/>
-          </a:fillRef>
-          <a:effectRef idx="2">
-            <a:schemeClr val="accent1"/>
-          </a:effectRef>
-          <a:fontRef idx="minor">
-            <a:schemeClr val="lt1"/>
-          </a:fontRef>
-        </p:style>
-        <p:txBody>
-          <a:bodyPr rtlCol="0" anchor="ctr"/>
-          <a:lstStyle/>
-          <a:p/>
-        </p:txBody>
-      </p:sp>
-      <p:sp>
-        <p:nvSpPr>
-          <p:cNvPr id="8" name="Oval 7"/>
-          <p:cNvSpPr/>
-          <p:nvPr/>
-        </p:nvSpPr>
-        <p:spPr>
-          <a:xfrm>
-            <a:off x="8046720" y="1874519"/>
-            <a:ext cx="548640" cy="548640"/>
-          </a:xfrm>
-          <a:prstGeom prst="ellipse">
-            <a:avLst/>
-          </a:prstGeom>
-          <a:solidFill>
-            <a:srgbClr val="F2B705"/>
-          </a:solidFill>
-          <a:ln>
-            <a:noFill/>
-          </a:ln>
-          <a:effectLst/>
-        </p:spPr>
-        <p:style>
-          <a:lnRef idx="1">
-            <a:schemeClr val="accent1"/>
-          </a:lnRef>
-          <a:fillRef idx="3">
-            <a:schemeClr val="accent1"/>
-          </a:fillRef>
-          <a:effectRef idx="2">
-            <a:schemeClr val="accent1"/>
-          </a:effectRef>
-          <a:fontRef idx="minor">
-            <a:schemeClr val="lt1"/>
-          </a:fontRef>
-        </p:style>
-        <p:txBody>
-          <a:bodyPr rtlCol="0" anchor="ctr" lIns="0" rIns="0" tIns="0" bIns="0"/>
-          <a:lstStyle/>
-          <a:p>
-            <a:pPr algn="ctr"/>
-            <a:r>
-              <a:rPr sz="2000" b="1">
-                <a:solidFill>
-                  <a:srgbClr val="202122"/>
-                </a:solidFill>
-                <a:latin typeface="Calibri"/>
-              </a:rPr>
-              <a:t>!</a:t>
-            </a:r>
-          </a:p>
-        </p:txBody>
-      </p:sp>
-      <p:sp>
-        <p:nvSpPr>
-          <p:cNvPr id="9" name="TextBox 8"/>
-          <p:cNvSpPr txBox="1"/>
-          <p:nvPr/>
-        </p:nvSpPr>
-        <p:spPr>
-          <a:xfrm>
-            <a:off x="8046720" y="2606040"/>
-            <a:ext cx="3291840" cy="365760"/>
-          </a:xfrm>
-          <a:prstGeom prst="rect">
-            <a:avLst/>
-          </a:prstGeom>
-          <a:noFill/>
-        </p:spPr>
-        <p:txBody>
-          <a:bodyPr wrap="square" anchor="t" lIns="0" rIns="0" tIns="0" bIns="0"/>
-          <a:lstStyle/>
-          <a:p>
-            <a:pPr algn="l"/>
-            <a:r>
-              <a:rPr sz="1300" b="1" i="0">
-                <a:solidFill>
-                  <a:srgbClr val="A9C8F0"/>
-                </a:solidFill>
-                <a:latin typeface="Calibri"/>
-              </a:rPr>
-              <a:t>KEY IDEA</a:t>
-            </a:r>
-          </a:p>
-        </p:txBody>
-      </p:sp>
-      <p:sp>
-        <p:nvSpPr>
-          <p:cNvPr id="10" name="TextBox 9"/>
-          <p:cNvSpPr txBox="1"/>
-          <p:nvPr/>
-        </p:nvSpPr>
-        <p:spPr>
-          <a:xfrm>
-            <a:off x="8046720" y="3017520"/>
-            <a:ext cx="3291840" cy="2926080"/>
-          </a:xfrm>
-          <a:prstGeom prst="rect">
-            <a:avLst/>
-          </a:prstGeom>
-          <a:noFill/>
-        </p:spPr>
-        <p:txBody>
-          <a:bodyPr wrap="square" anchor="t" lIns="0" rIns="0" tIns="0" bIns="0"/>
-          <a:lstStyle/>
-          <a:p>
-            <a:pPr algn="l"/>
-            <a:r>
-              <a:rPr sz="2200" b="0" i="0">
-                <a:solidFill>
-                  <a:srgbClr val="FFFFFF"/>
-                </a:solidFill>
-                <a:latin typeface="Cambria"/>
-              </a:rPr>
-              <a:t>Document as you go. Marks come from the evidence you record, not just from fixing the fault.</a:t>
-            </a:r>
-          </a:p>
-        </p:txBody>
-      </p:sp>
-    </p:spTree>
-  </p:cSld>
-  <p:clrMapOvr>
-    <a:masterClrMapping/>
-  </p:clrMapOvr>
-</p:sld>
-</file>
-
-<file path=ppt/slides/slide8.xml><?xml version="1.0" encoding="utf-8"?>
-<p:sld xmlns:a="http://schemas.openxmlformats.org/drawingml/2006/main" xmlns:p="http://schemas.openxmlformats.org/presentationml/2006/main" xmlns:r="http://schemas.openxmlformats.org/officeDocument/2006/relationships">
-  <p:cSld>
-    <p:bg>
-      <p:bgPr>
-        <a:solidFill>
-          <a:srgbClr val="FFFFFF"/>
-        </a:solidFill>
-        <a:effectLst/>
-      </p:bgPr>
-    </p:bg>
-    <p:spTree>
-      <p:nvGrpSpPr>
-        <p:cNvPr id="1" name=""/>
-        <p:cNvGrpSpPr/>
-        <p:nvPr/>
-      </p:nvGrpSpPr>
-      <p:grpSpPr/>
-      <p:sp>
-        <p:nvSpPr>
-          <p:cNvPr id="2" name="TextBox 1"/>
-          <p:cNvSpPr txBox="1"/>
-          <p:nvPr/>
-        </p:nvSpPr>
-        <p:spPr>
-          <a:xfrm>
-            <a:off x="548640" y="320040"/>
-            <a:ext cx="11094415" cy="274320"/>
-          </a:xfrm>
-          <a:prstGeom prst="rect">
-            <a:avLst/>
-          </a:prstGeom>
-          <a:noFill/>
-        </p:spPr>
-        <p:txBody>
-          <a:bodyPr wrap="square" anchor="t" lIns="0" rIns="0" tIns="0" bIns="0"/>
-          <a:lstStyle/>
-          <a:p>
-            <a:pPr algn="l"/>
-            <a:r>
-              <a:rPr sz="1100" b="1" i="0">
-                <a:solidFill>
-                  <a:srgbClr val="54595D"/>
-                </a:solidFill>
-                <a:latin typeface="Calibri"/>
-              </a:rPr>
-              <a:t>CORE COMPONENT  ·  Core Component</a:t>
-            </a:r>
-          </a:p>
-        </p:txBody>
-      </p:sp>
-      <p:sp>
-        <p:nvSpPr>
-          <p:cNvPr id="3" name="TextBox 2"/>
-          <p:cNvSpPr txBox="1"/>
-          <p:nvPr/>
-        </p:nvSpPr>
-        <p:spPr>
-          <a:xfrm>
-            <a:off x="548640" y="566928"/>
-            <a:ext cx="11094415" cy="822960"/>
-          </a:xfrm>
-          <a:prstGeom prst="rect">
-            <a:avLst/>
-          </a:prstGeom>
-          <a:noFill/>
-        </p:spPr>
-        <p:txBody>
-          <a:bodyPr wrap="square" anchor="ctr" lIns="0" rIns="0" tIns="0" bIns="0"/>
-          <a:lstStyle/>
-          <a:p>
-            <a:pPr algn="l"/>
-            <a:r>
-              <a:rPr sz="3200" b="1" i="0">
-                <a:solidFill>
-                  <a:srgbClr val="03306E"/>
-                </a:solidFill>
-                <a:latin typeface="Cambria"/>
-              </a:rPr>
-              <a:t>Check your understanding</a:t>
-            </a:r>
-          </a:p>
-        </p:txBody>
-      </p:sp>
-      <p:sp>
-        <p:nvSpPr>
-          <p:cNvPr id="4" name="TextBox 3"/>
-          <p:cNvSpPr txBox="1"/>
-          <p:nvPr/>
-        </p:nvSpPr>
-        <p:spPr>
-          <a:xfrm>
-            <a:off x="548640" y="6446520"/>
-            <a:ext cx="8229600" cy="274320"/>
-          </a:xfrm>
-          <a:prstGeom prst="rect">
-            <a:avLst/>
-          </a:prstGeom>
-          <a:noFill/>
-        </p:spPr>
-        <p:txBody>
-          <a:bodyPr wrap="square" anchor="t" lIns="0" rIns="0" tIns="0" bIns="0"/>
-          <a:lstStyle/>
-          <a:p>
-            <a:pPr algn="l"/>
-            <a:r>
-              <a:rPr sz="1000" b="0" i="0">
-                <a:solidFill>
-                  <a:srgbClr val="54595D"/>
-                </a:solidFill>
-                <a:latin typeface="Calibri"/>
-              </a:rPr>
-              <a:t>Digital Support and Security T Level  ·  The Employer Set Project</a:t>
-            </a:r>
-          </a:p>
-        </p:txBody>
-      </p:sp>
-      <p:sp>
-        <p:nvSpPr>
-          <p:cNvPr id="5" name="TextBox 4"/>
-          <p:cNvSpPr txBox="1"/>
-          <p:nvPr/>
-        </p:nvSpPr>
-        <p:spPr>
-          <a:xfrm>
-            <a:off x="10728655" y="6446520"/>
-            <a:ext cx="914400" cy="274320"/>
-          </a:xfrm>
-          <a:prstGeom prst="rect">
-            <a:avLst/>
-          </a:prstGeom>
-          <a:noFill/>
-        </p:spPr>
-        <p:txBody>
-          <a:bodyPr wrap="square" anchor="t" lIns="0" rIns="0" tIns="0" bIns="0"/>
-          <a:lstStyle/>
-          <a:p>
-            <a:pPr algn="r"/>
-            <a:r>
-              <a:rPr sz="1000" b="0" i="0">
-                <a:solidFill>
-                  <a:srgbClr val="54595D"/>
-                </a:solidFill>
-                <a:latin typeface="Calibri"/>
-              </a:rPr>
-              <a:t>8</a:t>
-            </a:r>
-          </a:p>
-        </p:txBody>
-      </p:sp>
-      <p:sp>
-        <p:nvSpPr>
-          <p:cNvPr id="6" name="Oval 5"/>
-          <p:cNvSpPr/>
-          <p:nvPr/>
-        </p:nvSpPr>
-        <p:spPr>
-          <a:xfrm>
-            <a:off x="548640" y="1618488"/>
-            <a:ext cx="411480" cy="411480"/>
-          </a:xfrm>
-          <a:prstGeom prst="ellipse">
-            <a:avLst/>
-          </a:prstGeom>
-          <a:solidFill>
-            <a:srgbClr val="F2B705"/>
-          </a:solidFill>
-          <a:ln>
-            <a:noFill/>
-          </a:ln>
-          <a:effectLst/>
-        </p:spPr>
-        <p:style>
-          <a:lnRef idx="1">
-            <a:schemeClr val="accent1"/>
-          </a:lnRef>
-          <a:fillRef idx="3">
-            <a:schemeClr val="accent1"/>
-          </a:fillRef>
-          <a:effectRef idx="2">
-            <a:schemeClr val="accent1"/>
-          </a:effectRef>
-          <a:fontRef idx="minor">
-            <a:schemeClr val="lt1"/>
-          </a:fontRef>
-        </p:style>
-        <p:txBody>
-          <a:bodyPr rtlCol="0" anchor="ctr" lIns="0" rIns="0" tIns="0" bIns="0"/>
-          <a:lstStyle/>
-          <a:p>
-            <a:pPr algn="ctr"/>
-            <a:r>
-              <a:rPr sz="1400" b="1">
-                <a:solidFill>
-                  <a:srgbClr val="202122"/>
-                </a:solidFill>
-                <a:latin typeface="Calibri"/>
-              </a:rPr>
-              <a:t>1</a:t>
-            </a:r>
-          </a:p>
-        </p:txBody>
-      </p:sp>
-      <p:sp>
-        <p:nvSpPr>
-          <p:cNvPr id="7" name="TextBox 6"/>
-          <p:cNvSpPr txBox="1"/>
-          <p:nvPr/>
-        </p:nvSpPr>
-        <p:spPr>
-          <a:xfrm>
-            <a:off x="1234440" y="1600200"/>
-            <a:ext cx="10408615" cy="1030986"/>
-          </a:xfrm>
-          <a:prstGeom prst="rect">
-            <a:avLst/>
-          </a:prstGeom>
-          <a:noFill/>
-        </p:spPr>
-        <p:txBody>
-          <a:bodyPr wrap="square" anchor="t" lIns="0" rIns="0" tIns="0" bIns="0"/>
-          <a:lstStyle/>
-          <a:p>
-            <a:pPr algn="l"/>
-            <a:r>
-              <a:rPr sz="2200" b="0" i="0">
-                <a:solidFill>
-                  <a:srgbClr val="202122"/>
-                </a:solidFill>
-                <a:latin typeface="Calibri"/>
-              </a:rPr>
-              <a:t>What percentage of the total qualification is the ESP?</a:t>
-            </a:r>
-          </a:p>
-        </p:txBody>
-      </p:sp>
-      <p:sp>
-        <p:nvSpPr>
-          <p:cNvPr id="8" name="Oval 7"/>
-          <p:cNvSpPr/>
-          <p:nvPr/>
-        </p:nvSpPr>
-        <p:spPr>
-          <a:xfrm>
-            <a:off x="548640" y="2814066"/>
-            <a:ext cx="411480" cy="411480"/>
-          </a:xfrm>
-          <a:prstGeom prst="ellipse">
-            <a:avLst/>
-          </a:prstGeom>
-          <a:solidFill>
-            <a:srgbClr val="F2B705"/>
-          </a:solidFill>
-          <a:ln>
-            <a:noFill/>
-          </a:ln>
-          <a:effectLst/>
-        </p:spPr>
-        <p:style>
-          <a:lnRef idx="1">
-            <a:schemeClr val="accent1"/>
-          </a:lnRef>
-          <a:fillRef idx="3">
-            <a:schemeClr val="accent1"/>
-          </a:fillRef>
-          <a:effectRef idx="2">
-            <a:schemeClr val="accent1"/>
-          </a:effectRef>
-          <a:fontRef idx="minor">
-            <a:schemeClr val="lt1"/>
-          </a:fontRef>
-        </p:style>
-        <p:txBody>
-          <a:bodyPr rtlCol="0" anchor="ctr" lIns="0" rIns="0" tIns="0" bIns="0"/>
-          <a:lstStyle/>
-          <a:p>
-            <a:pPr algn="ctr"/>
-            <a:r>
-              <a:rPr sz="1400" b="1">
-                <a:solidFill>
-                  <a:srgbClr val="202122"/>
-                </a:solidFill>
-                <a:latin typeface="Calibri"/>
-              </a:rPr>
-              <a:t>2</a:t>
-            </a:r>
-          </a:p>
-        </p:txBody>
-      </p:sp>
-      <p:sp>
-        <p:nvSpPr>
-          <p:cNvPr id="9" name="TextBox 8"/>
-          <p:cNvSpPr txBox="1"/>
-          <p:nvPr/>
-        </p:nvSpPr>
-        <p:spPr>
-          <a:xfrm>
-            <a:off x="1234440" y="2795778"/>
-            <a:ext cx="10408615" cy="1030986"/>
-          </a:xfrm>
-          <a:prstGeom prst="rect">
-            <a:avLst/>
-          </a:prstGeom>
-          <a:noFill/>
-        </p:spPr>
-        <p:txBody>
-          <a:bodyPr wrap="square" anchor="t" lIns="0" rIns="0" tIns="0" bIns="0"/>
-          <a:lstStyle/>
-          <a:p>
-            <a:pPr algn="l"/>
-            <a:r>
-              <a:rPr sz="2200" b="0" i="0">
-                <a:solidFill>
-                  <a:srgbClr val="202122"/>
-                </a:solidFill>
-                <a:latin typeface="Calibri"/>
-              </a:rPr>
-              <a:t>What two planning documents does Task 1 require, apart from the rationale?</a:t>
-            </a:r>
-          </a:p>
-        </p:txBody>
-      </p:sp>
-      <p:sp>
-        <p:nvSpPr>
-          <p:cNvPr id="10" name="Oval 9"/>
-          <p:cNvSpPr/>
-          <p:nvPr/>
-        </p:nvSpPr>
-        <p:spPr>
-          <a:xfrm>
-            <a:off x="548640" y="4009644"/>
-            <a:ext cx="411480" cy="411480"/>
-          </a:xfrm>
-          <a:prstGeom prst="ellipse">
-            <a:avLst/>
-          </a:prstGeom>
-          <a:solidFill>
-            <a:srgbClr val="F2B705"/>
-          </a:solidFill>
-          <a:ln>
-            <a:noFill/>
-          </a:ln>
-          <a:effectLst/>
-        </p:spPr>
-        <p:style>
-          <a:lnRef idx="1">
-            <a:schemeClr val="accent1"/>
-          </a:lnRef>
-          <a:fillRef idx="3">
-            <a:schemeClr val="accent1"/>
-          </a:fillRef>
-          <a:effectRef idx="2">
-            <a:schemeClr val="accent1"/>
-          </a:effectRef>
-          <a:fontRef idx="minor">
-            <a:schemeClr val="lt1"/>
-          </a:fontRef>
-        </p:style>
-        <p:txBody>
-          <a:bodyPr rtlCol="0" anchor="ctr" lIns="0" rIns="0" tIns="0" bIns="0"/>
-          <a:lstStyle/>
-          <a:p>
-            <a:pPr algn="ctr"/>
-            <a:r>
-              <a:rPr sz="1400" b="1">
-                <a:solidFill>
-                  <a:srgbClr val="202122"/>
-                </a:solidFill>
-                <a:latin typeface="Calibri"/>
-              </a:rPr>
-              <a:t>3</a:t>
-            </a:r>
-          </a:p>
-        </p:txBody>
-      </p:sp>
-      <p:sp>
-        <p:nvSpPr>
-          <p:cNvPr id="11" name="TextBox 10"/>
-          <p:cNvSpPr txBox="1"/>
-          <p:nvPr/>
-        </p:nvSpPr>
-        <p:spPr>
-          <a:xfrm>
-            <a:off x="1234440" y="3991356"/>
-            <a:ext cx="10408615" cy="1030986"/>
-          </a:xfrm>
-          <a:prstGeom prst="rect">
-            <a:avLst/>
-          </a:prstGeom>
-          <a:noFill/>
-        </p:spPr>
-        <p:txBody>
-          <a:bodyPr wrap="square" anchor="t" lIns="0" rIns="0" tIns="0" bIns="0"/>
-          <a:lstStyle/>
-          <a:p>
-            <a:pPr algn="l"/>
-            <a:r>
-              <a:rPr sz="2200" b="0" i="0">
-                <a:solidFill>
-                  <a:srgbClr val="202122"/>
-                </a:solidFill>
-                <a:latin typeface="Calibri"/>
-              </a:rPr>
-              <a:t>What does the Cyber Security pathway produce in Task 3?</a:t>
-            </a:r>
-          </a:p>
-        </p:txBody>
-      </p:sp>
-      <p:sp>
-        <p:nvSpPr>
-          <p:cNvPr id="12" name="Oval 11"/>
-          <p:cNvSpPr/>
-          <p:nvPr/>
-        </p:nvSpPr>
-        <p:spPr>
-          <a:xfrm>
-            <a:off x="548640" y="5205221"/>
-            <a:ext cx="411480" cy="411480"/>
-          </a:xfrm>
-          <a:prstGeom prst="ellipse">
-            <a:avLst/>
-          </a:prstGeom>
-          <a:solidFill>
-            <a:srgbClr val="F2B705"/>
-          </a:solidFill>
-          <a:ln>
-            <a:noFill/>
-          </a:ln>
-          <a:effectLst/>
-        </p:spPr>
-        <p:style>
-          <a:lnRef idx="1">
-            <a:schemeClr val="accent1"/>
-          </a:lnRef>
-          <a:fillRef idx="3">
-            <a:schemeClr val="accent1"/>
-          </a:fillRef>
-          <a:effectRef idx="2">
-            <a:schemeClr val="accent1"/>
-          </a:effectRef>
-          <a:fontRef idx="minor">
-            <a:schemeClr val="lt1"/>
-          </a:fontRef>
-        </p:style>
-        <p:txBody>
-          <a:bodyPr rtlCol="0" anchor="ctr" lIns="0" rIns="0" tIns="0" bIns="0"/>
-          <a:lstStyle/>
-          <a:p>
-            <a:pPr algn="ctr"/>
-            <a:r>
-              <a:rPr sz="1400" b="1">
-                <a:solidFill>
-                  <a:srgbClr val="202122"/>
-                </a:solidFill>
-                <a:latin typeface="Calibri"/>
-              </a:rPr>
-              <a:t>4</a:t>
-            </a:r>
-          </a:p>
-        </p:txBody>
-      </p:sp>
-      <p:sp>
-        <p:nvSpPr>
-          <p:cNvPr id="13" name="TextBox 12"/>
-          <p:cNvSpPr txBox="1"/>
-          <p:nvPr/>
-        </p:nvSpPr>
-        <p:spPr>
-          <a:xfrm>
-            <a:off x="1234440" y="5186933"/>
-            <a:ext cx="10408615" cy="1030986"/>
-          </a:xfrm>
-          <a:prstGeom prst="rect">
-            <a:avLst/>
-          </a:prstGeom>
-          <a:noFill/>
-        </p:spPr>
-        <p:txBody>
-          <a:bodyPr wrap="square" anchor="t" lIns="0" rIns="0" tIns="0" bIns="0"/>
-          <a:lstStyle/>
-          <a:p>
-            <a:pPr algn="l"/>
-            <a:r>
-              <a:rPr sz="2200" b="0" i="0">
-                <a:solidFill>
-                  <a:srgbClr val="202122"/>
-                </a:solidFill>
-                <a:latin typeface="Calibri"/>
-              </a:rPr>
-              <a:t>Name the four considerations in Task 4a.</a:t>
-            </a:r>
-          </a:p>
-        </p:txBody>
-      </p:sp>
-    </p:spTree>
-  </p:cSld>
-  <p:clrMapOvr>
-    <a:masterClrMapping/>
-  </p:clrMapOvr>
-</p:sld>
-</file>
-
-<file path=ppt/slides/slide9.xml><?xml version="1.0" encoding="utf-8"?>
-<p:sld xmlns:a="http://schemas.openxmlformats.org/drawingml/2006/main" xmlns:p="http://schemas.openxmlformats.org/presentationml/2006/main" xmlns:r="http://schemas.openxmlformats.org/officeDocument/2006/relationships">
-  <p:cSld>
-    <p:bg>
-      <p:bgPr>
-        <a:solidFill>
-          <a:srgbClr val="FFFFFF"/>
-        </a:solidFill>
-        <a:effectLst/>
-      </p:bgPr>
-    </p:bg>
-    <p:spTree>
-      <p:nvGrpSpPr>
-        <p:cNvPr id="1" name=""/>
-        <p:cNvGrpSpPr/>
-        <p:nvPr/>
-      </p:nvGrpSpPr>
-      <p:grpSpPr/>
-      <p:sp>
-        <p:nvSpPr>
-          <p:cNvPr id="2" name="TextBox 1"/>
-          <p:cNvSpPr txBox="1"/>
-          <p:nvPr/>
-        </p:nvSpPr>
-        <p:spPr>
-          <a:xfrm>
-            <a:off x="548640" y="320040"/>
-            <a:ext cx="11094415" cy="274320"/>
-          </a:xfrm>
-          <a:prstGeom prst="rect">
-            <a:avLst/>
-          </a:prstGeom>
-          <a:noFill/>
-        </p:spPr>
-        <p:txBody>
-          <a:bodyPr wrap="square" anchor="t" lIns="0" rIns="0" tIns="0" bIns="0"/>
-          <a:lstStyle/>
-          <a:p>
-            <a:pPr algn="l"/>
-            <a:r>
-              <a:rPr sz="1100" b="1" i="0">
-                <a:solidFill>
-                  <a:srgbClr val="54595D"/>
-                </a:solidFill>
-                <a:latin typeface="Calibri"/>
-              </a:rPr>
-              <a:t>CORE COMPONENT  ·  Core Component</a:t>
-            </a:r>
-          </a:p>
-        </p:txBody>
-      </p:sp>
-      <p:sp>
-        <p:nvSpPr>
-          <p:cNvPr id="3" name="TextBox 2"/>
-          <p:cNvSpPr txBox="1"/>
-          <p:nvPr/>
-        </p:nvSpPr>
-        <p:spPr>
-          <a:xfrm>
-            <a:off x="548640" y="566928"/>
-            <a:ext cx="11094415" cy="822960"/>
-          </a:xfrm>
-          <a:prstGeom prst="rect">
-            <a:avLst/>
-          </a:prstGeom>
-          <a:noFill/>
-        </p:spPr>
-        <p:txBody>
-          <a:bodyPr wrap="square" anchor="ctr" lIns="0" rIns="0" tIns="0" bIns="0"/>
-          <a:lstStyle/>
-          <a:p>
-            <a:pPr algn="l"/>
-            <a:r>
-              <a:rPr sz="3200" b="1" i="0">
-                <a:solidFill>
-                  <a:srgbClr val="03306E"/>
-                </a:solidFill>
-                <a:latin typeface="Cambria"/>
-              </a:rPr>
-              <a:t>Answers</a:t>
-            </a:r>
-          </a:p>
-        </p:txBody>
-      </p:sp>
-      <p:sp>
-        <p:nvSpPr>
-          <p:cNvPr id="4" name="TextBox 3"/>
-          <p:cNvSpPr txBox="1"/>
-          <p:nvPr/>
-        </p:nvSpPr>
-        <p:spPr>
-          <a:xfrm>
-            <a:off x="548640" y="6446520"/>
-            <a:ext cx="8229600" cy="274320"/>
-          </a:xfrm>
-          <a:prstGeom prst="rect">
-            <a:avLst/>
-          </a:prstGeom>
-          <a:noFill/>
-        </p:spPr>
-        <p:txBody>
-          <a:bodyPr wrap="square" anchor="t" lIns="0" rIns="0" tIns="0" bIns="0"/>
-          <a:lstStyle/>
-          <a:p>
-            <a:pPr algn="l"/>
-            <a:r>
-              <a:rPr sz="1000" b="0" i="0">
-                <a:solidFill>
-                  <a:srgbClr val="54595D"/>
-                </a:solidFill>
-                <a:latin typeface="Calibri"/>
-              </a:rPr>
-              <a:t>Digital Support and Security T Level  ·  The Employer Set Project</a:t>
-            </a:r>
-          </a:p>
-        </p:txBody>
-      </p:sp>
-      <p:sp>
-        <p:nvSpPr>
-          <p:cNvPr id="5" name="TextBox 4"/>
-          <p:cNvSpPr txBox="1"/>
-          <p:nvPr/>
-        </p:nvSpPr>
-        <p:spPr>
-          <a:xfrm>
-            <a:off x="10728655" y="6446520"/>
-            <a:ext cx="914400" cy="274320"/>
-          </a:xfrm>
-          <a:prstGeom prst="rect">
-            <a:avLst/>
-          </a:prstGeom>
-          <a:noFill/>
-        </p:spPr>
-        <p:txBody>
-          <a:bodyPr wrap="square" anchor="t" lIns="0" rIns="0" tIns="0" bIns="0"/>
-          <a:lstStyle/>
-          <a:p>
-            <a:pPr algn="r"/>
-            <a:r>
-              <a:rPr sz="1000" b="0" i="0">
-                <a:solidFill>
-                  <a:srgbClr val="54595D"/>
-                </a:solidFill>
-                <a:latin typeface="Calibri"/>
-              </a:rPr>
-              <a:t>9</a:t>
-            </a:r>
-          </a:p>
-        </p:txBody>
-      </p:sp>
-      <p:sp>
-        <p:nvSpPr>
-          <p:cNvPr id="6" name="Oval 5"/>
-          <p:cNvSpPr/>
-          <p:nvPr/>
-        </p:nvSpPr>
-        <p:spPr>
-          <a:xfrm>
-            <a:off x="548640" y="1618488"/>
-            <a:ext cx="411480" cy="411480"/>
-          </a:xfrm>
-          <a:prstGeom prst="ellipse">
-            <a:avLst/>
-          </a:prstGeom>
-          <a:solidFill>
-            <a:srgbClr val="F2B705"/>
-          </a:solidFill>
-          <a:ln>
-            <a:noFill/>
-          </a:ln>
-          <a:effectLst/>
-        </p:spPr>
-        <p:style>
-          <a:lnRef idx="1">
-            <a:schemeClr val="accent1"/>
-          </a:lnRef>
-          <a:fillRef idx="3">
-            <a:schemeClr val="accent1"/>
-          </a:fillRef>
-          <a:effectRef idx="2">
-            <a:schemeClr val="accent1"/>
-          </a:effectRef>
-          <a:fontRef idx="minor">
-            <a:schemeClr val="lt1"/>
-          </a:fontRef>
-        </p:style>
-        <p:txBody>
-          <a:bodyPr rtlCol="0" anchor="ctr" lIns="0" rIns="0" tIns="0" bIns="0"/>
-          <a:lstStyle/>
-          <a:p>
-            <a:pPr algn="ctr"/>
-            <a:r>
-              <a:rPr sz="1400" b="1">
-                <a:solidFill>
-                  <a:srgbClr val="202122"/>
-                </a:solidFill>
-                <a:latin typeface="Calibri"/>
-              </a:rPr>
-              <a:t>1</a:t>
-            </a:r>
-          </a:p>
-        </p:txBody>
-      </p:sp>
-      <p:sp>
-        <p:nvSpPr>
-          <p:cNvPr id="7" name="TextBox 6"/>
-          <p:cNvSpPr txBox="1"/>
-          <p:nvPr/>
-        </p:nvSpPr>
-        <p:spPr>
-          <a:xfrm>
-            <a:off x="1234440" y="1600200"/>
-            <a:ext cx="10408615" cy="1030986"/>
-          </a:xfrm>
-          <a:prstGeom prst="rect">
-            <a:avLst/>
-          </a:prstGeom>
-          <a:noFill/>
-        </p:spPr>
-        <p:txBody>
-          <a:bodyPr wrap="square" anchor="t" lIns="0" rIns="0" tIns="0" bIns="0"/>
-          <a:lstStyle/>
-          <a:p>
-            <a:pPr algn="l"/>
-            <a:r>
-              <a:rPr sz="1800" b="0" i="0">
-                <a:solidFill>
-                  <a:srgbClr val="54595D"/>
-                </a:solidFill>
-                <a:latin typeface="Calibri"/>
-              </a:rPr>
-              <a:t>What percentage of the total qualification is the ESP?</a:t>
-            </a:r>
-          </a:p>
-          <a:p>
-            <a:r>
-              <a:rPr sz="1800" b="1">
-                <a:solidFill>
-                  <a:srgbClr val="03306E"/>
-                </a:solidFill>
-                <a:latin typeface="Calibri"/>
-              </a:rPr>
-              <a:t>20%.</a:t>
-            </a:r>
-          </a:p>
-        </p:txBody>
-      </p:sp>
-      <p:sp>
-        <p:nvSpPr>
-          <p:cNvPr id="8" name="Oval 7"/>
-          <p:cNvSpPr/>
-          <p:nvPr/>
-        </p:nvSpPr>
-        <p:spPr>
-          <a:xfrm>
-            <a:off x="548640" y="2814066"/>
-            <a:ext cx="411480" cy="411480"/>
-          </a:xfrm>
-          <a:prstGeom prst="ellipse">
-            <a:avLst/>
-          </a:prstGeom>
-          <a:solidFill>
-            <a:srgbClr val="F2B705"/>
-          </a:solidFill>
-          <a:ln>
-            <a:noFill/>
-          </a:ln>
-          <a:effectLst/>
-        </p:spPr>
-        <p:style>
-          <a:lnRef idx="1">
-            <a:schemeClr val="accent1"/>
-          </a:lnRef>
-          <a:fillRef idx="3">
-            <a:schemeClr val="accent1"/>
-          </a:fillRef>
-          <a:effectRef idx="2">
-            <a:schemeClr val="accent1"/>
-          </a:effectRef>
-          <a:fontRef idx="minor">
-            <a:schemeClr val="lt1"/>
-          </a:fontRef>
-        </p:style>
-        <p:txBody>
-          <a:bodyPr rtlCol="0" anchor="ctr" lIns="0" rIns="0" tIns="0" bIns="0"/>
-          <a:lstStyle/>
-          <a:p>
-            <a:pPr algn="ctr"/>
-            <a:r>
-              <a:rPr sz="1400" b="1">
-                <a:solidFill>
-                  <a:srgbClr val="202122"/>
-                </a:solidFill>
-                <a:latin typeface="Calibri"/>
-              </a:rPr>
-              <a:t>2</a:t>
-            </a:r>
-          </a:p>
-        </p:txBody>
-      </p:sp>
-      <p:sp>
-        <p:nvSpPr>
-          <p:cNvPr id="9" name="TextBox 8"/>
-          <p:cNvSpPr txBox="1"/>
-          <p:nvPr/>
-        </p:nvSpPr>
-        <p:spPr>
-          <a:xfrm>
-            <a:off x="1234440" y="2795778"/>
-            <a:ext cx="10408615" cy="1030986"/>
-          </a:xfrm>
-          <a:prstGeom prst="rect">
-            <a:avLst/>
-          </a:prstGeom>
-          <a:noFill/>
-        </p:spPr>
-        <p:txBody>
-          <a:bodyPr wrap="square" anchor="t" lIns="0" rIns="0" tIns="0" bIns="0"/>
-          <a:lstStyle/>
-          <a:p>
-            <a:pPr algn="l"/>
-            <a:r>
-              <a:rPr sz="1800" b="0" i="0">
-                <a:solidFill>
-                  <a:srgbClr val="54595D"/>
-                </a:solidFill>
-                <a:latin typeface="Calibri"/>
-              </a:rPr>
-              <a:t>What two planning documents does Task 1 require, apart from the rationale?</a:t>
-            </a:r>
-          </a:p>
-          <a:p>
-            <a:r>
-              <a:rPr sz="1800" b="1">
-                <a:solidFill>
-                  <a:srgbClr val="03306E"/>
-                </a:solidFill>
-                <a:latin typeface="Calibri"/>
-              </a:rPr>
-              <a:t>A Gantt chart and a resource and cost plan.</a:t>
-            </a:r>
-          </a:p>
-        </p:txBody>
-      </p:sp>
-      <p:sp>
-        <p:nvSpPr>
-          <p:cNvPr id="10" name="Oval 9"/>
-          <p:cNvSpPr/>
-          <p:nvPr/>
-        </p:nvSpPr>
-        <p:spPr>
-          <a:xfrm>
-            <a:off x="548640" y="4009644"/>
-            <a:ext cx="411480" cy="411480"/>
-          </a:xfrm>
-          <a:prstGeom prst="ellipse">
-            <a:avLst/>
-          </a:prstGeom>
-          <a:solidFill>
-            <a:srgbClr val="F2B705"/>
-          </a:solidFill>
-          <a:ln>
-            <a:noFill/>
-          </a:ln>
-          <a:effectLst/>
-        </p:spPr>
-        <p:style>
-          <a:lnRef idx="1">
-            <a:schemeClr val="accent1"/>
-          </a:lnRef>
-          <a:fillRef idx="3">
-            <a:schemeClr val="accent1"/>
-          </a:fillRef>
-          <a:effectRef idx="2">
-            <a:schemeClr val="accent1"/>
-          </a:effectRef>
-          <a:fontRef idx="minor">
-            <a:schemeClr val="lt1"/>
-          </a:fontRef>
-        </p:style>
-        <p:txBody>
-          <a:bodyPr rtlCol="0" anchor="ctr" lIns="0" rIns="0" tIns="0" bIns="0"/>
-          <a:lstStyle/>
-          <a:p>
-            <a:pPr algn="ctr"/>
-            <a:r>
-              <a:rPr sz="1400" b="1">
-                <a:solidFill>
-                  <a:srgbClr val="202122"/>
-                </a:solidFill>
-                <a:latin typeface="Calibri"/>
-              </a:rPr>
-              <a:t>3</a:t>
-            </a:r>
-          </a:p>
-        </p:txBody>
-      </p:sp>
-      <p:sp>
-        <p:nvSpPr>
-          <p:cNvPr id="11" name="TextBox 10"/>
-          <p:cNvSpPr txBox="1"/>
-          <p:nvPr/>
-        </p:nvSpPr>
-        <p:spPr>
-          <a:xfrm>
-            <a:off x="1234440" y="3991356"/>
-            <a:ext cx="10408615" cy="1030986"/>
-          </a:xfrm>
-          <a:prstGeom prst="rect">
-            <a:avLst/>
-          </a:prstGeom>
-          <a:noFill/>
-        </p:spPr>
-        <p:txBody>
-          <a:bodyPr wrap="square" anchor="t" lIns="0" rIns="0" tIns="0" bIns="0"/>
-          <a:lstStyle/>
-          <a:p>
-            <a:pPr algn="l"/>
-            <a:r>
-              <a:rPr sz="1800" b="0" i="0">
-                <a:solidFill>
-                  <a:srgbClr val="54595D"/>
-                </a:solidFill>
-                <a:latin typeface="Calibri"/>
-              </a:rPr>
-              <a:t>What does the Cyber Security pathway produce in Task 3?</a:t>
-            </a:r>
-          </a:p>
-          <a:p>
-            <a:r>
-              <a:rPr sz="1800" b="1">
-                <a:solidFill>
-                  <a:srgbClr val="03306E"/>
-                </a:solidFill>
-                <a:latin typeface="Calibri"/>
-              </a:rPr>
-              <a:t>A security plan.</a:t>
-            </a:r>
-          </a:p>
-        </p:txBody>
-      </p:sp>
-      <p:sp>
-        <p:nvSpPr>
-          <p:cNvPr id="12" name="Oval 11"/>
-          <p:cNvSpPr/>
-          <p:nvPr/>
-        </p:nvSpPr>
-        <p:spPr>
-          <a:xfrm>
-            <a:off x="548640" y="5205221"/>
-            <a:ext cx="411480" cy="411480"/>
-          </a:xfrm>
-          <a:prstGeom prst="ellipse">
-            <a:avLst/>
-          </a:prstGeom>
-          <a:solidFill>
-            <a:srgbClr val="F2B705"/>
-          </a:solidFill>
-          <a:ln>
-            <a:noFill/>
-          </a:ln>
-          <a:effectLst/>
-        </p:spPr>
-        <p:style>
-          <a:lnRef idx="1">
-            <a:schemeClr val="accent1"/>
-          </a:lnRef>
-          <a:fillRef idx="3">
-            <a:schemeClr val="accent1"/>
-          </a:fillRef>
-          <a:effectRef idx="2">
-            <a:schemeClr val="accent1"/>
-          </a:effectRef>
-          <a:fontRef idx="minor">
-            <a:schemeClr val="lt1"/>
-          </a:fontRef>
-        </p:style>
-        <p:txBody>
-          <a:bodyPr rtlCol="0" anchor="ctr" lIns="0" rIns="0" tIns="0" bIns="0"/>
-          <a:lstStyle/>
-          <a:p>
-            <a:pPr algn="ctr"/>
-            <a:r>
-              <a:rPr sz="1400" b="1">
-                <a:solidFill>
-                  <a:srgbClr val="202122"/>
-                </a:solidFill>
-                <a:latin typeface="Calibri"/>
-              </a:rPr>
-              <a:t>4</a:t>
-            </a:r>
-          </a:p>
-        </p:txBody>
-      </p:sp>
-      <p:sp>
-        <p:nvSpPr>
-          <p:cNvPr id="13" name="TextBox 12"/>
-          <p:cNvSpPr txBox="1"/>
-          <p:nvPr/>
-        </p:nvSpPr>
-        <p:spPr>
-          <a:xfrm>
-            <a:off x="1234440" y="5186933"/>
-            <a:ext cx="10408615" cy="1030986"/>
-          </a:xfrm>
-          <a:prstGeom prst="rect">
-            <a:avLst/>
-          </a:prstGeom>
-          <a:noFill/>
-        </p:spPr>
-        <p:txBody>
-          <a:bodyPr wrap="square" anchor="t" lIns="0" rIns="0" tIns="0" bIns="0"/>
-          <a:lstStyle/>
-          <a:p>
-            <a:pPr algn="l"/>
-            <a:r>
-              <a:rPr sz="1800" b="0" i="0">
-                <a:solidFill>
-                  <a:srgbClr val="54595D"/>
-                </a:solidFill>
-                <a:latin typeface="Calibri"/>
-              </a:rPr>
-              <a:t>Name the four considerations in Task 4a.</a:t>
-            </a:r>
-          </a:p>
-          <a:p>
-            <a:r>
-              <a:rPr sz="1800" b="1">
-                <a:solidFill>
-                  <a:srgbClr val="03306E"/>
-                </a:solidFill>
-                <a:latin typeface="Calibri"/>
-              </a:rPr>
-              <a:t>Robustness, security, organisation and user experience.</a:t>
-            </a:r>
-          </a:p>
-        </p:txBody>
-      </p:sp>
     </p:spTree>
   </p:cSld>
   <p:clrMapOvr>
